--- a/Guia_despliegue_Symfony_React_Hostinger.pptx
+++ b/Guia_despliegue_Symfony_React_Hostinger.pptx
@@ -7,7 +7,8 @@
   <p:sldIdLst>
     <p:sldId id="256" r:id="rId7"/>
     <p:sldId id="285" r:id="rId36"/>
-    <p:sldId id="287" r:id="rId38"/>
+    <p:sldId id="286" r:id="rId37"/>
+    <p:sldId id="288" r:id="rId39"/>
     <p:sldId id="269" r:id="rId20"/>
     <p:sldId id="282" r:id="rId33"/>
     <p:sldId id="276" r:id="rId27"/>
@@ -17,7 +18,7 @@
     <p:sldId id="274" r:id="rId25"/>
     <p:sldId id="275" r:id="rId26"/>
     <p:sldId id="258" r:id="rId9"/>
-    <p:sldId id="286" r:id="rId37"/>
+    <p:sldId id="287" r:id="rId38"/>
     <p:sldId id="279" r:id="rId30"/>
     <p:sldId id="280" r:id="rId31"/>
     <p:sldId id="281" r:id="rId32"/>
@@ -27,7 +28,7 @@
     <p:sldId id="277" r:id="rId28"/>
     <p:sldId id="278" r:id="rId29"/>
     <p:sldId id="268" r:id="rId19"/>
-    <p:sldId id="288" r:id="rId39"/>
+    <p:sldId id="289" r:id="rId40"/>
     <p:sldId id="257" r:id="rId8"/>
     <p:sldId id="259" r:id="rId10"/>
     <p:sldId id="260" r:id="rId11"/>
@@ -3799,7 +3800,7 @@
                 </a:solidFill>
                 <a:latin typeface="Aptos"/>
               </a:rPr>
-              <a:t>30</a:t>
+              <a:t>31</a:t>
             </a:r>
           </a:p>
         </p:txBody>
@@ -5325,7 +5326,7 @@
                 </a:solidFill>
                 <a:latin typeface="Aptos"/>
               </a:rPr>
-              <a:t>31</a:t>
+              <a:t>32</a:t>
             </a:r>
           </a:p>
         </p:txBody>
@@ -6801,7 +6802,7 @@
                 </a:solidFill>
                 <a:latin typeface="Aptos"/>
               </a:rPr>
-              <a:t>32</a:t>
+              <a:t>33</a:t>
             </a:r>
           </a:p>
         </p:txBody>
@@ -7562,7 +7563,7 @@
                 </a:solidFill>
                 <a:latin typeface="Aptos"/>
               </a:rPr>
-              <a:t>22</a:t>
+              <a:t>23</a:t>
             </a:r>
           </a:p>
         </p:txBody>
@@ -9020,7 +9021,7 @@
                 </a:solidFill>
                 <a:latin typeface="Aptos"/>
               </a:rPr>
-              <a:t>04</a:t>
+              <a:t>05</a:t>
             </a:r>
           </a:p>
         </p:txBody>
@@ -10204,7 +10205,7 @@
                 </a:solidFill>
                 <a:latin typeface="Aptos"/>
               </a:rPr>
-              <a:t>19</a:t>
+              <a:t>20</a:t>
             </a:r>
           </a:p>
         </p:txBody>
@@ -11653,7 +11654,7 @@
                 </a:solidFill>
                 <a:latin typeface="Aptos"/>
               </a:rPr>
-              <a:t>07</a:t>
+              <a:t>08</a:t>
             </a:r>
           </a:p>
         </p:txBody>
@@ -12853,7 +12854,7 @@
                 </a:solidFill>
                 <a:latin typeface="Aptos"/>
               </a:rPr>
-              <a:t>08</a:t>
+              <a:t>09</a:t>
             </a:r>
           </a:p>
         </p:txBody>
@@ -14117,7 +14118,7 @@
                 </a:solidFill>
                 <a:latin typeface="Aptos"/>
               </a:rPr>
-              <a:t>09</a:t>
+              <a:t>10</a:t>
             </a:r>
           </a:p>
         </p:txBody>
@@ -15059,7 +15060,7 @@
                 </a:solidFill>
                 <a:latin typeface="Aptos"/>
               </a:rPr>
-              <a:t>10</a:t>
+              <a:t>11</a:t>
             </a:r>
           </a:p>
         </p:txBody>
@@ -16521,7 +16522,7 @@
                 </a:solidFill>
                 <a:latin typeface="Aptos"/>
               </a:rPr>
-              <a:t>24</a:t>
+              <a:t>25</a:t>
             </a:r>
           </a:p>
         </p:txBody>
@@ -17488,7 +17489,7 @@
                 </a:solidFill>
                 <a:latin typeface="Aptos"/>
               </a:rPr>
-              <a:t>11</a:t>
+              <a:t>12</a:t>
             </a:r>
           </a:p>
         </p:txBody>
@@ -18692,7 +18693,7 @@
                 </a:solidFill>
                 <a:latin typeface="Aptos"/>
               </a:rPr>
-              <a:t>06</a:t>
+              <a:t>07</a:t>
             </a:r>
           </a:p>
         </p:txBody>
@@ -19754,7 +19755,7 @@
                 </a:solidFill>
                 <a:latin typeface="Aptos"/>
               </a:rPr>
-              <a:t>20</a:t>
+              <a:t>21</a:t>
             </a:r>
           </a:p>
         </p:txBody>
@@ -20934,7 +20935,7 @@
                 </a:solidFill>
                 <a:latin typeface="Aptos"/>
               </a:rPr>
-              <a:t>21</a:t>
+              <a:t>22</a:t>
             </a:r>
           </a:p>
         </p:txBody>
@@ -22124,7 +22125,7 @@
                 </a:solidFill>
                 <a:latin typeface="Aptos"/>
               </a:rPr>
-              <a:t>14</a:t>
+              <a:t>15</a:t>
             </a:r>
           </a:p>
         </p:txBody>
@@ -23602,7 +23603,7 @@
                 </a:solidFill>
                 <a:latin typeface="Aptos"/>
               </a:rPr>
-              <a:t>15</a:t>
+              <a:t>16</a:t>
             </a:r>
           </a:p>
         </p:txBody>
@@ -24483,7 +24484,7 @@
                 </a:solidFill>
                 <a:latin typeface="Aptos"/>
               </a:rPr>
-              <a:t>16</a:t>
+              <a:t>17</a:t>
             </a:r>
           </a:p>
         </p:txBody>
@@ -26043,7 +26044,7 @@
                 </a:solidFill>
                 <a:latin typeface="Aptos"/>
               </a:rPr>
-              <a:t>05</a:t>
+              <a:t>06</a:t>
             </a:r>
           </a:p>
         </p:txBody>
@@ -27144,7 +27145,7 @@
                 </a:solidFill>
                 <a:latin typeface="Aptos"/>
               </a:rPr>
-              <a:t>27</a:t>
+              <a:t>28</a:t>
             </a:r>
           </a:p>
         </p:txBody>
@@ -28585,7 +28586,7 @@
                 </a:solidFill>
                 <a:latin typeface="Aptos"/>
               </a:rPr>
-              <a:t>33</a:t>
+              <a:t>34</a:t>
             </a:r>
           </a:p>
         </p:txBody>
@@ -29225,7 +29226,7 @@
                 </a:solidFill>
                 <a:latin typeface="Aptos"/>
               </a:rPr>
-              <a:t>12</a:t>
+              <a:t>13</a:t>
             </a:r>
           </a:p>
         </p:txBody>
@@ -31176,9 +31177,868 @@
         <p:spPr>
           <a:xfrm>
             <a:off x="0" y="0"/>
-            <a:ext cx="164592" cy="6858000"/>
-          </a:xfrm>
-          <a:prstGeom prst="rect">
+            <a:ext cx="118872" cy="6858000"/>
+          </a:xfrm>
+          <a:prstGeom prst="rect">
+            <a:avLst/>
+          </a:prstGeom>
+          <a:solidFill>
+            <a:srgbClr val="53D68E"/>
+          </a:solidFill>
+          <a:ln>
+            <a:solidFill>
+              <a:srgbClr val="53D68E"/>
+            </a:solidFill>
+          </a:ln>
+        </p:spPr>
+        <p:style>
+          <a:lnRef idx="1">
+            <a:schemeClr val="accent1"/>
+          </a:lnRef>
+          <a:fillRef idx="3">
+            <a:schemeClr val="accent1"/>
+          </a:fillRef>
+          <a:effectRef idx="2">
+            <a:schemeClr val="accent1"/>
+          </a:effectRef>
+          <a:fontRef idx="minor">
+            <a:schemeClr val="lt1"/>
+          </a:fontRef>
+        </p:style>
+        <p:txBody>
+          <a:bodyPr rtlCol="0" anchor="ctr"/>
+          <a:lstStyle/>
+          <a:p>
+            <a:pPr algn="ctr"/>
+          </a:p>
+        </p:txBody>
+      </p:sp>
+      <p:sp>
+        <p:nvSpPr>
+          <p:cNvPr id="3" name="TextBox 2"/>
+          <p:cNvSpPr txBox="1"/>
+          <p:nvPr/>
+        </p:nvSpPr>
+        <p:spPr>
+          <a:xfrm>
+            <a:off x="502920" y="320040"/>
+            <a:ext cx="2743200" cy="228600"/>
+          </a:xfrm>
+          <a:prstGeom prst="rect">
+            <a:avLst/>
+          </a:prstGeom>
+          <a:noFill/>
+        </p:spPr>
+        <p:txBody>
+          <a:bodyPr wrap="none" lIns="36576" rIns="36576">
+            <a:spAutoFit/>
+          </a:bodyPr>
+          <a:lstStyle/>
+          <a:p>
+            <a:pPr algn="l"/>
+            <a:r>
+              <a:rPr sz="1000" b="1">
+                <a:solidFill>
+                  <a:srgbClr val="53D68E"/>
+                </a:solidFill>
+                <a:latin typeface="Aptos"/>
+              </a:rPr>
+              <a:t>ALTERNATIVA</a:t>
+            </a:r>
+          </a:p>
+        </p:txBody>
+      </p:sp>
+      <p:sp>
+        <p:nvSpPr>
+          <p:cNvPr id="4" name="TextBox 3"/>
+          <p:cNvSpPr txBox="1"/>
+          <p:nvPr/>
+        </p:nvSpPr>
+        <p:spPr>
+          <a:xfrm>
+            <a:off x="11109960" y="320040"/>
+            <a:ext cx="502920" cy="228600"/>
+          </a:xfrm>
+          <a:prstGeom prst="rect">
+            <a:avLst/>
+          </a:prstGeom>
+          <a:noFill/>
+        </p:spPr>
+        <p:txBody>
+          <a:bodyPr wrap="none" lIns="36576" rIns="36576">
+            <a:spAutoFit/>
+          </a:bodyPr>
+          <a:lstStyle/>
+          <a:p>
+            <a:pPr algn="r"/>
+            <a:r>
+              <a:rPr sz="1000" b="1">
+                <a:solidFill>
+                  <a:srgbClr val="B1BBCC"/>
+                </a:solidFill>
+                <a:latin typeface="Aptos"/>
+              </a:rPr>
+              <a:t>03</a:t>
+            </a:r>
+          </a:p>
+        </p:txBody>
+      </p:sp>
+      <p:sp>
+        <p:nvSpPr>
+          <p:cNvPr id="5" name="TextBox 4"/>
+          <p:cNvSpPr txBox="1"/>
+          <p:nvPr/>
+        </p:nvSpPr>
+        <p:spPr>
+          <a:xfrm>
+            <a:off x="502920" y="758952"/>
+            <a:ext cx="10698480" cy="502920"/>
+          </a:xfrm>
+          <a:prstGeom prst="rect">
+            <a:avLst/>
+          </a:prstGeom>
+          <a:noFill/>
+        </p:spPr>
+        <p:txBody>
+          <a:bodyPr wrap="none" lIns="36576" rIns="36576">
+            <a:spAutoFit/>
+          </a:bodyPr>
+          <a:lstStyle/>
+          <a:p>
+            <a:pPr algn="l"/>
+            <a:r>
+              <a:rPr sz="2700" b="1">
+                <a:solidFill>
+                  <a:srgbClr val="FFFFFF"/>
+                </a:solidFill>
+                <a:latin typeface="Aptos"/>
+              </a:rPr>
+              <a:t>También se puede ejecutar con Docker</a:t>
+            </a:r>
+          </a:p>
+        </p:txBody>
+      </p:sp>
+      <p:sp>
+        <p:nvSpPr>
+          <p:cNvPr id="6" name="TextBox 5"/>
+          <p:cNvSpPr txBox="1"/>
+          <p:nvPr/>
+        </p:nvSpPr>
+        <p:spPr>
+          <a:xfrm>
+            <a:off x="530352" y="1353312"/>
+            <a:ext cx="10607040" cy="365760"/>
+          </a:xfrm>
+          <a:prstGeom prst="rect">
+            <a:avLst/>
+          </a:prstGeom>
+          <a:noFill/>
+        </p:spPr>
+        <p:txBody>
+          <a:bodyPr wrap="none" lIns="36576" rIns="36576">
+            <a:spAutoFit/>
+          </a:bodyPr>
+          <a:lstStyle/>
+          <a:p>
+            <a:pPr algn="l"/>
+            <a:r>
+              <a:rPr sz="1300" b="0">
+                <a:solidFill>
+                  <a:srgbClr val="B1BBCC"/>
+                </a:solidFill>
+                <a:latin typeface="Aptos"/>
+              </a:rPr>
+              <a:t>El código de React y Symfony no cambia: Docker Compose proporciona PHP, Apache, Node y MariaDB y sobrescribe las URLs mediante variables.</a:t>
+            </a:r>
+          </a:p>
+        </p:txBody>
+      </p:sp>
+      <p:sp>
+        <p:nvSpPr>
+          <p:cNvPr id="7" name="TextBox 6"/>
+          <p:cNvSpPr txBox="1"/>
+          <p:nvPr/>
+        </p:nvSpPr>
+        <p:spPr>
+          <a:xfrm>
+            <a:off x="530352" y="6510528"/>
+            <a:ext cx="3657600" cy="164592"/>
+          </a:xfrm>
+          <a:prstGeom prst="rect">
+            <a:avLst/>
+          </a:prstGeom>
+          <a:noFill/>
+        </p:spPr>
+        <p:txBody>
+          <a:bodyPr wrap="none" lIns="36576" rIns="36576">
+            <a:spAutoFit/>
+          </a:bodyPr>
+          <a:lstStyle/>
+          <a:p>
+            <a:pPr algn="l"/>
+            <a:r>
+              <a:rPr sz="800" b="1">
+                <a:solidFill>
+                  <a:srgbClr val="B1BBCC"/>
+                </a:solidFill>
+                <a:latin typeface="Aptos"/>
+              </a:rPr>
+              <a:t>CINE APP · HOSTINGER COMPARTIDO</a:t>
+            </a:r>
+          </a:p>
+        </p:txBody>
+      </p:sp>
+      <p:sp>
+        <p:nvSpPr>
+          <p:cNvPr id="8" name="Rounded Rectangle 7"/>
+          <p:cNvSpPr/>
+          <p:nvPr/>
+        </p:nvSpPr>
+        <p:spPr>
+          <a:xfrm>
+            <a:off x="365760" y="1828800"/>
+            <a:ext cx="2971800" cy="3566160"/>
+          </a:xfrm>
+          <a:prstGeom prst="roundRect">
+            <a:avLst/>
+          </a:prstGeom>
+          <a:solidFill>
+            <a:srgbClr val="172238"/>
+          </a:solidFill>
+          <a:ln>
+            <a:solidFill>
+              <a:srgbClr val="2A3950"/>
+            </a:solidFill>
+          </a:ln>
+        </p:spPr>
+        <p:style>
+          <a:lnRef idx="1">
+            <a:schemeClr val="accent1"/>
+          </a:lnRef>
+          <a:fillRef idx="3">
+            <a:schemeClr val="accent1"/>
+          </a:fillRef>
+          <a:effectRef idx="2">
+            <a:schemeClr val="accent1"/>
+          </a:effectRef>
+          <a:fontRef idx="minor">
+            <a:schemeClr val="lt1"/>
+          </a:fontRef>
+        </p:style>
+        <p:txBody>
+          <a:bodyPr rtlCol="0" anchor="ctr"/>
+          <a:lstStyle/>
+          <a:p>
+            <a:pPr algn="ctr"/>
+          </a:p>
+        </p:txBody>
+      </p:sp>
+      <p:sp>
+        <p:nvSpPr>
+          <p:cNvPr id="9" name="Rounded Rectangle 8"/>
+          <p:cNvSpPr/>
+          <p:nvPr/>
+        </p:nvSpPr>
+        <p:spPr>
+          <a:xfrm>
+            <a:off x="365760" y="1828800"/>
+            <a:ext cx="64008" cy="3566160"/>
+          </a:xfrm>
+          <a:prstGeom prst="roundRect">
+            <a:avLst/>
+          </a:prstGeom>
+          <a:solidFill>
+            <a:srgbClr val="36D3DD"/>
+          </a:solidFill>
+          <a:ln>
+            <a:solidFill>
+              <a:srgbClr val="36D3DD"/>
+            </a:solidFill>
+          </a:ln>
+        </p:spPr>
+        <p:style>
+          <a:lnRef idx="1">
+            <a:schemeClr val="accent1"/>
+          </a:lnRef>
+          <a:fillRef idx="3">
+            <a:schemeClr val="accent1"/>
+          </a:fillRef>
+          <a:effectRef idx="2">
+            <a:schemeClr val="accent1"/>
+          </a:effectRef>
+          <a:fontRef idx="minor">
+            <a:schemeClr val="lt1"/>
+          </a:fontRef>
+        </p:style>
+        <p:txBody>
+          <a:bodyPr rtlCol="0" anchor="ctr"/>
+          <a:lstStyle/>
+          <a:p>
+            <a:pPr algn="ctr"/>
+          </a:p>
+        </p:txBody>
+      </p:sp>
+      <p:sp>
+        <p:nvSpPr>
+          <p:cNvPr id="10" name="TextBox 9"/>
+          <p:cNvSpPr txBox="1"/>
+          <p:nvPr/>
+        </p:nvSpPr>
+        <p:spPr>
+          <a:xfrm>
+            <a:off x="594360" y="2011680"/>
+            <a:ext cx="2560320" cy="292608"/>
+          </a:xfrm>
+          <a:prstGeom prst="rect">
+            <a:avLst/>
+          </a:prstGeom>
+          <a:noFill/>
+        </p:spPr>
+        <p:txBody>
+          <a:bodyPr wrap="none" lIns="36576" rIns="36576">
+            <a:spAutoFit/>
+          </a:bodyPr>
+          <a:lstStyle/>
+          <a:p>
+            <a:pPr algn="l"/>
+            <a:r>
+              <a:rPr sz="1500" b="1">
+                <a:solidFill>
+                  <a:srgbClr val="FFFFFF"/>
+                </a:solidFill>
+                <a:latin typeface="Aptos"/>
+              </a:rPr>
+              <a:t>ARQUITECTURA</a:t>
+            </a:r>
+          </a:p>
+        </p:txBody>
+      </p:sp>
+      <p:sp>
+        <p:nvSpPr>
+          <p:cNvPr id="11" name="TextBox 10"/>
+          <p:cNvSpPr txBox="1"/>
+          <p:nvPr/>
+        </p:nvSpPr>
+        <p:spPr>
+          <a:xfrm>
+            <a:off x="594360" y="2468880"/>
+            <a:ext cx="2560320" cy="2788920"/>
+          </a:xfrm>
+          <a:prstGeom prst="rect">
+            <a:avLst/>
+          </a:prstGeom>
+          <a:noFill/>
+        </p:spPr>
+        <p:txBody>
+          <a:bodyPr wrap="none" lIns="36576" rIns="36576">
+            <a:spAutoFit/>
+          </a:bodyPr>
+          <a:lstStyle/>
+          <a:p>
+            <a:pPr algn="l"/>
+            <a:r>
+              <a:rPr sz="1250" b="0">
+                <a:solidFill>
+                  <a:srgbClr val="B1BBCC"/>
+                </a:solidFill>
+                <a:latin typeface="Aptos"/>
+              </a:rPr>
+              <a:t>frontend</a:t>
+            </a:r>
+            <a:br/>
+            <a:r>
+              <a:rPr sz="1250" b="0">
+                <a:solidFill>
+                  <a:srgbClr val="B1BBCC"/>
+                </a:solidFill>
+                <a:latin typeface="Aptos"/>
+              </a:rPr>
+              <a:t>React + Vite :5173</a:t>
+            </a:r>
+            <a:br/>
+            <a:br/>
+            <a:r>
+              <a:rPr sz="1250" b="0">
+                <a:solidFill>
+                  <a:srgbClr val="B1BBCC"/>
+                </a:solidFill>
+                <a:latin typeface="Aptos"/>
+              </a:rPr>
+              <a:t>backend</a:t>
+            </a:r>
+            <a:br/>
+            <a:r>
+              <a:rPr sz="1250" b="0">
+                <a:solidFill>
+                  <a:srgbClr val="B1BBCC"/>
+                </a:solidFill>
+                <a:latin typeface="Aptos"/>
+              </a:rPr>
+              <a:t>Symfony + Apache :8081</a:t>
+            </a:r>
+            <a:br/>
+            <a:br/>
+            <a:r>
+              <a:rPr sz="1250" b="0">
+                <a:solidFill>
+                  <a:srgbClr val="B1BBCC"/>
+                </a:solidFill>
+                <a:latin typeface="Aptos"/>
+              </a:rPr>
+              <a:t>database</a:t>
+            </a:r>
+            <a:br/>
+            <a:r>
+              <a:rPr sz="1250" b="0">
+                <a:solidFill>
+                  <a:srgbClr val="B1BBCC"/>
+                </a:solidFill>
+                <a:latin typeface="Aptos"/>
+              </a:rPr>
+              <a:t>MariaDB interno</a:t>
+            </a:r>
+          </a:p>
+        </p:txBody>
+      </p:sp>
+      <p:sp>
+        <p:nvSpPr>
+          <p:cNvPr id="12" name="Rounded Rectangle 11"/>
+          <p:cNvSpPr/>
+          <p:nvPr/>
+        </p:nvSpPr>
+        <p:spPr>
+          <a:xfrm>
+            <a:off x="2286000" y="1993392"/>
+            <a:ext cx="777240" cy="274320"/>
+          </a:xfrm>
+          <a:prstGeom prst="roundRect">
+            <a:avLst/>
+          </a:prstGeom>
+          <a:solidFill>
+            <a:srgbClr val="36D3DD"/>
+          </a:solidFill>
+          <a:ln>
+            <a:solidFill>
+              <a:srgbClr val="36D3DD"/>
+            </a:solidFill>
+          </a:ln>
+        </p:spPr>
+        <p:style>
+          <a:lnRef idx="1">
+            <a:schemeClr val="accent1"/>
+          </a:lnRef>
+          <a:fillRef idx="3">
+            <a:schemeClr val="accent1"/>
+          </a:fillRef>
+          <a:effectRef idx="2">
+            <a:schemeClr val="accent1"/>
+          </a:effectRef>
+          <a:fontRef idx="minor">
+            <a:schemeClr val="lt1"/>
+          </a:fontRef>
+        </p:style>
+        <p:txBody>
+          <a:bodyPr rtlCol="0" anchor="ctr"/>
+          <a:lstStyle/>
+          <a:p>
+            <a:pPr algn="ctr"/>
+          </a:p>
+        </p:txBody>
+      </p:sp>
+      <p:sp>
+        <p:nvSpPr>
+          <p:cNvPr id="13" name="TextBox 12"/>
+          <p:cNvSpPr txBox="1"/>
+          <p:nvPr/>
+        </p:nvSpPr>
+        <p:spPr>
+          <a:xfrm>
+            <a:off x="2331720" y="2039112"/>
+            <a:ext cx="685800" cy="128016"/>
+          </a:xfrm>
+          <a:prstGeom prst="rect">
+            <a:avLst/>
+          </a:prstGeom>
+          <a:noFill/>
+        </p:spPr>
+        <p:txBody>
+          <a:bodyPr wrap="none" lIns="36576" rIns="36576">
+            <a:spAutoFit/>
+          </a:bodyPr>
+          <a:lstStyle/>
+          <a:p>
+            <a:pPr algn="ctr"/>
+            <a:r>
+              <a:rPr sz="800" b="1">
+                <a:solidFill>
+                  <a:srgbClr val="0C1323"/>
+                </a:solidFill>
+                <a:latin typeface="Aptos"/>
+              </a:rPr>
+              <a:t>3 SERVICIOS</a:t>
+            </a:r>
+          </a:p>
+        </p:txBody>
+      </p:sp>
+      <p:sp>
+        <p:nvSpPr>
+          <p:cNvPr id="14" name="Rounded Rectangle 13"/>
+          <p:cNvSpPr/>
+          <p:nvPr/>
+        </p:nvSpPr>
+        <p:spPr>
+          <a:xfrm>
+            <a:off x="3611880" y="1828800"/>
+            <a:ext cx="3794760" cy="3566160"/>
+          </a:xfrm>
+          <a:prstGeom prst="roundRect">
+            <a:avLst/>
+          </a:prstGeom>
+          <a:solidFill>
+            <a:srgbClr val="172238"/>
+          </a:solidFill>
+          <a:ln>
+            <a:solidFill>
+              <a:srgbClr val="2A3950"/>
+            </a:solidFill>
+          </a:ln>
+        </p:spPr>
+        <p:style>
+          <a:lnRef idx="1">
+            <a:schemeClr val="accent1"/>
+          </a:lnRef>
+          <a:fillRef idx="3">
+            <a:schemeClr val="accent1"/>
+          </a:fillRef>
+          <a:effectRef idx="2">
+            <a:schemeClr val="accent1"/>
+          </a:effectRef>
+          <a:fontRef idx="minor">
+            <a:schemeClr val="lt1"/>
+          </a:fontRef>
+        </p:style>
+        <p:txBody>
+          <a:bodyPr rtlCol="0" anchor="ctr"/>
+          <a:lstStyle/>
+          <a:p>
+            <a:pPr algn="ctr"/>
+          </a:p>
+        </p:txBody>
+      </p:sp>
+      <p:sp>
+        <p:nvSpPr>
+          <p:cNvPr id="15" name="Rounded Rectangle 14"/>
+          <p:cNvSpPr/>
+          <p:nvPr/>
+        </p:nvSpPr>
+        <p:spPr>
+          <a:xfrm>
+            <a:off x="3611880" y="1828800"/>
+            <a:ext cx="64008" cy="3566160"/>
+          </a:xfrm>
+          <a:prstGeom prst="roundRect">
+            <a:avLst/>
+          </a:prstGeom>
+          <a:solidFill>
+            <a:srgbClr val="53D68E"/>
+          </a:solidFill>
+          <a:ln>
+            <a:solidFill>
+              <a:srgbClr val="53D68E"/>
+            </a:solidFill>
+          </a:ln>
+        </p:spPr>
+        <p:style>
+          <a:lnRef idx="1">
+            <a:schemeClr val="accent1"/>
+          </a:lnRef>
+          <a:fillRef idx="3">
+            <a:schemeClr val="accent1"/>
+          </a:fillRef>
+          <a:effectRef idx="2">
+            <a:schemeClr val="accent1"/>
+          </a:effectRef>
+          <a:fontRef idx="minor">
+            <a:schemeClr val="lt1"/>
+          </a:fontRef>
+        </p:style>
+        <p:txBody>
+          <a:bodyPr rtlCol="0" anchor="ctr"/>
+          <a:lstStyle/>
+          <a:p>
+            <a:pPr algn="ctr"/>
+          </a:p>
+        </p:txBody>
+      </p:sp>
+      <p:sp>
+        <p:nvSpPr>
+          <p:cNvPr id="16" name="TextBox 15"/>
+          <p:cNvSpPr txBox="1"/>
+          <p:nvPr/>
+        </p:nvSpPr>
+        <p:spPr>
+          <a:xfrm>
+            <a:off x="3840480" y="2011680"/>
+            <a:ext cx="3383280" cy="292608"/>
+          </a:xfrm>
+          <a:prstGeom prst="rect">
+            <a:avLst/>
+          </a:prstGeom>
+          <a:noFill/>
+        </p:spPr>
+        <p:txBody>
+          <a:bodyPr wrap="none" lIns="36576" rIns="36576">
+            <a:spAutoFit/>
+          </a:bodyPr>
+          <a:lstStyle/>
+          <a:p>
+            <a:pPr algn="l"/>
+            <a:r>
+              <a:rPr sz="1500" b="1">
+                <a:solidFill>
+                  <a:srgbClr val="FFFFFF"/>
+                </a:solidFill>
+                <a:latin typeface="Aptos"/>
+              </a:rPr>
+              <a:t>INICIAR</a:t>
+            </a:r>
+          </a:p>
+        </p:txBody>
+      </p:sp>
+      <p:sp>
+        <p:nvSpPr>
+          <p:cNvPr id="17" name="TextBox 16"/>
+          <p:cNvSpPr txBox="1"/>
+          <p:nvPr/>
+        </p:nvSpPr>
+        <p:spPr>
+          <a:xfrm>
+            <a:off x="3840480" y="2468880"/>
+            <a:ext cx="3383280" cy="2788920"/>
+          </a:xfrm>
+          <a:prstGeom prst="rect">
+            <a:avLst/>
+          </a:prstGeom>
+          <a:noFill/>
+        </p:spPr>
+        <p:txBody>
+          <a:bodyPr wrap="none" lIns="36576" rIns="36576">
+            <a:spAutoFit/>
+          </a:bodyPr>
+          <a:lstStyle/>
+          <a:p>
+            <a:pPr algn="l"/>
+            <a:r>
+              <a:rPr sz="1250" b="0">
+                <a:solidFill>
+                  <a:srgbClr val="B1BBCC"/>
+                </a:solidFill>
+                <a:latin typeface="Aptos"/>
+              </a:rPr>
+              <a:t>Desde la raíz:</a:t>
+            </a:r>
+            <a:br/>
+            <a:br/>
+            <a:r>
+              <a:rPr sz="1250" b="0">
+                <a:solidFill>
+                  <a:srgbClr val="B1BBCC"/>
+                </a:solidFill>
+                <a:latin typeface="Aptos"/>
+              </a:rPr>
+              <a:t>docker compose up</a:t>
+            </a:r>
+            <a:br/>
+            <a:r>
+              <a:rPr sz="1250" b="0">
+                <a:solidFill>
+                  <a:srgbClr val="B1BBCC"/>
+                </a:solidFill>
+                <a:latin typeface="Aptos"/>
+              </a:rPr>
+              <a:t>  --build -d</a:t>
+            </a:r>
+            <a:br/>
+            <a:br/>
+            <a:r>
+              <a:rPr sz="1250" b="0">
+                <a:solidFill>
+                  <a:srgbClr val="B1BBCC"/>
+                </a:solidFill>
+                <a:latin typeface="Aptos"/>
+              </a:rPr>
+              <a:t>docker compose exec backend</a:t>
+            </a:r>
+            <a:br/>
+            <a:r>
+              <a:rPr sz="1250" b="0">
+                <a:solidFill>
+                  <a:srgbClr val="B1BBCC"/>
+                </a:solidFill>
+                <a:latin typeface="Aptos"/>
+              </a:rPr>
+              <a:t>  php bin/console</a:t>
+            </a:r>
+            <a:br/>
+            <a:r>
+              <a:rPr sz="1250" b="0">
+                <a:solidFill>
+                  <a:srgbClr val="B1BBCC"/>
+                </a:solidFill>
+                <a:latin typeface="Aptos"/>
+              </a:rPr>
+              <a:t>  doctrine:migrations:migrate</a:t>
+            </a:r>
+            <a:br/>
+            <a:r>
+              <a:rPr sz="1250" b="0">
+                <a:solidFill>
+                  <a:srgbClr val="B1BBCC"/>
+                </a:solidFill>
+                <a:latin typeface="Aptos"/>
+              </a:rPr>
+              <a:t>  --no-interaction</a:t>
+            </a:r>
+          </a:p>
+        </p:txBody>
+      </p:sp>
+      <p:sp>
+        <p:nvSpPr>
+          <p:cNvPr id="18" name="Rounded Rectangle 17"/>
+          <p:cNvSpPr/>
+          <p:nvPr/>
+        </p:nvSpPr>
+        <p:spPr>
+          <a:xfrm>
+            <a:off x="6355080" y="1993392"/>
+            <a:ext cx="777240" cy="274320"/>
+          </a:xfrm>
+          <a:prstGeom prst="roundRect">
+            <a:avLst/>
+          </a:prstGeom>
+          <a:solidFill>
+            <a:srgbClr val="53D68E"/>
+          </a:solidFill>
+          <a:ln>
+            <a:solidFill>
+              <a:srgbClr val="53D68E"/>
+            </a:solidFill>
+          </a:ln>
+        </p:spPr>
+        <p:style>
+          <a:lnRef idx="1">
+            <a:schemeClr val="accent1"/>
+          </a:lnRef>
+          <a:fillRef idx="3">
+            <a:schemeClr val="accent1"/>
+          </a:fillRef>
+          <a:effectRef idx="2">
+            <a:schemeClr val="accent1"/>
+          </a:effectRef>
+          <a:fontRef idx="minor">
+            <a:schemeClr val="lt1"/>
+          </a:fontRef>
+        </p:style>
+        <p:txBody>
+          <a:bodyPr rtlCol="0" anchor="ctr"/>
+          <a:lstStyle/>
+          <a:p>
+            <a:pPr algn="ctr"/>
+          </a:p>
+        </p:txBody>
+      </p:sp>
+      <p:sp>
+        <p:nvSpPr>
+          <p:cNvPr id="19" name="TextBox 18"/>
+          <p:cNvSpPr txBox="1"/>
+          <p:nvPr/>
+        </p:nvSpPr>
+        <p:spPr>
+          <a:xfrm>
+            <a:off x="6400800" y="2039112"/>
+            <a:ext cx="685800" cy="128016"/>
+          </a:xfrm>
+          <a:prstGeom prst="rect">
+            <a:avLst/>
+          </a:prstGeom>
+          <a:noFill/>
+        </p:spPr>
+        <p:txBody>
+          <a:bodyPr wrap="none" lIns="36576" rIns="36576">
+            <a:spAutoFit/>
+          </a:bodyPr>
+          <a:lstStyle/>
+          <a:p>
+            <a:pPr algn="ctr"/>
+            <a:r>
+              <a:rPr sz="800" b="1">
+                <a:solidFill>
+                  <a:srgbClr val="0C1323"/>
+                </a:solidFill>
+                <a:latin typeface="Aptos"/>
+              </a:rPr>
+              <a:t>COMANDOS</a:t>
+            </a:r>
+          </a:p>
+        </p:txBody>
+      </p:sp>
+      <p:sp>
+        <p:nvSpPr>
+          <p:cNvPr id="20" name="Rounded Rectangle 19"/>
+          <p:cNvSpPr/>
+          <p:nvPr/>
+        </p:nvSpPr>
+        <p:spPr>
+          <a:xfrm>
+            <a:off x="7680960" y="1828800"/>
+            <a:ext cx="4114800" cy="3566160"/>
+          </a:xfrm>
+          <a:prstGeom prst="roundRect">
+            <a:avLst/>
+          </a:prstGeom>
+          <a:solidFill>
+            <a:srgbClr val="172238"/>
+          </a:solidFill>
+          <a:ln>
+            <a:solidFill>
+              <a:srgbClr val="2A3950"/>
+            </a:solidFill>
+          </a:ln>
+        </p:spPr>
+        <p:style>
+          <a:lnRef idx="1">
+            <a:schemeClr val="accent1"/>
+          </a:lnRef>
+          <a:fillRef idx="3">
+            <a:schemeClr val="accent1"/>
+          </a:fillRef>
+          <a:effectRef idx="2">
+            <a:schemeClr val="accent1"/>
+          </a:effectRef>
+          <a:fontRef idx="minor">
+            <a:schemeClr val="lt1"/>
+          </a:fontRef>
+        </p:style>
+        <p:txBody>
+          <a:bodyPr rtlCol="0" anchor="ctr"/>
+          <a:lstStyle/>
+          <a:p>
+            <a:pPr algn="ctr"/>
+          </a:p>
+        </p:txBody>
+      </p:sp>
+      <p:sp>
+        <p:nvSpPr>
+          <p:cNvPr id="21" name="Rounded Rectangle 20"/>
+          <p:cNvSpPr/>
+          <p:nvPr/>
+        </p:nvSpPr>
+        <p:spPr>
+          <a:xfrm>
+            <a:off x="7680960" y="1828800"/>
+            <a:ext cx="64008" cy="3566160"/>
+          </a:xfrm>
+          <a:prstGeom prst="roundRect">
             <a:avLst/>
           </a:prstGeom>
           <a:solidFill>
@@ -31214,14 +32074,14 @@
       </p:sp>
       <p:sp>
         <p:nvSpPr>
-          <p:cNvPr id="3" name="TextBox 2"/>
-          <p:cNvSpPr txBox="1"/>
-          <p:nvPr/>
-        </p:nvSpPr>
-        <p:spPr>
-          <a:xfrm>
-            <a:off x="685800" y="685800"/>
-            <a:ext cx="3657600" cy="274320"/>
+          <p:cNvPr id="22" name="TextBox 21"/>
+          <p:cNvSpPr txBox="1"/>
+          <p:nvPr/>
+        </p:nvSpPr>
+        <p:spPr>
+          <a:xfrm>
+            <a:off x="7909560" y="2011680"/>
+            <a:ext cx="3703320" cy="292608"/>
           </a:xfrm>
           <a:prstGeom prst="rect">
             <a:avLst/>
@@ -31236,62 +32096,27 @@
           <a:p>
             <a:pPr algn="l"/>
             <a:r>
-              <a:rPr sz="1200" b="1">
-                <a:solidFill>
-                  <a:srgbClr val="FF9E58"/>
-                </a:solidFill>
-                <a:latin typeface="Aptos"/>
-              </a:rPr>
-              <a:t>PARTE 2</a:t>
-            </a:r>
-          </a:p>
-        </p:txBody>
-      </p:sp>
-      <p:sp>
-        <p:nvSpPr>
-          <p:cNvPr id="4" name="TextBox 3"/>
-          <p:cNvSpPr txBox="1"/>
-          <p:nvPr/>
-        </p:nvSpPr>
-        <p:spPr>
-          <a:xfrm>
-            <a:off x="11018520" y="658368"/>
-            <a:ext cx="594360" cy="274320"/>
-          </a:xfrm>
-          <a:prstGeom prst="rect">
-            <a:avLst/>
-          </a:prstGeom>
-          <a:noFill/>
-        </p:spPr>
-        <p:txBody>
-          <a:bodyPr wrap="none" lIns="36576" rIns="36576">
-            <a:spAutoFit/>
-          </a:bodyPr>
-          <a:lstStyle/>
-          <a:p>
-            <a:pPr algn="r"/>
-            <a:r>
-              <a:rPr sz="1100" b="1">
-                <a:solidFill>
-                  <a:srgbClr val="B1BBCC"/>
-                </a:solidFill>
-                <a:latin typeface="Aptos"/>
-              </a:rPr>
-              <a:t>13</a:t>
-            </a:r>
-          </a:p>
-        </p:txBody>
-      </p:sp>
-      <p:sp>
-        <p:nvSpPr>
-          <p:cNvPr id="5" name="TextBox 4"/>
-          <p:cNvSpPr txBox="1"/>
-          <p:nvPr/>
-        </p:nvSpPr>
-        <p:spPr>
-          <a:xfrm>
-            <a:off x="667512" y="1965960"/>
-            <a:ext cx="9966960" cy="1051560"/>
+              <a:rPr sz="1500" b="1">
+                <a:solidFill>
+                  <a:srgbClr val="FFFFFF"/>
+                </a:solidFill>
+                <a:latin typeface="Aptos"/>
+              </a:rPr>
+              <a:t>ELEGIR ENTORNO</a:t>
+            </a:r>
+          </a:p>
+        </p:txBody>
+      </p:sp>
+      <p:sp>
+        <p:nvSpPr>
+          <p:cNvPr id="23" name="TextBox 22"/>
+          <p:cNvSpPr txBox="1"/>
+          <p:nvPr/>
+        </p:nvSpPr>
+        <p:spPr>
+          <a:xfrm>
+            <a:off x="7909560" y="2468880"/>
+            <a:ext cx="3703320" cy="2788920"/>
           </a:xfrm>
           <a:prstGeom prst="rect">
             <a:avLst/>
@@ -31306,64 +32131,92 @@
           <a:p>
             <a:pPr algn="l"/>
             <a:r>
-              <a:rPr sz="3800" b="1">
-                <a:solidFill>
-                  <a:srgbClr val="FFFFFF"/>
-                </a:solidFill>
-                <a:latin typeface="Aptos"/>
-              </a:rPr>
-              <a:t>Frontend React</a:t>
-            </a:r>
-          </a:p>
-        </p:txBody>
-      </p:sp>
-      <p:sp>
-        <p:nvSpPr>
-          <p:cNvPr id="6" name="TextBox 5"/>
-          <p:cNvSpPr txBox="1"/>
-          <p:nvPr/>
-        </p:nvSpPr>
-        <p:spPr>
-          <a:xfrm>
-            <a:off x="704088" y="3337560"/>
-            <a:ext cx="9784080" cy="1097280"/>
-          </a:xfrm>
-          <a:prstGeom prst="rect">
-            <a:avLst/>
-          </a:prstGeom>
-          <a:noFill/>
-        </p:spPr>
-        <p:txBody>
-          <a:bodyPr wrap="none" lIns="36576" rIns="36576">
-            <a:spAutoFit/>
-          </a:bodyPr>
-          <a:lstStyle/>
-          <a:p>
-            <a:pPr algn="l"/>
-            <a:r>
-              <a:rPr sz="1800" b="0">
-                <a:solidFill>
-                  <a:srgbClr val="B1BBCC"/>
-                </a:solidFill>
-                <a:latin typeface="Aptos"/>
-              </a:rPr>
-              <a:t>Cómo se organiza la interfaz, qué son los componentes y hooks, y cómo el navegador utiliza HTTP para pedir datos.</a:t>
-            </a:r>
-          </a:p>
-        </p:txBody>
-      </p:sp>
-      <p:sp>
-        <p:nvSpPr>
-          <p:cNvPr id="7" name="Rectangle 6"/>
+              <a:rPr sz="1250" b="0">
+                <a:solidFill>
+                  <a:srgbClr val="B1BBCC"/>
+                </a:solidFill>
+                <a:latin typeface="Aptos"/>
+              </a:rPr>
+              <a:t>XAMPP API:</a:t>
+            </a:r>
+            <a:br/>
+            <a:r>
+              <a:rPr sz="1250" b="0">
+                <a:solidFill>
+                  <a:srgbClr val="B1BBCC"/>
+                </a:solidFill>
+                <a:latin typeface="Aptos"/>
+              </a:rPr>
+              <a:t>localhost/cine-app/public/api</a:t>
+            </a:r>
+            <a:br/>
+            <a:br/>
+            <a:r>
+              <a:rPr sz="1250" b="0">
+                <a:solidFill>
+                  <a:srgbClr val="B1BBCC"/>
+                </a:solidFill>
+                <a:latin typeface="Aptos"/>
+              </a:rPr>
+              <a:t>Docker API:</a:t>
+            </a:r>
+            <a:br/>
+            <a:r>
+              <a:rPr sz="1250" b="0">
+                <a:solidFill>
+                  <a:srgbClr val="B1BBCC"/>
+                </a:solidFill>
+                <a:latin typeface="Aptos"/>
+              </a:rPr>
+              <a:t>localhost:8081/api</a:t>
+            </a:r>
+            <a:br/>
+            <a:br/>
+            <a:r>
+              <a:rPr sz="1250" b="0">
+                <a:solidFill>
+                  <a:srgbClr val="B1BBCC"/>
+                </a:solidFill>
+                <a:latin typeface="Aptos"/>
+              </a:rPr>
+              <a:t>Frontend en ambos:</a:t>
+            </a:r>
+            <a:br/>
+            <a:r>
+              <a:rPr sz="1250" b="0">
+                <a:solidFill>
+                  <a:srgbClr val="B1BBCC"/>
+                </a:solidFill>
+                <a:latin typeface="Aptos"/>
+              </a:rPr>
+              <a:t>localhost:5173</a:t>
+            </a:r>
+            <a:br/>
+            <a:br/>
+            <a:r>
+              <a:rPr sz="1250" b="0">
+                <a:solidFill>
+                  <a:srgbClr val="B1BBCC"/>
+                </a:solidFill>
+                <a:latin typeface="Aptos"/>
+              </a:rPr>
+              <a:t>No iniciar ambos Vite a la vez.</a:t>
+            </a:r>
+          </a:p>
+        </p:txBody>
+      </p:sp>
+      <p:sp>
+        <p:nvSpPr>
+          <p:cNvPr id="24" name="Rounded Rectangle 23"/>
           <p:cNvSpPr/>
           <p:nvPr/>
         </p:nvSpPr>
         <p:spPr>
           <a:xfrm>
-            <a:off x="704088" y="5029200"/>
-            <a:ext cx="2011680" cy="73152"/>
-          </a:xfrm>
-          <a:prstGeom prst="rect">
+            <a:off x="10744200" y="1993392"/>
+            <a:ext cx="777240" cy="274320"/>
+          </a:xfrm>
+          <a:prstGeom prst="roundRect">
             <a:avLst/>
           </a:prstGeom>
           <a:solidFill>
@@ -31399,35 +32252,115 @@
       </p:sp>
       <p:sp>
         <p:nvSpPr>
-          <p:cNvPr id="8" name="TextBox 7"/>
-          <p:cNvSpPr txBox="1"/>
-          <p:nvPr/>
-        </p:nvSpPr>
-        <p:spPr>
-          <a:xfrm>
-            <a:off x="704088" y="6080760"/>
-            <a:ext cx="3657600" cy="182880"/>
-          </a:xfrm>
-          <a:prstGeom prst="rect">
-            <a:avLst/>
-          </a:prstGeom>
-          <a:noFill/>
-        </p:spPr>
-        <p:txBody>
-          <a:bodyPr wrap="none" lIns="36576" rIns="36576">
-            <a:spAutoFit/>
-          </a:bodyPr>
-          <a:lstStyle/>
-          <a:p>
-            <a:pPr algn="l"/>
-            <a:r>
-              <a:rPr sz="900" b="1">
-                <a:solidFill>
-                  <a:srgbClr val="B1BBCC"/>
-                </a:solidFill>
-                <a:latin typeface="Aptos"/>
-              </a:rPr>
-              <a:t>CINE APP · RECORRIDO DIDÁCTICO</a:t>
+          <p:cNvPr id="25" name="TextBox 24"/>
+          <p:cNvSpPr txBox="1"/>
+          <p:nvPr/>
+        </p:nvSpPr>
+        <p:spPr>
+          <a:xfrm>
+            <a:off x="10789920" y="2039112"/>
+            <a:ext cx="685800" cy="128016"/>
+          </a:xfrm>
+          <a:prstGeom prst="rect">
+            <a:avLst/>
+          </a:prstGeom>
+          <a:noFill/>
+        </p:spPr>
+        <p:txBody>
+          <a:bodyPr wrap="none" lIns="36576" rIns="36576">
+            <a:spAutoFit/>
+          </a:bodyPr>
+          <a:lstStyle/>
+          <a:p>
+            <a:pPr algn="ctr"/>
+            <a:r>
+              <a:rPr sz="800" b="1">
+                <a:solidFill>
+                  <a:srgbClr val="0C1323"/>
+                </a:solidFill>
+                <a:latin typeface="Aptos"/>
+              </a:rPr>
+              <a:t>XAMPP O DOCKER</a:t>
+            </a:r>
+          </a:p>
+        </p:txBody>
+      </p:sp>
+      <p:sp>
+        <p:nvSpPr>
+          <p:cNvPr id="26" name="Rounded Rectangle 25"/>
+          <p:cNvSpPr/>
+          <p:nvPr/>
+        </p:nvSpPr>
+        <p:spPr>
+          <a:xfrm>
+            <a:off x="640080" y="5715000"/>
+            <a:ext cx="10881360" cy="566928"/>
+          </a:xfrm>
+          <a:prstGeom prst="roundRect">
+            <a:avLst/>
+          </a:prstGeom>
+          <a:solidFill>
+            <a:srgbClr val="172238"/>
+          </a:solidFill>
+          <a:ln>
+            <a:solidFill>
+              <a:srgbClr val="172238"/>
+            </a:solidFill>
+          </a:ln>
+        </p:spPr>
+        <p:style>
+          <a:lnRef idx="1">
+            <a:schemeClr val="accent1"/>
+          </a:lnRef>
+          <a:fillRef idx="3">
+            <a:schemeClr val="accent1"/>
+          </a:fillRef>
+          <a:effectRef idx="2">
+            <a:schemeClr val="accent1"/>
+          </a:effectRef>
+          <a:fontRef idx="minor">
+            <a:schemeClr val="lt1"/>
+          </a:fontRef>
+        </p:style>
+        <p:txBody>
+          <a:bodyPr rtlCol="0" anchor="ctr"/>
+          <a:lstStyle/>
+          <a:p>
+            <a:pPr algn="ctr"/>
+          </a:p>
+        </p:txBody>
+      </p:sp>
+      <p:sp>
+        <p:nvSpPr>
+          <p:cNvPr id="27" name="TextBox 26"/>
+          <p:cNvSpPr txBox="1"/>
+          <p:nvPr/>
+        </p:nvSpPr>
+        <p:spPr>
+          <a:xfrm>
+            <a:off x="868680" y="5897880"/>
+            <a:ext cx="10424160" cy="228600"/>
+          </a:xfrm>
+          <a:prstGeom prst="rect">
+            <a:avLst/>
+          </a:prstGeom>
+          <a:noFill/>
+        </p:spPr>
+        <p:txBody>
+          <a:bodyPr wrap="none" lIns="36576" rIns="36576">
+            <a:spAutoFit/>
+          </a:bodyPr>
+          <a:lstStyle/>
+          <a:p>
+            <a:pPr algn="ctr"/>
+            <a:r>
+              <a:rPr sz="1300" b="1">
+                <a:solidFill>
+                  <a:srgbClr val="FFFFFF"/>
+                </a:solidFill>
+                <a:latin typeface="Aptos"/>
+              </a:rPr>
+              <a:t>Sin cambios de lógica: Controllers, Repositories, entidades, componentes, páginas y hooks son los mismos.</a:t>
             </a:r>
           </a:p>
         </p:txBody>
@@ -31473,11 +32406,11 @@
             <a:avLst/>
           </a:prstGeom>
           <a:solidFill>
-            <a:srgbClr val="36D3DD"/>
+            <a:srgbClr val="FF9E58"/>
           </a:solidFill>
           <a:ln>
             <a:solidFill>
-              <a:srgbClr val="36D3DD"/>
+              <a:srgbClr val="FF9E58"/>
             </a:solidFill>
           </a:ln>
         </p:spPr>
@@ -31529,11 +32462,11 @@
             <a:r>
               <a:rPr sz="1200" b="1">
                 <a:solidFill>
-                  <a:srgbClr val="36D3DD"/>
-                </a:solidFill>
-                <a:latin typeface="Aptos"/>
-              </a:rPr>
-              <a:t>PARTE 1</a:t>
+                  <a:srgbClr val="FF9E58"/>
+                </a:solidFill>
+                <a:latin typeface="Aptos"/>
+              </a:rPr>
+              <a:t>PARTE 2</a:t>
             </a:r>
           </a:p>
         </p:txBody>
@@ -31568,7 +32501,7 @@
                 </a:solidFill>
                 <a:latin typeface="Aptos"/>
               </a:rPr>
-              <a:t>03</a:t>
+              <a:t>14</a:t>
             </a:r>
           </a:p>
         </p:txBody>
@@ -31603,7 +32536,7 @@
                 </a:solidFill>
                 <a:latin typeface="Aptos"/>
               </a:rPr>
-              <a:t>Backend Symfony</a:t>
+              <a:t>Frontend React</a:t>
             </a:r>
           </a:p>
         </p:txBody>
@@ -31638,7 +32571,7 @@
                 </a:solidFill>
                 <a:latin typeface="Aptos"/>
               </a:rPr>
-              <a:t>Dónde viven los endpoints, cómo se validan parámetros y cómo Repository, Doctrine ORM y MariaDB obtienen los datos.</a:t>
+              <a:t>Cómo se organiza la interfaz, qué son los componentes y hooks, y cómo el navegador utiliza HTTP para pedir datos.</a:t>
             </a:r>
           </a:p>
         </p:txBody>
@@ -31658,11 +32591,11 @@
             <a:avLst/>
           </a:prstGeom>
           <a:solidFill>
-            <a:srgbClr val="36D3DD"/>
+            <a:srgbClr val="FF9E58"/>
           </a:solidFill>
           <a:ln>
             <a:solidFill>
-              <a:srgbClr val="36D3DD"/>
+              <a:srgbClr val="FF9E58"/>
             </a:solidFill>
           </a:ln>
         </p:spPr>
@@ -31764,6 +32697,297 @@
             <a:avLst/>
           </a:prstGeom>
           <a:solidFill>
+            <a:srgbClr val="36D3DD"/>
+          </a:solidFill>
+          <a:ln>
+            <a:solidFill>
+              <a:srgbClr val="36D3DD"/>
+            </a:solidFill>
+          </a:ln>
+        </p:spPr>
+        <p:style>
+          <a:lnRef idx="1">
+            <a:schemeClr val="accent1"/>
+          </a:lnRef>
+          <a:fillRef idx="3">
+            <a:schemeClr val="accent1"/>
+          </a:fillRef>
+          <a:effectRef idx="2">
+            <a:schemeClr val="accent1"/>
+          </a:effectRef>
+          <a:fontRef idx="minor">
+            <a:schemeClr val="lt1"/>
+          </a:fontRef>
+        </p:style>
+        <p:txBody>
+          <a:bodyPr rtlCol="0" anchor="ctr"/>
+          <a:lstStyle/>
+          <a:p>
+            <a:pPr algn="ctr"/>
+          </a:p>
+        </p:txBody>
+      </p:sp>
+      <p:sp>
+        <p:nvSpPr>
+          <p:cNvPr id="3" name="TextBox 2"/>
+          <p:cNvSpPr txBox="1"/>
+          <p:nvPr/>
+        </p:nvSpPr>
+        <p:spPr>
+          <a:xfrm>
+            <a:off x="685800" y="685800"/>
+            <a:ext cx="3657600" cy="274320"/>
+          </a:xfrm>
+          <a:prstGeom prst="rect">
+            <a:avLst/>
+          </a:prstGeom>
+          <a:noFill/>
+        </p:spPr>
+        <p:txBody>
+          <a:bodyPr wrap="none" lIns="36576" rIns="36576">
+            <a:spAutoFit/>
+          </a:bodyPr>
+          <a:lstStyle/>
+          <a:p>
+            <a:pPr algn="l"/>
+            <a:r>
+              <a:rPr sz="1200" b="1">
+                <a:solidFill>
+                  <a:srgbClr val="36D3DD"/>
+                </a:solidFill>
+                <a:latin typeface="Aptos"/>
+              </a:rPr>
+              <a:t>PARTE 1</a:t>
+            </a:r>
+          </a:p>
+        </p:txBody>
+      </p:sp>
+      <p:sp>
+        <p:nvSpPr>
+          <p:cNvPr id="4" name="TextBox 3"/>
+          <p:cNvSpPr txBox="1"/>
+          <p:nvPr/>
+        </p:nvSpPr>
+        <p:spPr>
+          <a:xfrm>
+            <a:off x="11018520" y="658368"/>
+            <a:ext cx="594360" cy="274320"/>
+          </a:xfrm>
+          <a:prstGeom prst="rect">
+            <a:avLst/>
+          </a:prstGeom>
+          <a:noFill/>
+        </p:spPr>
+        <p:txBody>
+          <a:bodyPr wrap="none" lIns="36576" rIns="36576">
+            <a:spAutoFit/>
+          </a:bodyPr>
+          <a:lstStyle/>
+          <a:p>
+            <a:pPr algn="r"/>
+            <a:r>
+              <a:rPr sz="1100" b="1">
+                <a:solidFill>
+                  <a:srgbClr val="B1BBCC"/>
+                </a:solidFill>
+                <a:latin typeface="Aptos"/>
+              </a:rPr>
+              <a:t>04</a:t>
+            </a:r>
+          </a:p>
+        </p:txBody>
+      </p:sp>
+      <p:sp>
+        <p:nvSpPr>
+          <p:cNvPr id="5" name="TextBox 4"/>
+          <p:cNvSpPr txBox="1"/>
+          <p:nvPr/>
+        </p:nvSpPr>
+        <p:spPr>
+          <a:xfrm>
+            <a:off x="667512" y="1965960"/>
+            <a:ext cx="9966960" cy="1051560"/>
+          </a:xfrm>
+          <a:prstGeom prst="rect">
+            <a:avLst/>
+          </a:prstGeom>
+          <a:noFill/>
+        </p:spPr>
+        <p:txBody>
+          <a:bodyPr wrap="none" lIns="36576" rIns="36576">
+            <a:spAutoFit/>
+          </a:bodyPr>
+          <a:lstStyle/>
+          <a:p>
+            <a:pPr algn="l"/>
+            <a:r>
+              <a:rPr sz="3800" b="1">
+                <a:solidFill>
+                  <a:srgbClr val="FFFFFF"/>
+                </a:solidFill>
+                <a:latin typeface="Aptos"/>
+              </a:rPr>
+              <a:t>Backend Symfony</a:t>
+            </a:r>
+          </a:p>
+        </p:txBody>
+      </p:sp>
+      <p:sp>
+        <p:nvSpPr>
+          <p:cNvPr id="6" name="TextBox 5"/>
+          <p:cNvSpPr txBox="1"/>
+          <p:nvPr/>
+        </p:nvSpPr>
+        <p:spPr>
+          <a:xfrm>
+            <a:off x="704088" y="3337560"/>
+            <a:ext cx="9784080" cy="1097280"/>
+          </a:xfrm>
+          <a:prstGeom prst="rect">
+            <a:avLst/>
+          </a:prstGeom>
+          <a:noFill/>
+        </p:spPr>
+        <p:txBody>
+          <a:bodyPr wrap="none" lIns="36576" rIns="36576">
+            <a:spAutoFit/>
+          </a:bodyPr>
+          <a:lstStyle/>
+          <a:p>
+            <a:pPr algn="l"/>
+            <a:r>
+              <a:rPr sz="1800" b="0">
+                <a:solidFill>
+                  <a:srgbClr val="B1BBCC"/>
+                </a:solidFill>
+                <a:latin typeface="Aptos"/>
+              </a:rPr>
+              <a:t>Dónde viven los endpoints, cómo se validan parámetros y cómo Repository, Doctrine ORM y MariaDB obtienen los datos.</a:t>
+            </a:r>
+          </a:p>
+        </p:txBody>
+      </p:sp>
+      <p:sp>
+        <p:nvSpPr>
+          <p:cNvPr id="7" name="Rectangle 6"/>
+          <p:cNvSpPr/>
+          <p:nvPr/>
+        </p:nvSpPr>
+        <p:spPr>
+          <a:xfrm>
+            <a:off x="704088" y="5029200"/>
+            <a:ext cx="2011680" cy="73152"/>
+          </a:xfrm>
+          <a:prstGeom prst="rect">
+            <a:avLst/>
+          </a:prstGeom>
+          <a:solidFill>
+            <a:srgbClr val="36D3DD"/>
+          </a:solidFill>
+          <a:ln>
+            <a:solidFill>
+              <a:srgbClr val="36D3DD"/>
+            </a:solidFill>
+          </a:ln>
+        </p:spPr>
+        <p:style>
+          <a:lnRef idx="1">
+            <a:schemeClr val="accent1"/>
+          </a:lnRef>
+          <a:fillRef idx="3">
+            <a:schemeClr val="accent1"/>
+          </a:fillRef>
+          <a:effectRef idx="2">
+            <a:schemeClr val="accent1"/>
+          </a:effectRef>
+          <a:fontRef idx="minor">
+            <a:schemeClr val="lt1"/>
+          </a:fontRef>
+        </p:style>
+        <p:txBody>
+          <a:bodyPr rtlCol="0" anchor="ctr"/>
+          <a:lstStyle/>
+          <a:p>
+            <a:pPr algn="ctr"/>
+          </a:p>
+        </p:txBody>
+      </p:sp>
+      <p:sp>
+        <p:nvSpPr>
+          <p:cNvPr id="8" name="TextBox 7"/>
+          <p:cNvSpPr txBox="1"/>
+          <p:nvPr/>
+        </p:nvSpPr>
+        <p:spPr>
+          <a:xfrm>
+            <a:off x="704088" y="6080760"/>
+            <a:ext cx="3657600" cy="182880"/>
+          </a:xfrm>
+          <a:prstGeom prst="rect">
+            <a:avLst/>
+          </a:prstGeom>
+          <a:noFill/>
+        </p:spPr>
+        <p:txBody>
+          <a:bodyPr wrap="none" lIns="36576" rIns="36576">
+            <a:spAutoFit/>
+          </a:bodyPr>
+          <a:lstStyle/>
+          <a:p>
+            <a:pPr algn="l"/>
+            <a:r>
+              <a:rPr sz="900" b="1">
+                <a:solidFill>
+                  <a:srgbClr val="B1BBCC"/>
+                </a:solidFill>
+                <a:latin typeface="Aptos"/>
+              </a:rPr>
+              <a:t>CINE APP · RECORRIDO DIDÁCTICO</a:t>
+            </a:r>
+          </a:p>
+        </p:txBody>
+      </p:sp>
+    </p:spTree>
+  </p:cSld>
+  <p:clrMapOvr>
+    <a:masterClrMapping/>
+  </p:clrMapOvr>
+</p:sld>
+</file>
+
+<file path=ppt/slides/slide34.xml><?xml version="1.0" encoding="utf-8"?>
+<p:sld xmlns:a="http://schemas.openxmlformats.org/drawingml/2006/main" xmlns:p="http://schemas.openxmlformats.org/presentationml/2006/main" xmlns:r="http://schemas.openxmlformats.org/officeDocument/2006/relationships">
+  <p:cSld>
+    <p:bg>
+      <p:bgPr>
+        <a:solidFill>
+          <a:srgbClr val="0C1323"/>
+        </a:solidFill>
+        <a:effectLst/>
+      </p:bgPr>
+    </p:bg>
+    <p:spTree>
+      <p:nvGrpSpPr>
+        <p:cNvPr id="1" name=""/>
+        <p:cNvGrpSpPr/>
+        <p:nvPr/>
+      </p:nvGrpSpPr>
+      <p:grpSpPr/>
+      <p:sp>
+        <p:nvSpPr>
+          <p:cNvPr id="2" name="Rectangle 1"/>
+          <p:cNvSpPr/>
+          <p:nvPr/>
+        </p:nvSpPr>
+        <p:spPr>
+          <a:xfrm>
+            <a:off x="0" y="0"/>
+            <a:ext cx="164592" cy="6858000"/>
+          </a:xfrm>
+          <a:prstGeom prst="rect">
+            <a:avLst/>
+          </a:prstGeom>
+          <a:solidFill>
             <a:srgbClr val="53D68E"/>
           </a:solidFill>
           <a:ln>
@@ -31859,7 +33083,7 @@
                 </a:solidFill>
                 <a:latin typeface="Aptos"/>
               </a:rPr>
-              <a:t>23</a:t>
+              <a:t>24</a:t>
             </a:r>
           </a:p>
         </p:txBody>
@@ -32150,7 +33374,7 @@
                 </a:solidFill>
                 <a:latin typeface="Aptos"/>
               </a:rPr>
-              <a:t>25</a:t>
+              <a:t>26</a:t>
             </a:r>
           </a:p>
         </p:txBody>
@@ -32836,7 +34060,7 @@
                 </a:solidFill>
                 <a:latin typeface="Aptos"/>
               </a:rPr>
-              <a:t>26</a:t>
+              <a:t>27</a:t>
             </a:r>
           </a:p>
         </p:txBody>
@@ -33643,7 +34867,7 @@
                 </a:solidFill>
                 <a:latin typeface="Aptos"/>
               </a:rPr>
-              <a:t>28</a:t>
+              <a:t>29</a:t>
             </a:r>
           </a:p>
         </p:txBody>
@@ -34884,7 +36108,7 @@
                 </a:solidFill>
                 <a:latin typeface="Aptos"/>
               </a:rPr>
-              <a:t>29</a:t>
+              <a:t>30</a:t>
             </a:r>
           </a:p>
         </p:txBody>
@@ -35930,7 +37154,7 @@
                 </a:solidFill>
                 <a:latin typeface="Aptos"/>
               </a:rPr>
-              <a:t>17</a:t>
+              <a:t>18</a:t>
             </a:r>
           </a:p>
         </p:txBody>
@@ -36821,7 +38045,7 @@
                 </a:solidFill>
                 <a:latin typeface="Aptos"/>
               </a:rPr>
-              <a:t>18</a:t>
+              <a:t>19</a:t>
             </a:r>
           </a:p>
         </p:txBody>

--- a/Guia_despliegue_Symfony_React_Hostinger.pptx
+++ b/Guia_despliegue_Symfony_React_Hostinger.pptx
@@ -8,7 +8,8 @@
     <p:sldId id="256" r:id="rId7"/>
     <p:sldId id="285" r:id="rId36"/>
     <p:sldId id="286" r:id="rId37"/>
-    <p:sldId id="288" r:id="rId39"/>
+    <p:sldId id="287" r:id="rId38"/>
+    <p:sldId id="289" r:id="rId40"/>
     <p:sldId id="269" r:id="rId20"/>
     <p:sldId id="282" r:id="rId33"/>
     <p:sldId id="276" r:id="rId27"/>
@@ -18,7 +19,7 @@
     <p:sldId id="274" r:id="rId25"/>
     <p:sldId id="275" r:id="rId26"/>
     <p:sldId id="258" r:id="rId9"/>
-    <p:sldId id="287" r:id="rId38"/>
+    <p:sldId id="288" r:id="rId39"/>
     <p:sldId id="279" r:id="rId30"/>
     <p:sldId id="280" r:id="rId31"/>
     <p:sldId id="281" r:id="rId32"/>
@@ -28,7 +29,7 @@
     <p:sldId id="277" r:id="rId28"/>
     <p:sldId id="278" r:id="rId29"/>
     <p:sldId id="268" r:id="rId19"/>
-    <p:sldId id="289" r:id="rId40"/>
+    <p:sldId id="290" r:id="rId41"/>
     <p:sldId id="257" r:id="rId8"/>
     <p:sldId id="259" r:id="rId10"/>
     <p:sldId id="260" r:id="rId11"/>
@@ -3800,7 +3801,7 @@
                 </a:solidFill>
                 <a:latin typeface="Aptos"/>
               </a:rPr>
-              <a:t>31</a:t>
+              <a:t>32</a:t>
             </a:r>
           </a:p>
         </p:txBody>
@@ -5326,7 +5327,7 @@
                 </a:solidFill>
                 <a:latin typeface="Aptos"/>
               </a:rPr>
-              <a:t>32</a:t>
+              <a:t>33</a:t>
             </a:r>
           </a:p>
         </p:txBody>
@@ -6802,7 +6803,7 @@
                 </a:solidFill>
                 <a:latin typeface="Aptos"/>
               </a:rPr>
-              <a:t>33</a:t>
+              <a:t>34</a:t>
             </a:r>
           </a:p>
         </p:txBody>
@@ -7563,7 +7564,7 @@
                 </a:solidFill>
                 <a:latin typeface="Aptos"/>
               </a:rPr>
-              <a:t>23</a:t>
+              <a:t>24</a:t>
             </a:r>
           </a:p>
         </p:txBody>
@@ -9021,7 +9022,7 @@
                 </a:solidFill>
                 <a:latin typeface="Aptos"/>
               </a:rPr>
-              <a:t>05</a:t>
+              <a:t>06</a:t>
             </a:r>
           </a:p>
         </p:txBody>
@@ -10064,7 +10065,7 @@
                 </a:solidFill>
                 <a:latin typeface="Consolas"/>
               </a:rPr>
-              <a:t>Ver todas las rutas:  C:\xampp\php\php.exe bin\console debug:router</a:t>
+              <a:t>Con Docker:  docker compose exec backend php bin/console debug:router</a:t>
             </a:r>
           </a:p>
         </p:txBody>
@@ -10205,7 +10206,7 @@
                 </a:solidFill>
                 <a:latin typeface="Aptos"/>
               </a:rPr>
-              <a:t>20</a:t>
+              <a:t>21</a:t>
             </a:r>
           </a:p>
         </p:txBody>
@@ -11654,7 +11655,7 @@
                 </a:solidFill>
                 <a:latin typeface="Aptos"/>
               </a:rPr>
-              <a:t>08</a:t>
+              <a:t>09</a:t>
             </a:r>
           </a:p>
         </p:txBody>
@@ -12854,7 +12855,7 @@
                 </a:solidFill>
                 <a:latin typeface="Aptos"/>
               </a:rPr>
-              <a:t>09</a:t>
+              <a:t>10</a:t>
             </a:r>
           </a:p>
         </p:txBody>
@@ -14118,7 +14119,7 @@
                 </a:solidFill>
                 <a:latin typeface="Aptos"/>
               </a:rPr>
-              <a:t>10</a:t>
+              <a:t>11</a:t>
             </a:r>
           </a:p>
         </p:txBody>
@@ -15060,7 +15061,7 @@
                 </a:solidFill>
                 <a:latin typeface="Aptos"/>
               </a:rPr>
-              <a:t>11</a:t>
+              <a:t>12</a:t>
             </a:r>
           </a:p>
         </p:txBody>
@@ -16522,7 +16523,7 @@
                 </a:solidFill>
                 <a:latin typeface="Aptos"/>
               </a:rPr>
-              <a:t>25</a:t>
+              <a:t>26</a:t>
             </a:r>
           </a:p>
         </p:txBody>
@@ -17489,7 +17490,7 @@
                 </a:solidFill>
                 <a:latin typeface="Aptos"/>
               </a:rPr>
-              <a:t>12</a:t>
+              <a:t>13</a:t>
             </a:r>
           </a:p>
         </p:txBody>
@@ -18693,7 +18694,7 @@
                 </a:solidFill>
                 <a:latin typeface="Aptos"/>
               </a:rPr>
-              <a:t>07</a:t>
+              <a:t>08</a:t>
             </a:r>
           </a:p>
         </p:txBody>
@@ -19755,7 +19756,7 @@
                 </a:solidFill>
                 <a:latin typeface="Aptos"/>
               </a:rPr>
-              <a:t>21</a:t>
+              <a:t>22</a:t>
             </a:r>
           </a:p>
         </p:txBody>
@@ -20935,7 +20936,7 @@
                 </a:solidFill>
                 <a:latin typeface="Aptos"/>
               </a:rPr>
-              <a:t>22</a:t>
+              <a:t>23</a:t>
             </a:r>
           </a:p>
         </p:txBody>
@@ -22125,7 +22126,7 @@
                 </a:solidFill>
                 <a:latin typeface="Aptos"/>
               </a:rPr>
-              <a:t>15</a:t>
+              <a:t>16</a:t>
             </a:r>
           </a:p>
         </p:txBody>
@@ -23603,7 +23604,7 @@
                 </a:solidFill>
                 <a:latin typeface="Aptos"/>
               </a:rPr>
-              <a:t>16</a:t>
+              <a:t>17</a:t>
             </a:r>
           </a:p>
         </p:txBody>
@@ -24484,7 +24485,7 @@
                 </a:solidFill>
                 <a:latin typeface="Aptos"/>
               </a:rPr>
-              <a:t>17</a:t>
+              <a:t>18</a:t>
             </a:r>
           </a:p>
         </p:txBody>
@@ -26044,7 +26045,7 @@
                 </a:solidFill>
                 <a:latin typeface="Aptos"/>
               </a:rPr>
-              <a:t>06</a:t>
+              <a:t>07</a:t>
             </a:r>
           </a:p>
         </p:txBody>
@@ -27145,7 +27146,7 @@
                 </a:solidFill>
                 <a:latin typeface="Aptos"/>
               </a:rPr>
-              <a:t>28</a:t>
+              <a:t>29</a:t>
             </a:r>
           </a:p>
         </p:txBody>
@@ -28586,7 +28587,7 @@
                 </a:solidFill>
                 <a:latin typeface="Aptos"/>
               </a:rPr>
-              <a:t>34</a:t>
+              <a:t>35</a:t>
             </a:r>
           </a:p>
         </p:txBody>
@@ -29226,7 +29227,7 @@
                 </a:solidFill>
                 <a:latin typeface="Aptos"/>
               </a:rPr>
-              <a:t>13</a:t>
+              <a:t>14</a:t>
             </a:r>
           </a:p>
         </p:txBody>
@@ -32400,17 +32401,17 @@
         <p:spPr>
           <a:xfrm>
             <a:off x="0" y="0"/>
-            <a:ext cx="164592" cy="6858000"/>
+            <a:ext cx="118872" cy="6858000"/>
           </a:xfrm>
           <a:prstGeom prst="rect">
             <a:avLst/>
           </a:prstGeom>
           <a:solidFill>
-            <a:srgbClr val="FF9E58"/>
+            <a:srgbClr val="53D68E"/>
           </a:solidFill>
           <a:ln>
             <a:solidFill>
-              <a:srgbClr val="FF9E58"/>
+              <a:srgbClr val="53D68E"/>
             </a:solidFill>
           </a:ln>
         </p:spPr>
@@ -32444,8 +32445,8 @@
         </p:nvSpPr>
         <p:spPr>
           <a:xfrm>
-            <a:off x="685800" y="685800"/>
-            <a:ext cx="3657600" cy="274320"/>
+            <a:off x="502920" y="320040"/>
+            <a:ext cx="2743200" cy="228600"/>
           </a:xfrm>
           <a:prstGeom prst="rect">
             <a:avLst/>
@@ -32460,13 +32461,13 @@
           <a:p>
             <a:pPr algn="l"/>
             <a:r>
-              <a:rPr sz="1200" b="1">
-                <a:solidFill>
-                  <a:srgbClr val="FF9E58"/>
-                </a:solidFill>
-                <a:latin typeface="Aptos"/>
-              </a:rPr>
-              <a:t>PARTE 2</a:t>
+              <a:rPr sz="1000" b="1">
+                <a:solidFill>
+                  <a:srgbClr val="53D68E"/>
+                </a:solidFill>
+                <a:latin typeface="Aptos"/>
+              </a:rPr>
+              <a:t>DOCKER</a:t>
             </a:r>
           </a:p>
         </p:txBody>
@@ -32479,8 +32480,8 @@
         </p:nvSpPr>
         <p:spPr>
           <a:xfrm>
-            <a:off x="11018520" y="658368"/>
-            <a:ext cx="594360" cy="274320"/>
+            <a:off x="11109960" y="320040"/>
+            <a:ext cx="502920" cy="228600"/>
           </a:xfrm>
           <a:prstGeom prst="rect">
             <a:avLst/>
@@ -32495,13 +32496,13 @@
           <a:p>
             <a:pPr algn="r"/>
             <a:r>
-              <a:rPr sz="1100" b="1">
-                <a:solidFill>
-                  <a:srgbClr val="B1BBCC"/>
-                </a:solidFill>
-                <a:latin typeface="Aptos"/>
-              </a:rPr>
-              <a:t>14</a:t>
+              <a:rPr sz="1000" b="1">
+                <a:solidFill>
+                  <a:srgbClr val="B1BBCC"/>
+                </a:solidFill>
+                <a:latin typeface="Aptos"/>
+              </a:rPr>
+              <a:t>04</a:t>
             </a:r>
           </a:p>
         </p:txBody>
@@ -32514,8 +32515,8 @@
         </p:nvSpPr>
         <p:spPr>
           <a:xfrm>
-            <a:off x="667512" y="1965960"/>
-            <a:ext cx="9966960" cy="1051560"/>
+            <a:off x="502920" y="758952"/>
+            <a:ext cx="10698480" cy="502920"/>
           </a:xfrm>
           <a:prstGeom prst="rect">
             <a:avLst/>
@@ -32530,13 +32531,13 @@
           <a:p>
             <a:pPr algn="l"/>
             <a:r>
-              <a:rPr sz="3800" b="1">
+              <a:rPr sz="2700" b="1">
                 <a:solidFill>
                   <a:srgbClr val="FFFFFF"/>
                 </a:solidFill>
                 <a:latin typeface="Aptos"/>
               </a:rPr>
-              <a:t>Frontend React</a:t>
+              <a:t>Comandos útiles y acceso a MariaDB</a:t>
             </a:r>
           </a:p>
         </p:txBody>
@@ -32549,8 +32550,8 @@
         </p:nvSpPr>
         <p:spPr>
           <a:xfrm>
-            <a:off x="704088" y="3337560"/>
-            <a:ext cx="9784080" cy="1097280"/>
+            <a:off x="530352" y="1353312"/>
+            <a:ext cx="10607040" cy="365760"/>
           </a:xfrm>
           <a:prstGeom prst="rect">
             <a:avLst/>
@@ -32565,37 +32566,72 @@
           <a:p>
             <a:pPr algn="l"/>
             <a:r>
-              <a:rPr sz="1800" b="0">
-                <a:solidFill>
-                  <a:srgbClr val="B1BBCC"/>
-                </a:solidFill>
-                <a:latin typeface="Aptos"/>
-              </a:rPr>
-              <a:t>Cómo se organiza la interfaz, qué son los componentes y hooks, y cómo el navegador utiliza HTTP para pedir datos.</a:t>
-            </a:r>
-          </a:p>
-        </p:txBody>
-      </p:sp>
-      <p:sp>
-        <p:nvSpPr>
-          <p:cNvPr id="7" name="Rectangle 6"/>
+              <a:rPr sz="1300" b="0">
+                <a:solidFill>
+                  <a:srgbClr val="B1BBCC"/>
+                </a:solidFill>
+                <a:latin typeface="Aptos"/>
+              </a:rPr>
+              <a:t>Ejecutar desde la raíz del proyecto. Dentro de Docker no se usa C:\xampp\php\php.exe.</a:t>
+            </a:r>
+          </a:p>
+        </p:txBody>
+      </p:sp>
+      <p:sp>
+        <p:nvSpPr>
+          <p:cNvPr id="7" name="TextBox 6"/>
+          <p:cNvSpPr txBox="1"/>
+          <p:nvPr/>
+        </p:nvSpPr>
+        <p:spPr>
+          <a:xfrm>
+            <a:off x="530352" y="6510528"/>
+            <a:ext cx="3657600" cy="164592"/>
+          </a:xfrm>
+          <a:prstGeom prst="rect">
+            <a:avLst/>
+          </a:prstGeom>
+          <a:noFill/>
+        </p:spPr>
+        <p:txBody>
+          <a:bodyPr wrap="none" lIns="36576" rIns="36576">
+            <a:spAutoFit/>
+          </a:bodyPr>
+          <a:lstStyle/>
+          <a:p>
+            <a:pPr algn="l"/>
+            <a:r>
+              <a:rPr sz="800" b="1">
+                <a:solidFill>
+                  <a:srgbClr val="B1BBCC"/>
+                </a:solidFill>
+                <a:latin typeface="Aptos"/>
+              </a:rPr>
+              <a:t>CINE APP · HOSTINGER COMPARTIDO</a:t>
+            </a:r>
+          </a:p>
+        </p:txBody>
+      </p:sp>
+      <p:sp>
+        <p:nvSpPr>
+          <p:cNvPr id="8" name="Rounded Rectangle 7"/>
           <p:cNvSpPr/>
           <p:nvPr/>
         </p:nvSpPr>
         <p:spPr>
           <a:xfrm>
-            <a:off x="704088" y="5029200"/>
-            <a:ext cx="2011680" cy="73152"/>
-          </a:xfrm>
-          <a:prstGeom prst="rect">
+            <a:off x="320040" y="1737360"/>
+            <a:ext cx="5623560" cy="3520440"/>
+          </a:xfrm>
+          <a:prstGeom prst="roundRect">
             <a:avLst/>
           </a:prstGeom>
           <a:solidFill>
-            <a:srgbClr val="FF9E58"/>
+            <a:srgbClr val="172238"/>
           </a:solidFill>
           <a:ln>
             <a:solidFill>
-              <a:srgbClr val="FF9E58"/>
+              <a:srgbClr val="2A3950"/>
             </a:solidFill>
           </a:ln>
         </p:spPr>
@@ -32623,14 +32659,59 @@
       </p:sp>
       <p:sp>
         <p:nvSpPr>
-          <p:cNvPr id="8" name="TextBox 7"/>
-          <p:cNvSpPr txBox="1"/>
-          <p:nvPr/>
-        </p:nvSpPr>
-        <p:spPr>
-          <a:xfrm>
-            <a:off x="704088" y="6080760"/>
-            <a:ext cx="3657600" cy="182880"/>
+          <p:cNvPr id="9" name="Rounded Rectangle 8"/>
+          <p:cNvSpPr/>
+          <p:nvPr/>
+        </p:nvSpPr>
+        <p:spPr>
+          <a:xfrm>
+            <a:off x="320040" y="1737360"/>
+            <a:ext cx="64008" cy="3520440"/>
+          </a:xfrm>
+          <a:prstGeom prst="roundRect">
+            <a:avLst/>
+          </a:prstGeom>
+          <a:solidFill>
+            <a:srgbClr val="36D3DD"/>
+          </a:solidFill>
+          <a:ln>
+            <a:solidFill>
+              <a:srgbClr val="36D3DD"/>
+            </a:solidFill>
+          </a:ln>
+        </p:spPr>
+        <p:style>
+          <a:lnRef idx="1">
+            <a:schemeClr val="accent1"/>
+          </a:lnRef>
+          <a:fillRef idx="3">
+            <a:schemeClr val="accent1"/>
+          </a:fillRef>
+          <a:effectRef idx="2">
+            <a:schemeClr val="accent1"/>
+          </a:effectRef>
+          <a:fontRef idx="minor">
+            <a:schemeClr val="lt1"/>
+          </a:fontRef>
+        </p:style>
+        <p:txBody>
+          <a:bodyPr rtlCol="0" anchor="ctr"/>
+          <a:lstStyle/>
+          <a:p>
+            <a:pPr algn="ctr"/>
+          </a:p>
+        </p:txBody>
+      </p:sp>
+      <p:sp>
+        <p:nvSpPr>
+          <p:cNvPr id="10" name="TextBox 9"/>
+          <p:cNvSpPr txBox="1"/>
+          <p:nvPr/>
+        </p:nvSpPr>
+        <p:spPr>
+          <a:xfrm>
+            <a:off x="548640" y="1920240"/>
+            <a:ext cx="5212080" cy="292608"/>
           </a:xfrm>
           <a:prstGeom prst="rect">
             <a:avLst/>
@@ -32645,13 +32726,594 @@
           <a:p>
             <a:pPr algn="l"/>
             <a:r>
-              <a:rPr sz="900" b="1">
-                <a:solidFill>
-                  <a:srgbClr val="B1BBCC"/>
-                </a:solidFill>
-                <a:latin typeface="Aptos"/>
-              </a:rPr>
-              <a:t>CINE APP · RECORRIDO DIDÁCTICO</a:t>
+              <a:rPr sz="1500" b="1">
+                <a:solidFill>
+                  <a:srgbClr val="FFFFFF"/>
+                </a:solidFill>
+                <a:latin typeface="Aptos"/>
+              </a:rPr>
+              <a:t>SYMFONY EN BACKEND</a:t>
+            </a:r>
+          </a:p>
+        </p:txBody>
+      </p:sp>
+      <p:sp>
+        <p:nvSpPr>
+          <p:cNvPr id="11" name="TextBox 10"/>
+          <p:cNvSpPr txBox="1"/>
+          <p:nvPr/>
+        </p:nvSpPr>
+        <p:spPr>
+          <a:xfrm>
+            <a:off x="548640" y="2377439"/>
+            <a:ext cx="5212080" cy="2743200"/>
+          </a:xfrm>
+          <a:prstGeom prst="rect">
+            <a:avLst/>
+          </a:prstGeom>
+          <a:noFill/>
+        </p:spPr>
+        <p:txBody>
+          <a:bodyPr wrap="none" lIns="36576" rIns="36576">
+            <a:spAutoFit/>
+          </a:bodyPr>
+          <a:lstStyle/>
+          <a:p>
+            <a:pPr algn="l"/>
+            <a:r>
+              <a:rPr sz="1250" b="0">
+                <a:solidFill>
+                  <a:srgbClr val="B1BBCC"/>
+                </a:solidFill>
+                <a:latin typeface="Aptos"/>
+              </a:rPr>
+              <a:t>docker compose exec backend php bin/console about</a:t>
+            </a:r>
+            <a:br/>
+            <a:r>
+              <a:rPr sz="1250" b="0">
+                <a:solidFill>
+                  <a:srgbClr val="B1BBCC"/>
+                </a:solidFill>
+                <a:latin typeface="Aptos"/>
+              </a:rPr>
+              <a:t>docker compose exec backend php bin/console debug:router</a:t>
+            </a:r>
+            <a:br/>
+            <a:r>
+              <a:rPr sz="1250" b="0">
+                <a:solidFill>
+                  <a:srgbClr val="B1BBCC"/>
+                </a:solidFill>
+                <a:latin typeface="Aptos"/>
+              </a:rPr>
+              <a:t>docker compose exec backend php bin/console doctrine:migrations:status</a:t>
+            </a:r>
+            <a:br/>
+            <a:r>
+              <a:rPr sz="1250" b="0">
+                <a:solidFill>
+                  <a:srgbClr val="B1BBCC"/>
+                </a:solidFill>
+                <a:latin typeface="Aptos"/>
+              </a:rPr>
+              <a:t>docker compose exec backend php bin/console doctrine:schema:validate</a:t>
+            </a:r>
+            <a:br/>
+            <a:r>
+              <a:rPr sz="1250" b="0">
+                <a:solidFill>
+                  <a:srgbClr val="B1BBCC"/>
+                </a:solidFill>
+                <a:latin typeface="Aptos"/>
+              </a:rPr>
+              <a:t>docker compose exec backend php bin/console cache:clear</a:t>
+            </a:r>
+          </a:p>
+        </p:txBody>
+      </p:sp>
+      <p:sp>
+        <p:nvSpPr>
+          <p:cNvPr id="12" name="Rounded Rectangle 11"/>
+          <p:cNvSpPr/>
+          <p:nvPr/>
+        </p:nvSpPr>
+        <p:spPr>
+          <a:xfrm>
+            <a:off x="4892040" y="1901952"/>
+            <a:ext cx="777240" cy="274320"/>
+          </a:xfrm>
+          <a:prstGeom prst="roundRect">
+            <a:avLst/>
+          </a:prstGeom>
+          <a:solidFill>
+            <a:srgbClr val="36D3DD"/>
+          </a:solidFill>
+          <a:ln>
+            <a:solidFill>
+              <a:srgbClr val="36D3DD"/>
+            </a:solidFill>
+          </a:ln>
+        </p:spPr>
+        <p:style>
+          <a:lnRef idx="1">
+            <a:schemeClr val="accent1"/>
+          </a:lnRef>
+          <a:fillRef idx="3">
+            <a:schemeClr val="accent1"/>
+          </a:fillRef>
+          <a:effectRef idx="2">
+            <a:schemeClr val="accent1"/>
+          </a:effectRef>
+          <a:fontRef idx="minor">
+            <a:schemeClr val="lt1"/>
+          </a:fontRef>
+        </p:style>
+        <p:txBody>
+          <a:bodyPr rtlCol="0" anchor="ctr"/>
+          <a:lstStyle/>
+          <a:p>
+            <a:pPr algn="ctr"/>
+          </a:p>
+        </p:txBody>
+      </p:sp>
+      <p:sp>
+        <p:nvSpPr>
+          <p:cNvPr id="13" name="TextBox 12"/>
+          <p:cNvSpPr txBox="1"/>
+          <p:nvPr/>
+        </p:nvSpPr>
+        <p:spPr>
+          <a:xfrm>
+            <a:off x="4937760" y="1947672"/>
+            <a:ext cx="685800" cy="128016"/>
+          </a:xfrm>
+          <a:prstGeom prst="rect">
+            <a:avLst/>
+          </a:prstGeom>
+          <a:noFill/>
+        </p:spPr>
+        <p:txBody>
+          <a:bodyPr wrap="none" lIns="36576" rIns="36576">
+            <a:spAutoFit/>
+          </a:bodyPr>
+          <a:lstStyle/>
+          <a:p>
+            <a:pPr algn="ctr"/>
+            <a:r>
+              <a:rPr sz="800" b="1">
+                <a:solidFill>
+                  <a:srgbClr val="0C1323"/>
+                </a:solidFill>
+                <a:latin typeface="Aptos"/>
+              </a:rPr>
+              <a:t>CONTENEDOR</a:t>
+            </a:r>
+          </a:p>
+        </p:txBody>
+      </p:sp>
+      <p:sp>
+        <p:nvSpPr>
+          <p:cNvPr id="14" name="Rounded Rectangle 13"/>
+          <p:cNvSpPr/>
+          <p:nvPr/>
+        </p:nvSpPr>
+        <p:spPr>
+          <a:xfrm>
+            <a:off x="6217920" y="1737360"/>
+            <a:ext cx="5623560" cy="3520440"/>
+          </a:xfrm>
+          <a:prstGeom prst="roundRect">
+            <a:avLst/>
+          </a:prstGeom>
+          <a:solidFill>
+            <a:srgbClr val="172238"/>
+          </a:solidFill>
+          <a:ln>
+            <a:solidFill>
+              <a:srgbClr val="2A3950"/>
+            </a:solidFill>
+          </a:ln>
+        </p:spPr>
+        <p:style>
+          <a:lnRef idx="1">
+            <a:schemeClr val="accent1"/>
+          </a:lnRef>
+          <a:fillRef idx="3">
+            <a:schemeClr val="accent1"/>
+          </a:fillRef>
+          <a:effectRef idx="2">
+            <a:schemeClr val="accent1"/>
+          </a:effectRef>
+          <a:fontRef idx="minor">
+            <a:schemeClr val="lt1"/>
+          </a:fontRef>
+        </p:style>
+        <p:txBody>
+          <a:bodyPr rtlCol="0" anchor="ctr"/>
+          <a:lstStyle/>
+          <a:p>
+            <a:pPr algn="ctr"/>
+          </a:p>
+        </p:txBody>
+      </p:sp>
+      <p:sp>
+        <p:nvSpPr>
+          <p:cNvPr id="15" name="Rounded Rectangle 14"/>
+          <p:cNvSpPr/>
+          <p:nvPr/>
+        </p:nvSpPr>
+        <p:spPr>
+          <a:xfrm>
+            <a:off x="6217920" y="1737360"/>
+            <a:ext cx="64008" cy="3520440"/>
+          </a:xfrm>
+          <a:prstGeom prst="roundRect">
+            <a:avLst/>
+          </a:prstGeom>
+          <a:solidFill>
+            <a:srgbClr val="53D68E"/>
+          </a:solidFill>
+          <a:ln>
+            <a:solidFill>
+              <a:srgbClr val="53D68E"/>
+            </a:solidFill>
+          </a:ln>
+        </p:spPr>
+        <p:style>
+          <a:lnRef idx="1">
+            <a:schemeClr val="accent1"/>
+          </a:lnRef>
+          <a:fillRef idx="3">
+            <a:schemeClr val="accent1"/>
+          </a:fillRef>
+          <a:effectRef idx="2">
+            <a:schemeClr val="accent1"/>
+          </a:effectRef>
+          <a:fontRef idx="minor">
+            <a:schemeClr val="lt1"/>
+          </a:fontRef>
+        </p:style>
+        <p:txBody>
+          <a:bodyPr rtlCol="0" anchor="ctr"/>
+          <a:lstStyle/>
+          <a:p>
+            <a:pPr algn="ctr"/>
+          </a:p>
+        </p:txBody>
+      </p:sp>
+      <p:sp>
+        <p:nvSpPr>
+          <p:cNvPr id="16" name="TextBox 15"/>
+          <p:cNvSpPr txBox="1"/>
+          <p:nvPr/>
+        </p:nvSpPr>
+        <p:spPr>
+          <a:xfrm>
+            <a:off x="6446520" y="1920240"/>
+            <a:ext cx="5212080" cy="292608"/>
+          </a:xfrm>
+          <a:prstGeom prst="rect">
+            <a:avLst/>
+          </a:prstGeom>
+          <a:noFill/>
+        </p:spPr>
+        <p:txBody>
+          <a:bodyPr wrap="none" lIns="36576" rIns="36576">
+            <a:spAutoFit/>
+          </a:bodyPr>
+          <a:lstStyle/>
+          <a:p>
+            <a:pPr algn="l"/>
+            <a:r>
+              <a:rPr sz="1500" b="1">
+                <a:solidFill>
+                  <a:srgbClr val="FFFFFF"/>
+                </a:solidFill>
+                <a:latin typeface="Aptos"/>
+              </a:rPr>
+              <a:t>ENTRAR A MARIADB</a:t>
+            </a:r>
+          </a:p>
+        </p:txBody>
+      </p:sp>
+      <p:sp>
+        <p:nvSpPr>
+          <p:cNvPr id="17" name="TextBox 16"/>
+          <p:cNvSpPr txBox="1"/>
+          <p:nvPr/>
+        </p:nvSpPr>
+        <p:spPr>
+          <a:xfrm>
+            <a:off x="6446520" y="2377439"/>
+            <a:ext cx="5212080" cy="2743200"/>
+          </a:xfrm>
+          <a:prstGeom prst="rect">
+            <a:avLst/>
+          </a:prstGeom>
+          <a:noFill/>
+        </p:spPr>
+        <p:txBody>
+          <a:bodyPr wrap="none" lIns="36576" rIns="36576">
+            <a:spAutoFit/>
+          </a:bodyPr>
+          <a:lstStyle/>
+          <a:p>
+            <a:pPr algn="l"/>
+            <a:r>
+              <a:rPr sz="1250" b="0">
+                <a:solidFill>
+                  <a:srgbClr val="B1BBCC"/>
+                </a:solidFill>
+                <a:latin typeface="Aptos"/>
+              </a:rPr>
+              <a:t>docker compose exec database</a:t>
+            </a:r>
+            <a:br/>
+            <a:r>
+              <a:rPr sz="1250" b="0">
+                <a:solidFill>
+                  <a:srgbClr val="B1BBCC"/>
+                </a:solidFill>
+                <a:latin typeface="Aptos"/>
+              </a:rPr>
+              <a:t>  mariadb -u cine -pcine cine</a:t>
+            </a:r>
+            <a:br/>
+            <a:br/>
+            <a:r>
+              <a:rPr sz="1250" b="0">
+                <a:solidFill>
+                  <a:srgbClr val="B1BBCC"/>
+                </a:solidFill>
+                <a:latin typeface="Aptos"/>
+              </a:rPr>
+              <a:t>Luego ejecutar:</a:t>
+            </a:r>
+            <a:br/>
+            <a:r>
+              <a:rPr sz="1250" b="0">
+                <a:solidFill>
+                  <a:srgbClr val="B1BBCC"/>
+                </a:solidFill>
+                <a:latin typeface="Aptos"/>
+              </a:rPr>
+              <a:t>SHOW DATABASES;</a:t>
+            </a:r>
+            <a:br/>
+            <a:r>
+              <a:rPr sz="1250" b="0">
+                <a:solidFill>
+                  <a:srgbClr val="B1BBCC"/>
+                </a:solidFill>
+                <a:latin typeface="Aptos"/>
+              </a:rPr>
+              <a:t>USE cine;</a:t>
+            </a:r>
+            <a:br/>
+            <a:r>
+              <a:rPr sz="1250" b="0">
+                <a:solidFill>
+                  <a:srgbClr val="B1BBCC"/>
+                </a:solidFill>
+                <a:latin typeface="Aptos"/>
+              </a:rPr>
+              <a:t>SHOW TABLES;</a:t>
+            </a:r>
+            <a:br/>
+            <a:r>
+              <a:rPr sz="1250" b="0">
+                <a:solidFill>
+                  <a:srgbClr val="B1BBCC"/>
+                </a:solidFill>
+                <a:latin typeface="Aptos"/>
+              </a:rPr>
+              <a:t>DESCRIBE nombre_tabla;</a:t>
+            </a:r>
+            <a:br/>
+            <a:r>
+              <a:rPr sz="1250" b="0">
+                <a:solidFill>
+                  <a:srgbClr val="B1BBCC"/>
+                </a:solidFill>
+                <a:latin typeface="Aptos"/>
+              </a:rPr>
+              <a:t>SELECT * FROM nombre_tabla LIMIT 20;</a:t>
+            </a:r>
+          </a:p>
+        </p:txBody>
+      </p:sp>
+      <p:sp>
+        <p:nvSpPr>
+          <p:cNvPr id="18" name="Rounded Rectangle 17"/>
+          <p:cNvSpPr/>
+          <p:nvPr/>
+        </p:nvSpPr>
+        <p:spPr>
+          <a:xfrm>
+            <a:off x="10789919" y="1901952"/>
+            <a:ext cx="777240" cy="274320"/>
+          </a:xfrm>
+          <a:prstGeom prst="roundRect">
+            <a:avLst/>
+          </a:prstGeom>
+          <a:solidFill>
+            <a:srgbClr val="53D68E"/>
+          </a:solidFill>
+          <a:ln>
+            <a:solidFill>
+              <a:srgbClr val="53D68E"/>
+            </a:solidFill>
+          </a:ln>
+        </p:spPr>
+        <p:style>
+          <a:lnRef idx="1">
+            <a:schemeClr val="accent1"/>
+          </a:lnRef>
+          <a:fillRef idx="3">
+            <a:schemeClr val="accent1"/>
+          </a:fillRef>
+          <a:effectRef idx="2">
+            <a:schemeClr val="accent1"/>
+          </a:effectRef>
+          <a:fontRef idx="minor">
+            <a:schemeClr val="lt1"/>
+          </a:fontRef>
+        </p:style>
+        <p:txBody>
+          <a:bodyPr rtlCol="0" anchor="ctr"/>
+          <a:lstStyle/>
+          <a:p>
+            <a:pPr algn="ctr"/>
+          </a:p>
+        </p:txBody>
+      </p:sp>
+      <p:sp>
+        <p:nvSpPr>
+          <p:cNvPr id="19" name="TextBox 18"/>
+          <p:cNvSpPr txBox="1"/>
+          <p:nvPr/>
+        </p:nvSpPr>
+        <p:spPr>
+          <a:xfrm>
+            <a:off x="10835640" y="1947672"/>
+            <a:ext cx="685800" cy="128016"/>
+          </a:xfrm>
+          <a:prstGeom prst="rect">
+            <a:avLst/>
+          </a:prstGeom>
+          <a:noFill/>
+        </p:spPr>
+        <p:txBody>
+          <a:bodyPr wrap="none" lIns="36576" rIns="36576">
+            <a:spAutoFit/>
+          </a:bodyPr>
+          <a:lstStyle/>
+          <a:p>
+            <a:pPr algn="ctr"/>
+            <a:r>
+              <a:rPr sz="800" b="1">
+                <a:solidFill>
+                  <a:srgbClr val="0C1323"/>
+                </a:solidFill>
+                <a:latin typeface="Aptos"/>
+              </a:rPr>
+              <a:t>BASE DE DATOS</a:t>
+            </a:r>
+          </a:p>
+        </p:txBody>
+      </p:sp>
+      <p:sp>
+        <p:nvSpPr>
+          <p:cNvPr id="20" name="Rounded Rectangle 19"/>
+          <p:cNvSpPr/>
+          <p:nvPr/>
+        </p:nvSpPr>
+        <p:spPr>
+          <a:xfrm>
+            <a:off x="502920" y="5559552"/>
+            <a:ext cx="11201400" cy="640080"/>
+          </a:xfrm>
+          <a:prstGeom prst="roundRect">
+            <a:avLst/>
+          </a:prstGeom>
+          <a:solidFill>
+            <a:srgbClr val="172238"/>
+          </a:solidFill>
+          <a:ln>
+            <a:solidFill>
+              <a:srgbClr val="172238"/>
+            </a:solidFill>
+          </a:ln>
+        </p:spPr>
+        <p:style>
+          <a:lnRef idx="1">
+            <a:schemeClr val="accent1"/>
+          </a:lnRef>
+          <a:fillRef idx="3">
+            <a:schemeClr val="accent1"/>
+          </a:fillRef>
+          <a:effectRef idx="2">
+            <a:schemeClr val="accent1"/>
+          </a:effectRef>
+          <a:fontRef idx="minor">
+            <a:schemeClr val="lt1"/>
+          </a:fontRef>
+        </p:style>
+        <p:txBody>
+          <a:bodyPr rtlCol="0" anchor="ctr"/>
+          <a:lstStyle/>
+          <a:p>
+            <a:pPr algn="ctr"/>
+          </a:p>
+        </p:txBody>
+      </p:sp>
+      <p:sp>
+        <p:nvSpPr>
+          <p:cNvPr id="21" name="TextBox 20"/>
+          <p:cNvSpPr txBox="1"/>
+          <p:nvPr/>
+        </p:nvSpPr>
+        <p:spPr>
+          <a:xfrm>
+            <a:off x="731520" y="5760720"/>
+            <a:ext cx="10744200" cy="246888"/>
+          </a:xfrm>
+          <a:prstGeom prst="rect">
+            <a:avLst/>
+          </a:prstGeom>
+          <a:noFill/>
+        </p:spPr>
+        <p:txBody>
+          <a:bodyPr wrap="none" lIns="36576" rIns="36576">
+            <a:spAutoFit/>
+          </a:bodyPr>
+          <a:lstStyle/>
+          <a:p>
+            <a:pPr algn="ctr"/>
+            <a:r>
+              <a:rPr sz="1200" b="1">
+                <a:solidFill>
+                  <a:srgbClr val="FFFFFF"/>
+                </a:solidFill>
+                <a:latin typeface="Consolas"/>
+              </a:rPr>
+              <a:t>Consulta rápida: docker compose exec database mariadb -u cine -pcine cine -e "SHOW TABLES;"</a:t>
+            </a:r>
+          </a:p>
+        </p:txBody>
+      </p:sp>
+      <p:sp>
+        <p:nvSpPr>
+          <p:cNvPr id="22" name="TextBox 21"/>
+          <p:cNvSpPr txBox="1"/>
+          <p:nvPr/>
+        </p:nvSpPr>
+        <p:spPr>
+          <a:xfrm>
+            <a:off x="640080" y="6272784"/>
+            <a:ext cx="10881360" cy="228600"/>
+          </a:xfrm>
+          <a:prstGeom prst="rect">
+            <a:avLst/>
+          </a:prstGeom>
+          <a:noFill/>
+        </p:spPr>
+        <p:txBody>
+          <a:bodyPr wrap="none" lIns="36576" rIns="36576">
+            <a:spAutoFit/>
+          </a:bodyPr>
+          <a:lstStyle/>
+          <a:p>
+            <a:pPr algn="ctr"/>
+            <a:r>
+              <a:rPr sz="1000" b="1">
+                <a:solidFill>
+                  <a:srgbClr val="FF6978"/>
+                </a:solidFill>
+                <a:latin typeface="Aptos"/>
+              </a:rPr>
+              <a:t>Credenciales locales de compose.yaml: base cine · usuario cine · clave cine. No reutilizarlas en producción.</a:t>
             </a:r>
           </a:p>
         </p:txBody>
@@ -32697,11 +33359,11 @@
             <a:avLst/>
           </a:prstGeom>
           <a:solidFill>
-            <a:srgbClr val="36D3DD"/>
+            <a:srgbClr val="FF9E58"/>
           </a:solidFill>
           <a:ln>
             <a:solidFill>
-              <a:srgbClr val="36D3DD"/>
+              <a:srgbClr val="FF9E58"/>
             </a:solidFill>
           </a:ln>
         </p:spPr>
@@ -32753,11 +33415,11 @@
             <a:r>
               <a:rPr sz="1200" b="1">
                 <a:solidFill>
-                  <a:srgbClr val="36D3DD"/>
-                </a:solidFill>
-                <a:latin typeface="Aptos"/>
-              </a:rPr>
-              <a:t>PARTE 1</a:t>
+                  <a:srgbClr val="FF9E58"/>
+                </a:solidFill>
+                <a:latin typeface="Aptos"/>
+              </a:rPr>
+              <a:t>PARTE 2</a:t>
             </a:r>
           </a:p>
         </p:txBody>
@@ -32792,7 +33454,7 @@
                 </a:solidFill>
                 <a:latin typeface="Aptos"/>
               </a:rPr>
-              <a:t>04</a:t>
+              <a:t>15</a:t>
             </a:r>
           </a:p>
         </p:txBody>
@@ -32827,7 +33489,7 @@
                 </a:solidFill>
                 <a:latin typeface="Aptos"/>
               </a:rPr>
-              <a:t>Backend Symfony</a:t>
+              <a:t>Frontend React</a:t>
             </a:r>
           </a:p>
         </p:txBody>
@@ -32862,7 +33524,7 @@
                 </a:solidFill>
                 <a:latin typeface="Aptos"/>
               </a:rPr>
-              <a:t>Dónde viven los endpoints, cómo se validan parámetros y cómo Repository, Doctrine ORM y MariaDB obtienen los datos.</a:t>
+              <a:t>Cómo se organiza la interfaz, qué son los componentes y hooks, y cómo el navegador utiliza HTTP para pedir datos.</a:t>
             </a:r>
           </a:p>
         </p:txBody>
@@ -32882,11 +33544,11 @@
             <a:avLst/>
           </a:prstGeom>
           <a:solidFill>
-            <a:srgbClr val="36D3DD"/>
+            <a:srgbClr val="FF9E58"/>
           </a:solidFill>
           <a:ln>
             <a:solidFill>
-              <a:srgbClr val="36D3DD"/>
+              <a:srgbClr val="FF9E58"/>
             </a:solidFill>
           </a:ln>
         </p:spPr>
@@ -32988,6 +33650,297 @@
             <a:avLst/>
           </a:prstGeom>
           <a:solidFill>
+            <a:srgbClr val="36D3DD"/>
+          </a:solidFill>
+          <a:ln>
+            <a:solidFill>
+              <a:srgbClr val="36D3DD"/>
+            </a:solidFill>
+          </a:ln>
+        </p:spPr>
+        <p:style>
+          <a:lnRef idx="1">
+            <a:schemeClr val="accent1"/>
+          </a:lnRef>
+          <a:fillRef idx="3">
+            <a:schemeClr val="accent1"/>
+          </a:fillRef>
+          <a:effectRef idx="2">
+            <a:schemeClr val="accent1"/>
+          </a:effectRef>
+          <a:fontRef idx="minor">
+            <a:schemeClr val="lt1"/>
+          </a:fontRef>
+        </p:style>
+        <p:txBody>
+          <a:bodyPr rtlCol="0" anchor="ctr"/>
+          <a:lstStyle/>
+          <a:p>
+            <a:pPr algn="ctr"/>
+          </a:p>
+        </p:txBody>
+      </p:sp>
+      <p:sp>
+        <p:nvSpPr>
+          <p:cNvPr id="3" name="TextBox 2"/>
+          <p:cNvSpPr txBox="1"/>
+          <p:nvPr/>
+        </p:nvSpPr>
+        <p:spPr>
+          <a:xfrm>
+            <a:off x="685800" y="685800"/>
+            <a:ext cx="3657600" cy="274320"/>
+          </a:xfrm>
+          <a:prstGeom prst="rect">
+            <a:avLst/>
+          </a:prstGeom>
+          <a:noFill/>
+        </p:spPr>
+        <p:txBody>
+          <a:bodyPr wrap="none" lIns="36576" rIns="36576">
+            <a:spAutoFit/>
+          </a:bodyPr>
+          <a:lstStyle/>
+          <a:p>
+            <a:pPr algn="l"/>
+            <a:r>
+              <a:rPr sz="1200" b="1">
+                <a:solidFill>
+                  <a:srgbClr val="36D3DD"/>
+                </a:solidFill>
+                <a:latin typeface="Aptos"/>
+              </a:rPr>
+              <a:t>PARTE 1</a:t>
+            </a:r>
+          </a:p>
+        </p:txBody>
+      </p:sp>
+      <p:sp>
+        <p:nvSpPr>
+          <p:cNvPr id="4" name="TextBox 3"/>
+          <p:cNvSpPr txBox="1"/>
+          <p:nvPr/>
+        </p:nvSpPr>
+        <p:spPr>
+          <a:xfrm>
+            <a:off x="11018520" y="658368"/>
+            <a:ext cx="594360" cy="274320"/>
+          </a:xfrm>
+          <a:prstGeom prst="rect">
+            <a:avLst/>
+          </a:prstGeom>
+          <a:noFill/>
+        </p:spPr>
+        <p:txBody>
+          <a:bodyPr wrap="none" lIns="36576" rIns="36576">
+            <a:spAutoFit/>
+          </a:bodyPr>
+          <a:lstStyle/>
+          <a:p>
+            <a:pPr algn="r"/>
+            <a:r>
+              <a:rPr sz="1100" b="1">
+                <a:solidFill>
+                  <a:srgbClr val="B1BBCC"/>
+                </a:solidFill>
+                <a:latin typeface="Aptos"/>
+              </a:rPr>
+              <a:t>05</a:t>
+            </a:r>
+          </a:p>
+        </p:txBody>
+      </p:sp>
+      <p:sp>
+        <p:nvSpPr>
+          <p:cNvPr id="5" name="TextBox 4"/>
+          <p:cNvSpPr txBox="1"/>
+          <p:nvPr/>
+        </p:nvSpPr>
+        <p:spPr>
+          <a:xfrm>
+            <a:off x="667512" y="1965960"/>
+            <a:ext cx="9966960" cy="1051560"/>
+          </a:xfrm>
+          <a:prstGeom prst="rect">
+            <a:avLst/>
+          </a:prstGeom>
+          <a:noFill/>
+        </p:spPr>
+        <p:txBody>
+          <a:bodyPr wrap="none" lIns="36576" rIns="36576">
+            <a:spAutoFit/>
+          </a:bodyPr>
+          <a:lstStyle/>
+          <a:p>
+            <a:pPr algn="l"/>
+            <a:r>
+              <a:rPr sz="3800" b="1">
+                <a:solidFill>
+                  <a:srgbClr val="FFFFFF"/>
+                </a:solidFill>
+                <a:latin typeface="Aptos"/>
+              </a:rPr>
+              <a:t>Backend Symfony</a:t>
+            </a:r>
+          </a:p>
+        </p:txBody>
+      </p:sp>
+      <p:sp>
+        <p:nvSpPr>
+          <p:cNvPr id="6" name="TextBox 5"/>
+          <p:cNvSpPr txBox="1"/>
+          <p:nvPr/>
+        </p:nvSpPr>
+        <p:spPr>
+          <a:xfrm>
+            <a:off x="704088" y="3337560"/>
+            <a:ext cx="9784080" cy="1097280"/>
+          </a:xfrm>
+          <a:prstGeom prst="rect">
+            <a:avLst/>
+          </a:prstGeom>
+          <a:noFill/>
+        </p:spPr>
+        <p:txBody>
+          <a:bodyPr wrap="none" lIns="36576" rIns="36576">
+            <a:spAutoFit/>
+          </a:bodyPr>
+          <a:lstStyle/>
+          <a:p>
+            <a:pPr algn="l"/>
+            <a:r>
+              <a:rPr sz="1800" b="0">
+                <a:solidFill>
+                  <a:srgbClr val="B1BBCC"/>
+                </a:solidFill>
+                <a:latin typeface="Aptos"/>
+              </a:rPr>
+              <a:t>Dónde viven los endpoints, cómo se validan parámetros y cómo Repository, Doctrine ORM y MariaDB obtienen los datos.</a:t>
+            </a:r>
+          </a:p>
+        </p:txBody>
+      </p:sp>
+      <p:sp>
+        <p:nvSpPr>
+          <p:cNvPr id="7" name="Rectangle 6"/>
+          <p:cNvSpPr/>
+          <p:nvPr/>
+        </p:nvSpPr>
+        <p:spPr>
+          <a:xfrm>
+            <a:off x="704088" y="5029200"/>
+            <a:ext cx="2011680" cy="73152"/>
+          </a:xfrm>
+          <a:prstGeom prst="rect">
+            <a:avLst/>
+          </a:prstGeom>
+          <a:solidFill>
+            <a:srgbClr val="36D3DD"/>
+          </a:solidFill>
+          <a:ln>
+            <a:solidFill>
+              <a:srgbClr val="36D3DD"/>
+            </a:solidFill>
+          </a:ln>
+        </p:spPr>
+        <p:style>
+          <a:lnRef idx="1">
+            <a:schemeClr val="accent1"/>
+          </a:lnRef>
+          <a:fillRef idx="3">
+            <a:schemeClr val="accent1"/>
+          </a:fillRef>
+          <a:effectRef idx="2">
+            <a:schemeClr val="accent1"/>
+          </a:effectRef>
+          <a:fontRef idx="minor">
+            <a:schemeClr val="lt1"/>
+          </a:fontRef>
+        </p:style>
+        <p:txBody>
+          <a:bodyPr rtlCol="0" anchor="ctr"/>
+          <a:lstStyle/>
+          <a:p>
+            <a:pPr algn="ctr"/>
+          </a:p>
+        </p:txBody>
+      </p:sp>
+      <p:sp>
+        <p:nvSpPr>
+          <p:cNvPr id="8" name="TextBox 7"/>
+          <p:cNvSpPr txBox="1"/>
+          <p:nvPr/>
+        </p:nvSpPr>
+        <p:spPr>
+          <a:xfrm>
+            <a:off x="704088" y="6080760"/>
+            <a:ext cx="3657600" cy="182880"/>
+          </a:xfrm>
+          <a:prstGeom prst="rect">
+            <a:avLst/>
+          </a:prstGeom>
+          <a:noFill/>
+        </p:spPr>
+        <p:txBody>
+          <a:bodyPr wrap="none" lIns="36576" rIns="36576">
+            <a:spAutoFit/>
+          </a:bodyPr>
+          <a:lstStyle/>
+          <a:p>
+            <a:pPr algn="l"/>
+            <a:r>
+              <a:rPr sz="900" b="1">
+                <a:solidFill>
+                  <a:srgbClr val="B1BBCC"/>
+                </a:solidFill>
+                <a:latin typeface="Aptos"/>
+              </a:rPr>
+              <a:t>CINE APP · RECORRIDO DIDÁCTICO</a:t>
+            </a:r>
+          </a:p>
+        </p:txBody>
+      </p:sp>
+    </p:spTree>
+  </p:cSld>
+  <p:clrMapOvr>
+    <a:masterClrMapping/>
+  </p:clrMapOvr>
+</p:sld>
+</file>
+
+<file path=ppt/slides/slide35.xml><?xml version="1.0" encoding="utf-8"?>
+<p:sld xmlns:a="http://schemas.openxmlformats.org/drawingml/2006/main" xmlns:p="http://schemas.openxmlformats.org/presentationml/2006/main" xmlns:r="http://schemas.openxmlformats.org/officeDocument/2006/relationships">
+  <p:cSld>
+    <p:bg>
+      <p:bgPr>
+        <a:solidFill>
+          <a:srgbClr val="0C1323"/>
+        </a:solidFill>
+        <a:effectLst/>
+      </p:bgPr>
+    </p:bg>
+    <p:spTree>
+      <p:nvGrpSpPr>
+        <p:cNvPr id="1" name=""/>
+        <p:cNvGrpSpPr/>
+        <p:nvPr/>
+      </p:nvGrpSpPr>
+      <p:grpSpPr/>
+      <p:sp>
+        <p:nvSpPr>
+          <p:cNvPr id="2" name="Rectangle 1"/>
+          <p:cNvSpPr/>
+          <p:nvPr/>
+        </p:nvSpPr>
+        <p:spPr>
+          <a:xfrm>
+            <a:off x="0" y="0"/>
+            <a:ext cx="164592" cy="6858000"/>
+          </a:xfrm>
+          <a:prstGeom prst="rect">
+            <a:avLst/>
+          </a:prstGeom>
+          <a:solidFill>
             <a:srgbClr val="53D68E"/>
           </a:solidFill>
           <a:ln>
@@ -33083,7 +34036,7 @@
                 </a:solidFill>
                 <a:latin typeface="Aptos"/>
               </a:rPr>
-              <a:t>24</a:t>
+              <a:t>25</a:t>
             </a:r>
           </a:p>
         </p:txBody>
@@ -33374,7 +34327,7 @@
                 </a:solidFill>
                 <a:latin typeface="Aptos"/>
               </a:rPr>
-              <a:t>26</a:t>
+              <a:t>27</a:t>
             </a:r>
           </a:p>
         </p:txBody>
@@ -34060,7 +35013,7 @@
                 </a:solidFill>
                 <a:latin typeface="Aptos"/>
               </a:rPr>
-              <a:t>27</a:t>
+              <a:t>28</a:t>
             </a:r>
           </a:p>
         </p:txBody>
@@ -34867,7 +35820,7 @@
                 </a:solidFill>
                 <a:latin typeface="Aptos"/>
               </a:rPr>
-              <a:t>29</a:t>
+              <a:t>30</a:t>
             </a:r>
           </a:p>
         </p:txBody>
@@ -36108,7 +37061,7 @@
                 </a:solidFill>
                 <a:latin typeface="Aptos"/>
               </a:rPr>
-              <a:t>30</a:t>
+              <a:t>31</a:t>
             </a:r>
           </a:p>
         </p:txBody>
@@ -37154,7 +38107,7 @@
                 </a:solidFill>
                 <a:latin typeface="Aptos"/>
               </a:rPr>
-              <a:t>18</a:t>
+              <a:t>19</a:t>
             </a:r>
           </a:p>
         </p:txBody>
@@ -38045,7 +38998,7 @@
                 </a:solidFill>
                 <a:latin typeface="Aptos"/>
               </a:rPr>
-              <a:t>19</a:t>
+              <a:t>20</a:t>
             </a:r>
           </a:p>
         </p:txBody>

--- a/Guia_despliegue_Symfony_React_Hostinger.pptx
+++ b/Guia_despliegue_Symfony_React_Hostinger.pptx
@@ -9,7 +9,7 @@
     <p:sldId id="285" r:id="rId36"/>
     <p:sldId id="286" r:id="rId37"/>
     <p:sldId id="287" r:id="rId38"/>
-    <p:sldId id="289" r:id="rId40"/>
+    <p:sldId id="290" r:id="rId41"/>
     <p:sldId id="269" r:id="rId20"/>
     <p:sldId id="282" r:id="rId33"/>
     <p:sldId id="276" r:id="rId27"/>
@@ -19,9 +19,11 @@
     <p:sldId id="274" r:id="rId25"/>
     <p:sldId id="275" r:id="rId26"/>
     <p:sldId id="258" r:id="rId9"/>
+    <p:sldId id="289" r:id="rId40"/>
     <p:sldId id="288" r:id="rId39"/>
     <p:sldId id="279" r:id="rId30"/>
     <p:sldId id="280" r:id="rId31"/>
+    <p:sldId id="292" r:id="rId43"/>
     <p:sldId id="281" r:id="rId32"/>
     <p:sldId id="263" r:id="rId14"/>
     <p:sldId id="264" r:id="rId15"/>
@@ -29,7 +31,7 @@
     <p:sldId id="277" r:id="rId28"/>
     <p:sldId id="278" r:id="rId29"/>
     <p:sldId id="268" r:id="rId19"/>
-    <p:sldId id="290" r:id="rId41"/>
+    <p:sldId id="291" r:id="rId42"/>
     <p:sldId id="257" r:id="rId8"/>
     <p:sldId id="259" r:id="rId10"/>
     <p:sldId id="260" r:id="rId11"/>
@@ -3801,7 +3803,7 @@
                 </a:solidFill>
                 <a:latin typeface="Aptos"/>
               </a:rPr>
-              <a:t>32</a:t>
+              <a:t>34</a:t>
             </a:r>
           </a:p>
         </p:txBody>
@@ -5327,7 +5329,7 @@
                 </a:solidFill>
                 <a:latin typeface="Aptos"/>
               </a:rPr>
-              <a:t>33</a:t>
+              <a:t>35</a:t>
             </a:r>
           </a:p>
         </p:txBody>
@@ -6803,7 +6805,7 @@
                 </a:solidFill>
                 <a:latin typeface="Aptos"/>
               </a:rPr>
-              <a:t>34</a:t>
+              <a:t>36</a:t>
             </a:r>
           </a:p>
         </p:txBody>
@@ -7564,7 +7566,7 @@
                 </a:solidFill>
                 <a:latin typeface="Aptos"/>
               </a:rPr>
-              <a:t>24</a:t>
+              <a:t>26</a:t>
             </a:r>
           </a:p>
         </p:txBody>
@@ -10206,7 +10208,7 @@
                 </a:solidFill>
                 <a:latin typeface="Aptos"/>
               </a:rPr>
-              <a:t>21</a:t>
+              <a:t>23</a:t>
             </a:r>
           </a:p>
         </p:txBody>
@@ -16523,7 +16525,7 @@
                 </a:solidFill>
                 <a:latin typeface="Aptos"/>
               </a:rPr>
-              <a:t>26</a:t>
+              <a:t>28</a:t>
             </a:r>
           </a:p>
         </p:txBody>
@@ -19756,7 +19758,7 @@
                 </a:solidFill>
                 <a:latin typeface="Aptos"/>
               </a:rPr>
-              <a:t>22</a:t>
+              <a:t>24</a:t>
             </a:r>
           </a:p>
         </p:txBody>
@@ -20936,7 +20938,7 @@
                 </a:solidFill>
                 <a:latin typeface="Aptos"/>
               </a:rPr>
-              <a:t>23</a:t>
+              <a:t>25</a:t>
             </a:r>
           </a:p>
         </p:txBody>
@@ -22126,7 +22128,7 @@
                 </a:solidFill>
                 <a:latin typeface="Aptos"/>
               </a:rPr>
-              <a:t>16</a:t>
+              <a:t>17</a:t>
             </a:r>
           </a:p>
         </p:txBody>
@@ -23604,7 +23606,7 @@
                 </a:solidFill>
                 <a:latin typeface="Aptos"/>
               </a:rPr>
-              <a:t>17</a:t>
+              <a:t>18</a:t>
             </a:r>
           </a:p>
         </p:txBody>
@@ -24485,7 +24487,7 @@
                 </a:solidFill>
                 <a:latin typeface="Aptos"/>
               </a:rPr>
-              <a:t>18</a:t>
+              <a:t>20</a:t>
             </a:r>
           </a:p>
         </p:txBody>
@@ -27146,7 +27148,7 @@
                 </a:solidFill>
                 <a:latin typeface="Aptos"/>
               </a:rPr>
-              <a:t>29</a:t>
+              <a:t>31</a:t>
             </a:r>
           </a:p>
         </p:txBody>
@@ -28587,7 +28589,7 @@
                 </a:solidFill>
                 <a:latin typeface="Aptos"/>
               </a:rPr>
-              <a:t>35</a:t>
+              <a:t>37</a:t>
             </a:r>
           </a:p>
         </p:txBody>
@@ -33353,7 +33355,7 @@
         <p:spPr>
           <a:xfrm>
             <a:off x="0" y="0"/>
-            <a:ext cx="164592" cy="6858000"/>
+            <a:ext cx="118872" cy="6858000"/>
           </a:xfrm>
           <a:prstGeom prst="rect">
             <a:avLst/>
@@ -33397,8 +33399,8 @@
         </p:nvSpPr>
         <p:spPr>
           <a:xfrm>
-            <a:off x="685800" y="685800"/>
-            <a:ext cx="3657600" cy="274320"/>
+            <a:off x="502920" y="320040"/>
+            <a:ext cx="2743200" cy="228600"/>
           </a:xfrm>
           <a:prstGeom prst="rect">
             <a:avLst/>
@@ -33413,13 +33415,13 @@
           <a:p>
             <a:pPr algn="l"/>
             <a:r>
-              <a:rPr sz="1200" b="1">
+              <a:rPr sz="1000" b="1">
                 <a:solidFill>
                   <a:srgbClr val="FF9E58"/>
                 </a:solidFill>
                 <a:latin typeface="Aptos"/>
               </a:rPr>
-              <a:t>PARTE 2</a:t>
+              <a:t>FRONTEND</a:t>
             </a:r>
           </a:p>
         </p:txBody>
@@ -33432,8 +33434,8 @@
         </p:nvSpPr>
         <p:spPr>
           <a:xfrm>
-            <a:off x="11018520" y="658368"/>
-            <a:ext cx="594360" cy="274320"/>
+            <a:off x="11109960" y="320040"/>
+            <a:ext cx="502920" cy="228600"/>
           </a:xfrm>
           <a:prstGeom prst="rect">
             <a:avLst/>
@@ -33448,13 +33450,13 @@
           <a:p>
             <a:pPr algn="r"/>
             <a:r>
-              <a:rPr sz="1100" b="1">
-                <a:solidFill>
-                  <a:srgbClr val="B1BBCC"/>
-                </a:solidFill>
-                <a:latin typeface="Aptos"/>
-              </a:rPr>
-              <a:t>15</a:t>
+              <a:rPr sz="1000" b="1">
+                <a:solidFill>
+                  <a:srgbClr val="B1BBCC"/>
+                </a:solidFill>
+                <a:latin typeface="Aptos"/>
+              </a:rPr>
+              <a:t>16</a:t>
             </a:r>
           </a:p>
         </p:txBody>
@@ -33467,8 +33469,8 @@
         </p:nvSpPr>
         <p:spPr>
           <a:xfrm>
-            <a:off x="667512" y="1965960"/>
-            <a:ext cx="9966960" cy="1051560"/>
+            <a:off x="502920" y="758952"/>
+            <a:ext cx="10698480" cy="502920"/>
           </a:xfrm>
           <a:prstGeom prst="rect">
             <a:avLst/>
@@ -33483,13 +33485,13 @@
           <a:p>
             <a:pPr algn="l"/>
             <a:r>
-              <a:rPr sz="3800" b="1">
+              <a:rPr sz="2700" b="1">
                 <a:solidFill>
                   <a:srgbClr val="FFFFFF"/>
                 </a:solidFill>
                 <a:latin typeface="Aptos"/>
               </a:rPr>
-              <a:t>Frontend React</a:t>
+              <a:t>De /cartelera a la pantalla</a:t>
             </a:r>
           </a:p>
         </p:txBody>
@@ -33502,8 +33504,8 @@
         </p:nvSpPr>
         <p:spPr>
           <a:xfrm>
-            <a:off x="704088" y="3337560"/>
-            <a:ext cx="9784080" cy="1097280"/>
+            <a:off x="530352" y="1353312"/>
+            <a:ext cx="10607040" cy="365760"/>
           </a:xfrm>
           <a:prstGeom prst="rect">
             <a:avLst/>
@@ -33518,29 +33520,109 @@
           <a:p>
             <a:pPr algn="l"/>
             <a:r>
-              <a:rPr sz="1800" b="0">
-                <a:solidFill>
-                  <a:srgbClr val="B1BBCC"/>
-                </a:solidFill>
-                <a:latin typeface="Aptos"/>
-              </a:rPr>
-              <a:t>Cómo se organiza la interfaz, qué son los componentes y hooks, y cómo el navegador utiliza HTTP para pedir datos.</a:t>
-            </a:r>
-          </a:p>
-        </p:txBody>
-      </p:sp>
-      <p:sp>
-        <p:nvSpPr>
-          <p:cNvPr id="7" name="Rectangle 6"/>
+              <a:rPr sz="1300" b="0">
+                <a:solidFill>
+                  <a:srgbClr val="B1BBCC"/>
+                </a:solidFill>
+                <a:latin typeface="Aptos"/>
+              </a:rPr>
+              <a:t>React reparte responsabilidades: cada archivo hace una parte del recorrido y una actualización de estado vuelve a dibujar la interfaz.</a:t>
+            </a:r>
+          </a:p>
+        </p:txBody>
+      </p:sp>
+      <p:sp>
+        <p:nvSpPr>
+          <p:cNvPr id="7" name="TextBox 6"/>
+          <p:cNvSpPr txBox="1"/>
+          <p:nvPr/>
+        </p:nvSpPr>
+        <p:spPr>
+          <a:xfrm>
+            <a:off x="530352" y="6510528"/>
+            <a:ext cx="3657600" cy="164592"/>
+          </a:xfrm>
+          <a:prstGeom prst="rect">
+            <a:avLst/>
+          </a:prstGeom>
+          <a:noFill/>
+        </p:spPr>
+        <p:txBody>
+          <a:bodyPr wrap="none" lIns="36576" rIns="36576">
+            <a:spAutoFit/>
+          </a:bodyPr>
+          <a:lstStyle/>
+          <a:p>
+            <a:pPr algn="l"/>
+            <a:r>
+              <a:rPr sz="800" b="1">
+                <a:solidFill>
+                  <a:srgbClr val="B1BBCC"/>
+                </a:solidFill>
+                <a:latin typeface="Aptos"/>
+              </a:rPr>
+              <a:t>CINE APP · HOSTINGER COMPARTIDO</a:t>
+            </a:r>
+          </a:p>
+        </p:txBody>
+      </p:sp>
+      <p:sp>
+        <p:nvSpPr>
+          <p:cNvPr id="8" name="Rounded Rectangle 7"/>
           <p:cNvSpPr/>
           <p:nvPr/>
         </p:nvSpPr>
         <p:spPr>
           <a:xfrm>
-            <a:off x="704088" y="5029200"/>
-            <a:ext cx="2011680" cy="73152"/>
-          </a:xfrm>
-          <a:prstGeom prst="rect">
+            <a:off x="274320" y="1755648"/>
+            <a:ext cx="2743200" cy="3429000"/>
+          </a:xfrm>
+          <a:prstGeom prst="roundRect">
+            <a:avLst/>
+          </a:prstGeom>
+          <a:solidFill>
+            <a:srgbClr val="172238"/>
+          </a:solidFill>
+          <a:ln>
+            <a:solidFill>
+              <a:srgbClr val="2A3950"/>
+            </a:solidFill>
+          </a:ln>
+        </p:spPr>
+        <p:style>
+          <a:lnRef idx="1">
+            <a:schemeClr val="accent1"/>
+          </a:lnRef>
+          <a:fillRef idx="3">
+            <a:schemeClr val="accent1"/>
+          </a:fillRef>
+          <a:effectRef idx="2">
+            <a:schemeClr val="accent1"/>
+          </a:effectRef>
+          <a:fontRef idx="minor">
+            <a:schemeClr val="lt1"/>
+          </a:fontRef>
+        </p:style>
+        <p:txBody>
+          <a:bodyPr rtlCol="0" anchor="ctr"/>
+          <a:lstStyle/>
+          <a:p>
+            <a:pPr algn="ctr"/>
+          </a:p>
+        </p:txBody>
+      </p:sp>
+      <p:sp>
+        <p:nvSpPr>
+          <p:cNvPr id="9" name="Rounded Rectangle 8"/>
+          <p:cNvSpPr/>
+          <p:nvPr/>
+        </p:nvSpPr>
+        <p:spPr>
+          <a:xfrm>
+            <a:off x="274320" y="1755648"/>
+            <a:ext cx="64008" cy="3429000"/>
+          </a:xfrm>
+          <a:prstGeom prst="roundRect">
             <a:avLst/>
           </a:prstGeom>
           <a:solidFill>
@@ -33576,14 +33658,14 @@
       </p:sp>
       <p:sp>
         <p:nvSpPr>
-          <p:cNvPr id="8" name="TextBox 7"/>
-          <p:cNvSpPr txBox="1"/>
-          <p:nvPr/>
-        </p:nvSpPr>
-        <p:spPr>
-          <a:xfrm>
-            <a:off x="704088" y="6080760"/>
-            <a:ext cx="3657600" cy="182880"/>
+          <p:cNvPr id="10" name="TextBox 9"/>
+          <p:cNvSpPr txBox="1"/>
+          <p:nvPr/>
+        </p:nvSpPr>
+        <p:spPr>
+          <a:xfrm>
+            <a:off x="502920" y="1938528"/>
+            <a:ext cx="2331720" cy="292608"/>
           </a:xfrm>
           <a:prstGeom prst="rect">
             <a:avLst/>
@@ -33598,13 +33680,1007 @@
           <a:p>
             <a:pPr algn="l"/>
             <a:r>
-              <a:rPr sz="900" b="1">
-                <a:solidFill>
-                  <a:srgbClr val="B1BBCC"/>
-                </a:solidFill>
-                <a:latin typeface="Aptos"/>
-              </a:rPr>
-              <a:t>CINE APP · RECORRIDO DIDÁCTICO</a:t>
+              <a:rPr sz="1500" b="1">
+                <a:solidFill>
+                  <a:srgbClr val="FFFFFF"/>
+                </a:solidFill>
+                <a:latin typeface="Aptos"/>
+              </a:rPr>
+              <a:t>1 · APP.JSX</a:t>
+            </a:r>
+          </a:p>
+        </p:txBody>
+      </p:sp>
+      <p:sp>
+        <p:nvSpPr>
+          <p:cNvPr id="11" name="TextBox 10"/>
+          <p:cNvSpPr txBox="1"/>
+          <p:nvPr/>
+        </p:nvSpPr>
+        <p:spPr>
+          <a:xfrm>
+            <a:off x="502920" y="2395728"/>
+            <a:ext cx="2331720" cy="2651760"/>
+          </a:xfrm>
+          <a:prstGeom prst="rect">
+            <a:avLst/>
+          </a:prstGeom>
+          <a:noFill/>
+        </p:spPr>
+        <p:txBody>
+          <a:bodyPr wrap="none" lIns="36576" rIns="36576">
+            <a:spAutoFit/>
+          </a:bodyPr>
+          <a:lstStyle/>
+          <a:p>
+            <a:pPr algn="l"/>
+            <a:r>
+              <a:rPr sz="1250" b="0">
+                <a:solidFill>
+                  <a:srgbClr val="B1BBCC"/>
+                </a:solidFill>
+                <a:latin typeface="Aptos"/>
+              </a:rPr>
+              <a:t>La URL /cartelera coincide con una Route y React monta &lt;BillboardPage /&gt;.</a:t>
+            </a:r>
+            <a:br/>
+            <a:br/>
+            <a:r>
+              <a:rPr sz="1250" b="0">
+                <a:solidFill>
+                  <a:srgbClr val="B1BBCC"/>
+                </a:solidFill>
+                <a:latin typeface="Aptos"/>
+              </a:rPr>
+              <a:t>VIDA REAL: la cartelera de la entrada indica a qué sala debe ir el visitante.</a:t>
+            </a:r>
+          </a:p>
+        </p:txBody>
+      </p:sp>
+      <p:sp>
+        <p:nvSpPr>
+          <p:cNvPr id="12" name="Rounded Rectangle 11"/>
+          <p:cNvSpPr/>
+          <p:nvPr/>
+        </p:nvSpPr>
+        <p:spPr>
+          <a:xfrm>
+            <a:off x="1965960" y="1920240"/>
+            <a:ext cx="777240" cy="274320"/>
+          </a:xfrm>
+          <a:prstGeom prst="roundRect">
+            <a:avLst/>
+          </a:prstGeom>
+          <a:solidFill>
+            <a:srgbClr val="FF9E58"/>
+          </a:solidFill>
+          <a:ln>
+            <a:solidFill>
+              <a:srgbClr val="FF9E58"/>
+            </a:solidFill>
+          </a:ln>
+        </p:spPr>
+        <p:style>
+          <a:lnRef idx="1">
+            <a:schemeClr val="accent1"/>
+          </a:lnRef>
+          <a:fillRef idx="3">
+            <a:schemeClr val="accent1"/>
+          </a:fillRef>
+          <a:effectRef idx="2">
+            <a:schemeClr val="accent1"/>
+          </a:effectRef>
+          <a:fontRef idx="minor">
+            <a:schemeClr val="lt1"/>
+          </a:fontRef>
+        </p:style>
+        <p:txBody>
+          <a:bodyPr rtlCol="0" anchor="ctr"/>
+          <a:lstStyle/>
+          <a:p>
+            <a:pPr algn="ctr"/>
+          </a:p>
+        </p:txBody>
+      </p:sp>
+      <p:sp>
+        <p:nvSpPr>
+          <p:cNvPr id="13" name="TextBox 12"/>
+          <p:cNvSpPr txBox="1"/>
+          <p:nvPr/>
+        </p:nvSpPr>
+        <p:spPr>
+          <a:xfrm>
+            <a:off x="2011679" y="1965960"/>
+            <a:ext cx="685800" cy="128016"/>
+          </a:xfrm>
+          <a:prstGeom prst="rect">
+            <a:avLst/>
+          </a:prstGeom>
+          <a:noFill/>
+        </p:spPr>
+        <p:txBody>
+          <a:bodyPr wrap="none" lIns="36576" rIns="36576">
+            <a:spAutoFit/>
+          </a:bodyPr>
+          <a:lstStyle/>
+          <a:p>
+            <a:pPr algn="ctr"/>
+            <a:r>
+              <a:rPr sz="800" b="1">
+                <a:solidFill>
+                  <a:srgbClr val="0C1323"/>
+                </a:solidFill>
+                <a:latin typeface="Aptos"/>
+              </a:rPr>
+              <a:t>MAPA</a:t>
+            </a:r>
+          </a:p>
+        </p:txBody>
+      </p:sp>
+      <p:sp>
+        <p:nvSpPr>
+          <p:cNvPr id="14" name="Rounded Rectangle 13"/>
+          <p:cNvSpPr/>
+          <p:nvPr/>
+        </p:nvSpPr>
+        <p:spPr>
+          <a:xfrm>
+            <a:off x="3246120" y="1755648"/>
+            <a:ext cx="2743200" cy="3429000"/>
+          </a:xfrm>
+          <a:prstGeom prst="roundRect">
+            <a:avLst/>
+          </a:prstGeom>
+          <a:solidFill>
+            <a:srgbClr val="172238"/>
+          </a:solidFill>
+          <a:ln>
+            <a:solidFill>
+              <a:srgbClr val="2A3950"/>
+            </a:solidFill>
+          </a:ln>
+        </p:spPr>
+        <p:style>
+          <a:lnRef idx="1">
+            <a:schemeClr val="accent1"/>
+          </a:lnRef>
+          <a:fillRef idx="3">
+            <a:schemeClr val="accent1"/>
+          </a:fillRef>
+          <a:effectRef idx="2">
+            <a:schemeClr val="accent1"/>
+          </a:effectRef>
+          <a:fontRef idx="minor">
+            <a:schemeClr val="lt1"/>
+          </a:fontRef>
+        </p:style>
+        <p:txBody>
+          <a:bodyPr rtlCol="0" anchor="ctr"/>
+          <a:lstStyle/>
+          <a:p>
+            <a:pPr algn="ctr"/>
+          </a:p>
+        </p:txBody>
+      </p:sp>
+      <p:sp>
+        <p:nvSpPr>
+          <p:cNvPr id="15" name="Rounded Rectangle 14"/>
+          <p:cNvSpPr/>
+          <p:nvPr/>
+        </p:nvSpPr>
+        <p:spPr>
+          <a:xfrm>
+            <a:off x="3246120" y="1755648"/>
+            <a:ext cx="64008" cy="3429000"/>
+          </a:xfrm>
+          <a:prstGeom prst="roundRect">
+            <a:avLst/>
+          </a:prstGeom>
+          <a:solidFill>
+            <a:srgbClr val="53D68E"/>
+          </a:solidFill>
+          <a:ln>
+            <a:solidFill>
+              <a:srgbClr val="53D68E"/>
+            </a:solidFill>
+          </a:ln>
+        </p:spPr>
+        <p:style>
+          <a:lnRef idx="1">
+            <a:schemeClr val="accent1"/>
+          </a:lnRef>
+          <a:fillRef idx="3">
+            <a:schemeClr val="accent1"/>
+          </a:fillRef>
+          <a:effectRef idx="2">
+            <a:schemeClr val="accent1"/>
+          </a:effectRef>
+          <a:fontRef idx="minor">
+            <a:schemeClr val="lt1"/>
+          </a:fontRef>
+        </p:style>
+        <p:txBody>
+          <a:bodyPr rtlCol="0" anchor="ctr"/>
+          <a:lstStyle/>
+          <a:p>
+            <a:pPr algn="ctr"/>
+          </a:p>
+        </p:txBody>
+      </p:sp>
+      <p:sp>
+        <p:nvSpPr>
+          <p:cNvPr id="16" name="TextBox 15"/>
+          <p:cNvSpPr txBox="1"/>
+          <p:nvPr/>
+        </p:nvSpPr>
+        <p:spPr>
+          <a:xfrm>
+            <a:off x="3474720" y="1938528"/>
+            <a:ext cx="2331720" cy="292608"/>
+          </a:xfrm>
+          <a:prstGeom prst="rect">
+            <a:avLst/>
+          </a:prstGeom>
+          <a:noFill/>
+        </p:spPr>
+        <p:txBody>
+          <a:bodyPr wrap="none" lIns="36576" rIns="36576">
+            <a:spAutoFit/>
+          </a:bodyPr>
+          <a:lstStyle/>
+          <a:p>
+            <a:pPr algn="l"/>
+            <a:r>
+              <a:rPr sz="1500" b="1">
+                <a:solidFill>
+                  <a:srgbClr val="FFFFFF"/>
+                </a:solidFill>
+                <a:latin typeface="Aptos"/>
+              </a:rPr>
+              <a:t>2 · BILLBOARD + HOOK</a:t>
+            </a:r>
+          </a:p>
+        </p:txBody>
+      </p:sp>
+      <p:sp>
+        <p:nvSpPr>
+          <p:cNvPr id="17" name="TextBox 16"/>
+          <p:cNvSpPr txBox="1"/>
+          <p:nvPr/>
+        </p:nvSpPr>
+        <p:spPr>
+          <a:xfrm>
+            <a:off x="3474720" y="2395728"/>
+            <a:ext cx="2331720" cy="2651760"/>
+          </a:xfrm>
+          <a:prstGeom prst="rect">
+            <a:avLst/>
+          </a:prstGeom>
+          <a:noFill/>
+        </p:spPr>
+        <p:txBody>
+          <a:bodyPr wrap="none" lIns="36576" rIns="36576">
+            <a:spAutoFit/>
+          </a:bodyPr>
+          <a:lstStyle/>
+          <a:p>
+            <a:pPr algn="l"/>
+            <a:r>
+              <a:rPr sz="1250" b="0">
+                <a:solidFill>
+                  <a:srgbClr val="B1BBCC"/>
+                </a:solidFill>
+                <a:latin typeface="Aptos"/>
+              </a:rPr>
+              <a:t>BillboardPage llama useMovies(fecha). El hook administra loading, movies y error.</a:t>
+            </a:r>
+            <a:br/>
+            <a:br/>
+            <a:r>
+              <a:rPr sz="1250" b="0">
+                <a:solidFill>
+                  <a:srgbClr val="B1BBCC"/>
+                </a:solidFill>
+                <a:latin typeface="Aptos"/>
+              </a:rPr>
+              <a:t>VIDA REAL: el cliente hace un pedido al empleado y espera la respuesta.</a:t>
+            </a:r>
+          </a:p>
+        </p:txBody>
+      </p:sp>
+      <p:sp>
+        <p:nvSpPr>
+          <p:cNvPr id="18" name="Rounded Rectangle 17"/>
+          <p:cNvSpPr/>
+          <p:nvPr/>
+        </p:nvSpPr>
+        <p:spPr>
+          <a:xfrm>
+            <a:off x="4937760" y="1920240"/>
+            <a:ext cx="777240" cy="274320"/>
+          </a:xfrm>
+          <a:prstGeom prst="roundRect">
+            <a:avLst/>
+          </a:prstGeom>
+          <a:solidFill>
+            <a:srgbClr val="53D68E"/>
+          </a:solidFill>
+          <a:ln>
+            <a:solidFill>
+              <a:srgbClr val="53D68E"/>
+            </a:solidFill>
+          </a:ln>
+        </p:spPr>
+        <p:style>
+          <a:lnRef idx="1">
+            <a:schemeClr val="accent1"/>
+          </a:lnRef>
+          <a:fillRef idx="3">
+            <a:schemeClr val="accent1"/>
+          </a:fillRef>
+          <a:effectRef idx="2">
+            <a:schemeClr val="accent1"/>
+          </a:effectRef>
+          <a:fontRef idx="minor">
+            <a:schemeClr val="lt1"/>
+          </a:fontRef>
+        </p:style>
+        <p:txBody>
+          <a:bodyPr rtlCol="0" anchor="ctr"/>
+          <a:lstStyle/>
+          <a:p>
+            <a:pPr algn="ctr"/>
+          </a:p>
+        </p:txBody>
+      </p:sp>
+      <p:sp>
+        <p:nvSpPr>
+          <p:cNvPr id="19" name="TextBox 18"/>
+          <p:cNvSpPr txBox="1"/>
+          <p:nvPr/>
+        </p:nvSpPr>
+        <p:spPr>
+          <a:xfrm>
+            <a:off x="4983479" y="1965960"/>
+            <a:ext cx="685800" cy="128016"/>
+          </a:xfrm>
+          <a:prstGeom prst="rect">
+            <a:avLst/>
+          </a:prstGeom>
+          <a:noFill/>
+        </p:spPr>
+        <p:txBody>
+          <a:bodyPr wrap="none" lIns="36576" rIns="36576">
+            <a:spAutoFit/>
+          </a:bodyPr>
+          <a:lstStyle/>
+          <a:p>
+            <a:pPr algn="ctr"/>
+            <a:r>
+              <a:rPr sz="800" b="1">
+                <a:solidFill>
+                  <a:srgbClr val="0C1323"/>
+                </a:solidFill>
+                <a:latin typeface="Aptos"/>
+              </a:rPr>
+              <a:t>PEDIDO</a:t>
+            </a:r>
+          </a:p>
+        </p:txBody>
+      </p:sp>
+      <p:sp>
+        <p:nvSpPr>
+          <p:cNvPr id="20" name="Rounded Rectangle 19"/>
+          <p:cNvSpPr/>
+          <p:nvPr/>
+        </p:nvSpPr>
+        <p:spPr>
+          <a:xfrm>
+            <a:off x="6217920" y="1755648"/>
+            <a:ext cx="2743200" cy="3429000"/>
+          </a:xfrm>
+          <a:prstGeom prst="roundRect">
+            <a:avLst/>
+          </a:prstGeom>
+          <a:solidFill>
+            <a:srgbClr val="172238"/>
+          </a:solidFill>
+          <a:ln>
+            <a:solidFill>
+              <a:srgbClr val="2A3950"/>
+            </a:solidFill>
+          </a:ln>
+        </p:spPr>
+        <p:style>
+          <a:lnRef idx="1">
+            <a:schemeClr val="accent1"/>
+          </a:lnRef>
+          <a:fillRef idx="3">
+            <a:schemeClr val="accent1"/>
+          </a:fillRef>
+          <a:effectRef idx="2">
+            <a:schemeClr val="accent1"/>
+          </a:effectRef>
+          <a:fontRef idx="minor">
+            <a:schemeClr val="lt1"/>
+          </a:fontRef>
+        </p:style>
+        <p:txBody>
+          <a:bodyPr rtlCol="0" anchor="ctr"/>
+          <a:lstStyle/>
+          <a:p>
+            <a:pPr algn="ctr"/>
+          </a:p>
+        </p:txBody>
+      </p:sp>
+      <p:sp>
+        <p:nvSpPr>
+          <p:cNvPr id="21" name="Rounded Rectangle 20"/>
+          <p:cNvSpPr/>
+          <p:nvPr/>
+        </p:nvSpPr>
+        <p:spPr>
+          <a:xfrm>
+            <a:off x="6217920" y="1755648"/>
+            <a:ext cx="64008" cy="3429000"/>
+          </a:xfrm>
+          <a:prstGeom prst="roundRect">
+            <a:avLst/>
+          </a:prstGeom>
+          <a:solidFill>
+            <a:srgbClr val="36D3DD"/>
+          </a:solidFill>
+          <a:ln>
+            <a:solidFill>
+              <a:srgbClr val="36D3DD"/>
+            </a:solidFill>
+          </a:ln>
+        </p:spPr>
+        <p:style>
+          <a:lnRef idx="1">
+            <a:schemeClr val="accent1"/>
+          </a:lnRef>
+          <a:fillRef idx="3">
+            <a:schemeClr val="accent1"/>
+          </a:fillRef>
+          <a:effectRef idx="2">
+            <a:schemeClr val="accent1"/>
+          </a:effectRef>
+          <a:fontRef idx="minor">
+            <a:schemeClr val="lt1"/>
+          </a:fontRef>
+        </p:style>
+        <p:txBody>
+          <a:bodyPr rtlCol="0" anchor="ctr"/>
+          <a:lstStyle/>
+          <a:p>
+            <a:pPr algn="ctr"/>
+          </a:p>
+        </p:txBody>
+      </p:sp>
+      <p:sp>
+        <p:nvSpPr>
+          <p:cNvPr id="22" name="TextBox 21"/>
+          <p:cNvSpPr txBox="1"/>
+          <p:nvPr/>
+        </p:nvSpPr>
+        <p:spPr>
+          <a:xfrm>
+            <a:off x="6446520" y="1938528"/>
+            <a:ext cx="2331720" cy="292608"/>
+          </a:xfrm>
+          <a:prstGeom prst="rect">
+            <a:avLst/>
+          </a:prstGeom>
+          <a:noFill/>
+        </p:spPr>
+        <p:txBody>
+          <a:bodyPr wrap="none" lIns="36576" rIns="36576">
+            <a:spAutoFit/>
+          </a:bodyPr>
+          <a:lstStyle/>
+          <a:p>
+            <a:pPr algn="l"/>
+            <a:r>
+              <a:rPr sz="1500" b="1">
+                <a:solidFill>
+                  <a:srgbClr val="FFFFFF"/>
+                </a:solidFill>
+                <a:latin typeface="Aptos"/>
+              </a:rPr>
+              <a:t>3 · API + BACKEND</a:t>
+            </a:r>
+          </a:p>
+        </p:txBody>
+      </p:sp>
+      <p:sp>
+        <p:nvSpPr>
+          <p:cNvPr id="23" name="TextBox 22"/>
+          <p:cNvSpPr txBox="1"/>
+          <p:nvPr/>
+        </p:nvSpPr>
+        <p:spPr>
+          <a:xfrm>
+            <a:off x="6446520" y="2395728"/>
+            <a:ext cx="2331720" cy="2651760"/>
+          </a:xfrm>
+          <a:prstGeom prst="rect">
+            <a:avLst/>
+          </a:prstGeom>
+          <a:noFill/>
+        </p:spPr>
+        <p:txBody>
+          <a:bodyPr wrap="none" lIns="36576" rIns="36576">
+            <a:spAutoFit/>
+          </a:bodyPr>
+          <a:lstStyle/>
+          <a:p>
+            <a:pPr algn="l"/>
+            <a:r>
+              <a:rPr sz="1250" b="0">
+                <a:solidFill>
+                  <a:srgbClr val="B1BBCC"/>
+                </a:solidFill>
+                <a:latin typeface="Aptos"/>
+              </a:rPr>
+              <a:t>api.js hace GET /api/funciones?fecha=... Symfony consulta Doctrine y MariaDB y devuelve JSON.</a:t>
+            </a:r>
+            <a:br/>
+            <a:br/>
+            <a:r>
+              <a:rPr sz="1250" b="0">
+                <a:solidFill>
+                  <a:srgbClr val="B1BBCC"/>
+                </a:solidFill>
+                <a:latin typeface="Aptos"/>
+              </a:rPr>
+              <a:t>VIDA REAL: el empleado lleva el pedido a depósito y trae la información.</a:t>
+            </a:r>
+          </a:p>
+        </p:txBody>
+      </p:sp>
+      <p:sp>
+        <p:nvSpPr>
+          <p:cNvPr id="24" name="Rounded Rectangle 23"/>
+          <p:cNvSpPr/>
+          <p:nvPr/>
+        </p:nvSpPr>
+        <p:spPr>
+          <a:xfrm>
+            <a:off x="7909560" y="1920240"/>
+            <a:ext cx="777240" cy="274320"/>
+          </a:xfrm>
+          <a:prstGeom prst="roundRect">
+            <a:avLst/>
+          </a:prstGeom>
+          <a:solidFill>
+            <a:srgbClr val="36D3DD"/>
+          </a:solidFill>
+          <a:ln>
+            <a:solidFill>
+              <a:srgbClr val="36D3DD"/>
+            </a:solidFill>
+          </a:ln>
+        </p:spPr>
+        <p:style>
+          <a:lnRef idx="1">
+            <a:schemeClr val="accent1"/>
+          </a:lnRef>
+          <a:fillRef idx="3">
+            <a:schemeClr val="accent1"/>
+          </a:fillRef>
+          <a:effectRef idx="2">
+            <a:schemeClr val="accent1"/>
+          </a:effectRef>
+          <a:fontRef idx="minor">
+            <a:schemeClr val="lt1"/>
+          </a:fontRef>
+        </p:style>
+        <p:txBody>
+          <a:bodyPr rtlCol="0" anchor="ctr"/>
+          <a:lstStyle/>
+          <a:p>
+            <a:pPr algn="ctr"/>
+          </a:p>
+        </p:txBody>
+      </p:sp>
+      <p:sp>
+        <p:nvSpPr>
+          <p:cNvPr id="25" name="TextBox 24"/>
+          <p:cNvSpPr txBox="1"/>
+          <p:nvPr/>
+        </p:nvSpPr>
+        <p:spPr>
+          <a:xfrm>
+            <a:off x="7955280" y="1965960"/>
+            <a:ext cx="685800" cy="128016"/>
+          </a:xfrm>
+          <a:prstGeom prst="rect">
+            <a:avLst/>
+          </a:prstGeom>
+          <a:noFill/>
+        </p:spPr>
+        <p:txBody>
+          <a:bodyPr wrap="none" lIns="36576" rIns="36576">
+            <a:spAutoFit/>
+          </a:bodyPr>
+          <a:lstStyle/>
+          <a:p>
+            <a:pPr algn="ctr"/>
+            <a:r>
+              <a:rPr sz="800" b="1">
+                <a:solidFill>
+                  <a:srgbClr val="0C1323"/>
+                </a:solidFill>
+                <a:latin typeface="Aptos"/>
+              </a:rPr>
+              <a:t>BÚSQUEDA</a:t>
+            </a:r>
+          </a:p>
+        </p:txBody>
+      </p:sp>
+      <p:sp>
+        <p:nvSpPr>
+          <p:cNvPr id="26" name="Rounded Rectangle 25"/>
+          <p:cNvSpPr/>
+          <p:nvPr/>
+        </p:nvSpPr>
+        <p:spPr>
+          <a:xfrm>
+            <a:off x="9189720" y="1755648"/>
+            <a:ext cx="2743200" cy="3429000"/>
+          </a:xfrm>
+          <a:prstGeom prst="roundRect">
+            <a:avLst/>
+          </a:prstGeom>
+          <a:solidFill>
+            <a:srgbClr val="172238"/>
+          </a:solidFill>
+          <a:ln>
+            <a:solidFill>
+              <a:srgbClr val="2A3950"/>
+            </a:solidFill>
+          </a:ln>
+        </p:spPr>
+        <p:style>
+          <a:lnRef idx="1">
+            <a:schemeClr val="accent1"/>
+          </a:lnRef>
+          <a:fillRef idx="3">
+            <a:schemeClr val="accent1"/>
+          </a:fillRef>
+          <a:effectRef idx="2">
+            <a:schemeClr val="accent1"/>
+          </a:effectRef>
+          <a:fontRef idx="minor">
+            <a:schemeClr val="lt1"/>
+          </a:fontRef>
+        </p:style>
+        <p:txBody>
+          <a:bodyPr rtlCol="0" anchor="ctr"/>
+          <a:lstStyle/>
+          <a:p>
+            <a:pPr algn="ctr"/>
+          </a:p>
+        </p:txBody>
+      </p:sp>
+      <p:sp>
+        <p:nvSpPr>
+          <p:cNvPr id="27" name="Rounded Rectangle 26"/>
+          <p:cNvSpPr/>
+          <p:nvPr/>
+        </p:nvSpPr>
+        <p:spPr>
+          <a:xfrm>
+            <a:off x="9189720" y="1755648"/>
+            <a:ext cx="64008" cy="3429000"/>
+          </a:xfrm>
+          <a:prstGeom prst="roundRect">
+            <a:avLst/>
+          </a:prstGeom>
+          <a:solidFill>
+            <a:srgbClr val="FF6978"/>
+          </a:solidFill>
+          <a:ln>
+            <a:solidFill>
+              <a:srgbClr val="FF6978"/>
+            </a:solidFill>
+          </a:ln>
+        </p:spPr>
+        <p:style>
+          <a:lnRef idx="1">
+            <a:schemeClr val="accent1"/>
+          </a:lnRef>
+          <a:fillRef idx="3">
+            <a:schemeClr val="accent1"/>
+          </a:fillRef>
+          <a:effectRef idx="2">
+            <a:schemeClr val="accent1"/>
+          </a:effectRef>
+          <a:fontRef idx="minor">
+            <a:schemeClr val="lt1"/>
+          </a:fontRef>
+        </p:style>
+        <p:txBody>
+          <a:bodyPr rtlCol="0" anchor="ctr"/>
+          <a:lstStyle/>
+          <a:p>
+            <a:pPr algn="ctr"/>
+          </a:p>
+        </p:txBody>
+      </p:sp>
+      <p:sp>
+        <p:nvSpPr>
+          <p:cNvPr id="28" name="TextBox 27"/>
+          <p:cNvSpPr txBox="1"/>
+          <p:nvPr/>
+        </p:nvSpPr>
+        <p:spPr>
+          <a:xfrm>
+            <a:off x="9418320" y="1938528"/>
+            <a:ext cx="2331720" cy="292608"/>
+          </a:xfrm>
+          <a:prstGeom prst="rect">
+            <a:avLst/>
+          </a:prstGeom>
+          <a:noFill/>
+        </p:spPr>
+        <p:txBody>
+          <a:bodyPr wrap="none" lIns="36576" rIns="36576">
+            <a:spAutoFit/>
+          </a:bodyPr>
+          <a:lstStyle/>
+          <a:p>
+            <a:pPr algn="l"/>
+            <a:r>
+              <a:rPr sz="1500" b="1">
+                <a:solidFill>
+                  <a:srgbClr val="FFFFFF"/>
+                </a:solidFill>
+                <a:latin typeface="Aptos"/>
+              </a:rPr>
+              <a:t>4 · ESTADO + COMPONENTES</a:t>
+            </a:r>
+          </a:p>
+        </p:txBody>
+      </p:sp>
+      <p:sp>
+        <p:nvSpPr>
+          <p:cNvPr id="29" name="TextBox 28"/>
+          <p:cNvSpPr txBox="1"/>
+          <p:nvPr/>
+        </p:nvSpPr>
+        <p:spPr>
+          <a:xfrm>
+            <a:off x="9418320" y="2395728"/>
+            <a:ext cx="2331720" cy="2651760"/>
+          </a:xfrm>
+          <a:prstGeom prst="rect">
+            <a:avLst/>
+          </a:prstGeom>
+          <a:noFill/>
+        </p:spPr>
+        <p:txBody>
+          <a:bodyPr wrap="none" lIns="36576" rIns="36576">
+            <a:spAutoFit/>
+          </a:bodyPr>
+          <a:lstStyle/>
+          <a:p>
+            <a:pPr algn="l"/>
+            <a:r>
+              <a:rPr sz="1250" b="0">
+                <a:solidFill>
+                  <a:srgbClr val="B1BBCC"/>
+                </a:solidFill>
+                <a:latin typeface="Aptos"/>
+              </a:rPr>
+              <a:t>setMovies guarda el resultado. React renderiza FunctionCard; elegir un horario navega a SeatsPage.</a:t>
+            </a:r>
+            <a:br/>
+            <a:br/>
+            <a:r>
+              <a:rPr sz="1250" b="0">
+                <a:solidFill>
+                  <a:srgbClr val="B1BBCC"/>
+                </a:solidFill>
+                <a:latin typeface="Aptos"/>
+              </a:rPr>
+              <a:t>VIDA REAL: se arma la cartelera y el cliente elige función y asiento.</a:t>
+            </a:r>
+          </a:p>
+        </p:txBody>
+      </p:sp>
+      <p:sp>
+        <p:nvSpPr>
+          <p:cNvPr id="30" name="Rounded Rectangle 29"/>
+          <p:cNvSpPr/>
+          <p:nvPr/>
+        </p:nvSpPr>
+        <p:spPr>
+          <a:xfrm>
+            <a:off x="10881360" y="1920240"/>
+            <a:ext cx="777240" cy="274320"/>
+          </a:xfrm>
+          <a:prstGeom prst="roundRect">
+            <a:avLst/>
+          </a:prstGeom>
+          <a:solidFill>
+            <a:srgbClr val="FF6978"/>
+          </a:solidFill>
+          <a:ln>
+            <a:solidFill>
+              <a:srgbClr val="FF6978"/>
+            </a:solidFill>
+          </a:ln>
+        </p:spPr>
+        <p:style>
+          <a:lnRef idx="1">
+            <a:schemeClr val="accent1"/>
+          </a:lnRef>
+          <a:fillRef idx="3">
+            <a:schemeClr val="accent1"/>
+          </a:fillRef>
+          <a:effectRef idx="2">
+            <a:schemeClr val="accent1"/>
+          </a:effectRef>
+          <a:fontRef idx="minor">
+            <a:schemeClr val="lt1"/>
+          </a:fontRef>
+        </p:style>
+        <p:txBody>
+          <a:bodyPr rtlCol="0" anchor="ctr"/>
+          <a:lstStyle/>
+          <a:p>
+            <a:pPr algn="ctr"/>
+          </a:p>
+        </p:txBody>
+      </p:sp>
+      <p:sp>
+        <p:nvSpPr>
+          <p:cNvPr id="31" name="TextBox 30"/>
+          <p:cNvSpPr txBox="1"/>
+          <p:nvPr/>
+        </p:nvSpPr>
+        <p:spPr>
+          <a:xfrm>
+            <a:off x="10927080" y="1965960"/>
+            <a:ext cx="685800" cy="128016"/>
+          </a:xfrm>
+          <a:prstGeom prst="rect">
+            <a:avLst/>
+          </a:prstGeom>
+          <a:noFill/>
+        </p:spPr>
+        <p:txBody>
+          <a:bodyPr wrap="none" lIns="36576" rIns="36576">
+            <a:spAutoFit/>
+          </a:bodyPr>
+          <a:lstStyle/>
+          <a:p>
+            <a:pPr algn="ctr"/>
+            <a:r>
+              <a:rPr sz="800" b="1">
+                <a:solidFill>
+                  <a:srgbClr val="0C1323"/>
+                </a:solidFill>
+                <a:latin typeface="Aptos"/>
+              </a:rPr>
+              <a:t>PANTALLA</a:t>
+            </a:r>
+          </a:p>
+        </p:txBody>
+      </p:sp>
+      <p:sp>
+        <p:nvSpPr>
+          <p:cNvPr id="32" name="Rounded Rectangle 31"/>
+          <p:cNvSpPr/>
+          <p:nvPr/>
+        </p:nvSpPr>
+        <p:spPr>
+          <a:xfrm>
+            <a:off x="502920" y="5532120"/>
+            <a:ext cx="11201400" cy="658368"/>
+          </a:xfrm>
+          <a:prstGeom prst="roundRect">
+            <a:avLst/>
+          </a:prstGeom>
+          <a:solidFill>
+            <a:srgbClr val="172238"/>
+          </a:solidFill>
+          <a:ln>
+            <a:solidFill>
+              <a:srgbClr val="172238"/>
+            </a:solidFill>
+          </a:ln>
+        </p:spPr>
+        <p:style>
+          <a:lnRef idx="1">
+            <a:schemeClr val="accent1"/>
+          </a:lnRef>
+          <a:fillRef idx="3">
+            <a:schemeClr val="accent1"/>
+          </a:fillRef>
+          <a:effectRef idx="2">
+            <a:schemeClr val="accent1"/>
+          </a:effectRef>
+          <a:fontRef idx="minor">
+            <a:schemeClr val="lt1"/>
+          </a:fontRef>
+        </p:style>
+        <p:txBody>
+          <a:bodyPr rtlCol="0" anchor="ctr"/>
+          <a:lstStyle/>
+          <a:p>
+            <a:pPr algn="ctr"/>
+          </a:p>
+        </p:txBody>
+      </p:sp>
+      <p:sp>
+        <p:nvSpPr>
+          <p:cNvPr id="33" name="TextBox 32"/>
+          <p:cNvSpPr txBox="1"/>
+          <p:nvPr/>
+        </p:nvSpPr>
+        <p:spPr>
+          <a:xfrm>
+            <a:off x="685800" y="5742432"/>
+            <a:ext cx="10835640" cy="256032"/>
+          </a:xfrm>
+          <a:prstGeom prst="rect">
+            <a:avLst/>
+          </a:prstGeom>
+          <a:noFill/>
+        </p:spPr>
+        <p:txBody>
+          <a:bodyPr wrap="none" lIns="36576" rIns="36576">
+            <a:spAutoFit/>
+          </a:bodyPr>
+          <a:lstStyle/>
+          <a:p>
+            <a:pPr algn="ctr"/>
+            <a:r>
+              <a:rPr sz="1200" b="1">
+                <a:solidFill>
+                  <a:srgbClr val="FFFFFF"/>
+                </a:solidFill>
+                <a:latin typeface="Consolas"/>
+              </a:rPr>
+              <a:t>/cartelera → App.jsx → BillboardPage → useMovies → api.js → Symfony/MariaDB → setMovies → FunctionCard → SeatsPage</a:t>
+            </a:r>
+          </a:p>
+        </p:txBody>
+      </p:sp>
+      <p:sp>
+        <p:nvSpPr>
+          <p:cNvPr id="34" name="TextBox 33"/>
+          <p:cNvSpPr txBox="1"/>
+          <p:nvPr/>
+        </p:nvSpPr>
+        <p:spPr>
+          <a:xfrm>
+            <a:off x="640080" y="6281928"/>
+            <a:ext cx="10881360" cy="228600"/>
+          </a:xfrm>
+          <a:prstGeom prst="rect">
+            <a:avLst/>
+          </a:prstGeom>
+          <a:noFill/>
+        </p:spPr>
+        <p:txBody>
+          <a:bodyPr wrap="none" lIns="36576" rIns="36576">
+            <a:spAutoFit/>
+          </a:bodyPr>
+          <a:lstStyle/>
+          <a:p>
+            <a:pPr algn="ctr"/>
+            <a:r>
+              <a:rPr sz="1000" b="1">
+                <a:solidFill>
+                  <a:srgbClr val="FF9E58"/>
+                </a:solidFill>
+                <a:latin typeface="Aptos"/>
+              </a:rPr>
+              <a:t>Si la API falla, useMovies carga frontend/src/data/movies.js y avisa que muestra datos de demostración.</a:t>
             </a:r>
           </a:p>
         </p:txBody>
@@ -33650,11 +34726,11 @@
             <a:avLst/>
           </a:prstGeom>
           <a:solidFill>
-            <a:srgbClr val="36D3DD"/>
+            <a:srgbClr val="FF9E58"/>
           </a:solidFill>
           <a:ln>
             <a:solidFill>
-              <a:srgbClr val="36D3DD"/>
+              <a:srgbClr val="FF9E58"/>
             </a:solidFill>
           </a:ln>
         </p:spPr>
@@ -33706,11 +34782,11 @@
             <a:r>
               <a:rPr sz="1200" b="1">
                 <a:solidFill>
-                  <a:srgbClr val="36D3DD"/>
-                </a:solidFill>
-                <a:latin typeface="Aptos"/>
-              </a:rPr>
-              <a:t>PARTE 1</a:t>
+                  <a:srgbClr val="FF9E58"/>
+                </a:solidFill>
+                <a:latin typeface="Aptos"/>
+              </a:rPr>
+              <a:t>PARTE 2</a:t>
             </a:r>
           </a:p>
         </p:txBody>
@@ -33745,7 +34821,7 @@
                 </a:solidFill>
                 <a:latin typeface="Aptos"/>
               </a:rPr>
-              <a:t>05</a:t>
+              <a:t>15</a:t>
             </a:r>
           </a:p>
         </p:txBody>
@@ -33780,7 +34856,7 @@
                 </a:solidFill>
                 <a:latin typeface="Aptos"/>
               </a:rPr>
-              <a:t>Backend Symfony</a:t>
+              <a:t>Frontend React</a:t>
             </a:r>
           </a:p>
         </p:txBody>
@@ -33815,7 +34891,7 @@
                 </a:solidFill>
                 <a:latin typeface="Aptos"/>
               </a:rPr>
-              <a:t>Dónde viven los endpoints, cómo se validan parámetros y cómo Repository, Doctrine ORM y MariaDB obtienen los datos.</a:t>
+              <a:t>Cómo se organiza la interfaz, qué son los componentes y hooks, y cómo el navegador utiliza HTTP para pedir datos.</a:t>
             </a:r>
           </a:p>
         </p:txBody>
@@ -33835,11 +34911,11 @@
             <a:avLst/>
           </a:prstGeom>
           <a:solidFill>
-            <a:srgbClr val="36D3DD"/>
+            <a:srgbClr val="FF9E58"/>
           </a:solidFill>
           <a:ln>
             <a:solidFill>
-              <a:srgbClr val="36D3DD"/>
+              <a:srgbClr val="FF9E58"/>
             </a:solidFill>
           </a:ln>
         </p:spPr>
@@ -33941,11 +35017,11 @@
             <a:avLst/>
           </a:prstGeom>
           <a:solidFill>
-            <a:srgbClr val="53D68E"/>
+            <a:srgbClr val="36D3DD"/>
           </a:solidFill>
           <a:ln>
             <a:solidFill>
-              <a:srgbClr val="53D68E"/>
+              <a:srgbClr val="36D3DD"/>
             </a:solidFill>
           </a:ln>
         </p:spPr>
@@ -33997,11 +35073,11 @@
             <a:r>
               <a:rPr sz="1200" b="1">
                 <a:solidFill>
-                  <a:srgbClr val="53D68E"/>
-                </a:solidFill>
-                <a:latin typeface="Aptos"/>
-              </a:rPr>
-              <a:t>PARTE 3</a:t>
+                  <a:srgbClr val="36D3DD"/>
+                </a:solidFill>
+                <a:latin typeface="Aptos"/>
+              </a:rPr>
+              <a:t>PARTE 1</a:t>
             </a:r>
           </a:p>
         </p:txBody>
@@ -34036,7 +35112,7 @@
                 </a:solidFill>
                 <a:latin typeface="Aptos"/>
               </a:rPr>
-              <a:t>25</a:t>
+              <a:t>05</a:t>
             </a:r>
           </a:p>
         </p:txBody>
@@ -34071,7 +35147,7 @@
                 </a:solidFill>
                 <a:latin typeface="Aptos"/>
               </a:rPr>
-              <a:t>Producción</a:t>
+              <a:t>Backend Symfony</a:t>
             </a:r>
           </a:p>
         </p:txBody>
@@ -34106,7 +35182,7 @@
                 </a:solidFill>
                 <a:latin typeface="Aptos"/>
               </a:rPr>
-              <a:t>Cómo transformar el proyecto local con XAMPP en una publicación segura y verificable dentro de Hostinger compartido.</a:t>
+              <a:t>Dónde viven los endpoints, cómo se validan parámetros y cómo Repository, Doctrine ORM y MariaDB obtienen los datos.</a:t>
             </a:r>
           </a:p>
         </p:txBody>
@@ -34121,6 +35197,112 @@
           <a:xfrm>
             <a:off x="704088" y="5029200"/>
             <a:ext cx="2011680" cy="73152"/>
+          </a:xfrm>
+          <a:prstGeom prst="rect">
+            <a:avLst/>
+          </a:prstGeom>
+          <a:solidFill>
+            <a:srgbClr val="36D3DD"/>
+          </a:solidFill>
+          <a:ln>
+            <a:solidFill>
+              <a:srgbClr val="36D3DD"/>
+            </a:solidFill>
+          </a:ln>
+        </p:spPr>
+        <p:style>
+          <a:lnRef idx="1">
+            <a:schemeClr val="accent1"/>
+          </a:lnRef>
+          <a:fillRef idx="3">
+            <a:schemeClr val="accent1"/>
+          </a:fillRef>
+          <a:effectRef idx="2">
+            <a:schemeClr val="accent1"/>
+          </a:effectRef>
+          <a:fontRef idx="minor">
+            <a:schemeClr val="lt1"/>
+          </a:fontRef>
+        </p:style>
+        <p:txBody>
+          <a:bodyPr rtlCol="0" anchor="ctr"/>
+          <a:lstStyle/>
+          <a:p>
+            <a:pPr algn="ctr"/>
+          </a:p>
+        </p:txBody>
+      </p:sp>
+      <p:sp>
+        <p:nvSpPr>
+          <p:cNvPr id="8" name="TextBox 7"/>
+          <p:cNvSpPr txBox="1"/>
+          <p:nvPr/>
+        </p:nvSpPr>
+        <p:spPr>
+          <a:xfrm>
+            <a:off x="704088" y="6080760"/>
+            <a:ext cx="3657600" cy="182880"/>
+          </a:xfrm>
+          <a:prstGeom prst="rect">
+            <a:avLst/>
+          </a:prstGeom>
+          <a:noFill/>
+        </p:spPr>
+        <p:txBody>
+          <a:bodyPr wrap="none" lIns="36576" rIns="36576">
+            <a:spAutoFit/>
+          </a:bodyPr>
+          <a:lstStyle/>
+          <a:p>
+            <a:pPr algn="l"/>
+            <a:r>
+              <a:rPr sz="900" b="1">
+                <a:solidFill>
+                  <a:srgbClr val="B1BBCC"/>
+                </a:solidFill>
+                <a:latin typeface="Aptos"/>
+              </a:rPr>
+              <a:t>CINE APP · RECORRIDO DIDÁCTICO</a:t>
+            </a:r>
+          </a:p>
+        </p:txBody>
+      </p:sp>
+    </p:spTree>
+  </p:cSld>
+  <p:clrMapOvr>
+    <a:masterClrMapping/>
+  </p:clrMapOvr>
+</p:sld>
+</file>
+
+<file path=ppt/slides/slide36.xml><?xml version="1.0" encoding="utf-8"?>
+<p:sld xmlns:a="http://schemas.openxmlformats.org/drawingml/2006/main" xmlns:p="http://schemas.openxmlformats.org/presentationml/2006/main" xmlns:r="http://schemas.openxmlformats.org/officeDocument/2006/relationships">
+  <p:cSld>
+    <p:bg>
+      <p:bgPr>
+        <a:solidFill>
+          <a:srgbClr val="0C1323"/>
+        </a:solidFill>
+        <a:effectLst/>
+      </p:bgPr>
+    </p:bg>
+    <p:spTree>
+      <p:nvGrpSpPr>
+        <p:cNvPr id="1" name=""/>
+        <p:cNvGrpSpPr/>
+        <p:nvPr/>
+      </p:nvGrpSpPr>
+      <p:grpSpPr/>
+      <p:sp>
+        <p:nvSpPr>
+          <p:cNvPr id="2" name="Rectangle 1"/>
+          <p:cNvSpPr/>
+          <p:nvPr/>
+        </p:nvSpPr>
+        <p:spPr>
+          <a:xfrm>
+            <a:off x="0" y="0"/>
+            <a:ext cx="164592" cy="6858000"/>
           </a:xfrm>
           <a:prstGeom prst="rect">
             <a:avLst/>
@@ -34158,6 +35340,191 @@
       </p:sp>
       <p:sp>
         <p:nvSpPr>
+          <p:cNvPr id="3" name="TextBox 2"/>
+          <p:cNvSpPr txBox="1"/>
+          <p:nvPr/>
+        </p:nvSpPr>
+        <p:spPr>
+          <a:xfrm>
+            <a:off x="685800" y="685800"/>
+            <a:ext cx="3657600" cy="274320"/>
+          </a:xfrm>
+          <a:prstGeom prst="rect">
+            <a:avLst/>
+          </a:prstGeom>
+          <a:noFill/>
+        </p:spPr>
+        <p:txBody>
+          <a:bodyPr wrap="none" lIns="36576" rIns="36576">
+            <a:spAutoFit/>
+          </a:bodyPr>
+          <a:lstStyle/>
+          <a:p>
+            <a:pPr algn="l"/>
+            <a:r>
+              <a:rPr sz="1200" b="1">
+                <a:solidFill>
+                  <a:srgbClr val="53D68E"/>
+                </a:solidFill>
+                <a:latin typeface="Aptos"/>
+              </a:rPr>
+              <a:t>PARTE 3</a:t>
+            </a:r>
+          </a:p>
+        </p:txBody>
+      </p:sp>
+      <p:sp>
+        <p:nvSpPr>
+          <p:cNvPr id="4" name="TextBox 3"/>
+          <p:cNvSpPr txBox="1"/>
+          <p:nvPr/>
+        </p:nvSpPr>
+        <p:spPr>
+          <a:xfrm>
+            <a:off x="11018520" y="658368"/>
+            <a:ext cx="594360" cy="274320"/>
+          </a:xfrm>
+          <a:prstGeom prst="rect">
+            <a:avLst/>
+          </a:prstGeom>
+          <a:noFill/>
+        </p:spPr>
+        <p:txBody>
+          <a:bodyPr wrap="none" lIns="36576" rIns="36576">
+            <a:spAutoFit/>
+          </a:bodyPr>
+          <a:lstStyle/>
+          <a:p>
+            <a:pPr algn="r"/>
+            <a:r>
+              <a:rPr sz="1100" b="1">
+                <a:solidFill>
+                  <a:srgbClr val="B1BBCC"/>
+                </a:solidFill>
+                <a:latin typeface="Aptos"/>
+              </a:rPr>
+              <a:t>27</a:t>
+            </a:r>
+          </a:p>
+        </p:txBody>
+      </p:sp>
+      <p:sp>
+        <p:nvSpPr>
+          <p:cNvPr id="5" name="TextBox 4"/>
+          <p:cNvSpPr txBox="1"/>
+          <p:nvPr/>
+        </p:nvSpPr>
+        <p:spPr>
+          <a:xfrm>
+            <a:off x="667512" y="1965960"/>
+            <a:ext cx="9966960" cy="1051560"/>
+          </a:xfrm>
+          <a:prstGeom prst="rect">
+            <a:avLst/>
+          </a:prstGeom>
+          <a:noFill/>
+        </p:spPr>
+        <p:txBody>
+          <a:bodyPr wrap="none" lIns="36576" rIns="36576">
+            <a:spAutoFit/>
+          </a:bodyPr>
+          <a:lstStyle/>
+          <a:p>
+            <a:pPr algn="l"/>
+            <a:r>
+              <a:rPr sz="3800" b="1">
+                <a:solidFill>
+                  <a:srgbClr val="FFFFFF"/>
+                </a:solidFill>
+                <a:latin typeface="Aptos"/>
+              </a:rPr>
+              <a:t>Producción</a:t>
+            </a:r>
+          </a:p>
+        </p:txBody>
+      </p:sp>
+      <p:sp>
+        <p:nvSpPr>
+          <p:cNvPr id="6" name="TextBox 5"/>
+          <p:cNvSpPr txBox="1"/>
+          <p:nvPr/>
+        </p:nvSpPr>
+        <p:spPr>
+          <a:xfrm>
+            <a:off x="704088" y="3337560"/>
+            <a:ext cx="9784080" cy="1097280"/>
+          </a:xfrm>
+          <a:prstGeom prst="rect">
+            <a:avLst/>
+          </a:prstGeom>
+          <a:noFill/>
+        </p:spPr>
+        <p:txBody>
+          <a:bodyPr wrap="none" lIns="36576" rIns="36576">
+            <a:spAutoFit/>
+          </a:bodyPr>
+          <a:lstStyle/>
+          <a:p>
+            <a:pPr algn="l"/>
+            <a:r>
+              <a:rPr sz="1800" b="0">
+                <a:solidFill>
+                  <a:srgbClr val="B1BBCC"/>
+                </a:solidFill>
+                <a:latin typeface="Aptos"/>
+              </a:rPr>
+              <a:t>Cómo transformar el proyecto local con XAMPP en una publicación segura y verificable dentro de Hostinger compartido.</a:t>
+            </a:r>
+          </a:p>
+        </p:txBody>
+      </p:sp>
+      <p:sp>
+        <p:nvSpPr>
+          <p:cNvPr id="7" name="Rectangle 6"/>
+          <p:cNvSpPr/>
+          <p:nvPr/>
+        </p:nvSpPr>
+        <p:spPr>
+          <a:xfrm>
+            <a:off x="704088" y="5029200"/>
+            <a:ext cx="2011680" cy="73152"/>
+          </a:xfrm>
+          <a:prstGeom prst="rect">
+            <a:avLst/>
+          </a:prstGeom>
+          <a:solidFill>
+            <a:srgbClr val="53D68E"/>
+          </a:solidFill>
+          <a:ln>
+            <a:solidFill>
+              <a:srgbClr val="53D68E"/>
+            </a:solidFill>
+          </a:ln>
+        </p:spPr>
+        <p:style>
+          <a:lnRef idx="1">
+            <a:schemeClr val="accent1"/>
+          </a:lnRef>
+          <a:fillRef idx="3">
+            <a:schemeClr val="accent1"/>
+          </a:fillRef>
+          <a:effectRef idx="2">
+            <a:schemeClr val="accent1"/>
+          </a:effectRef>
+          <a:fontRef idx="minor">
+            <a:schemeClr val="lt1"/>
+          </a:fontRef>
+        </p:style>
+        <p:txBody>
+          <a:bodyPr rtlCol="0" anchor="ctr"/>
+          <a:lstStyle/>
+          <a:p>
+            <a:pPr algn="ctr"/>
+          </a:p>
+        </p:txBody>
+      </p:sp>
+      <p:sp>
+        <p:nvSpPr>
           <p:cNvPr id="8" name="TextBox 7"/>
           <p:cNvSpPr txBox="1"/>
           <p:nvPr/>
@@ -34187,6 +35554,1228 @@
                 <a:latin typeface="Aptos"/>
               </a:rPr>
               <a:t>CINE APP · RECORRIDO DIDÁCTICO</a:t>
+            </a:r>
+          </a:p>
+        </p:txBody>
+      </p:sp>
+    </p:spTree>
+  </p:cSld>
+  <p:clrMapOvr>
+    <a:masterClrMapping/>
+  </p:clrMapOvr>
+</p:sld>
+</file>
+
+<file path=ppt/slides/slide37.xml><?xml version="1.0" encoding="utf-8"?>
+<p:sld xmlns:a="http://schemas.openxmlformats.org/drawingml/2006/main" xmlns:p="http://schemas.openxmlformats.org/presentationml/2006/main" xmlns:r="http://schemas.openxmlformats.org/officeDocument/2006/relationships">
+  <p:cSld>
+    <p:bg>
+      <p:bgPr>
+        <a:solidFill>
+          <a:srgbClr val="0C1323"/>
+        </a:solidFill>
+        <a:effectLst/>
+      </p:bgPr>
+    </p:bg>
+    <p:spTree>
+      <p:nvGrpSpPr>
+        <p:cNvPr id="1" name=""/>
+        <p:cNvGrpSpPr/>
+        <p:nvPr/>
+      </p:nvGrpSpPr>
+      <p:grpSpPr/>
+      <p:sp>
+        <p:nvSpPr>
+          <p:cNvPr id="2" name="Rectangle 1"/>
+          <p:cNvSpPr/>
+          <p:nvPr/>
+        </p:nvSpPr>
+        <p:spPr>
+          <a:xfrm>
+            <a:off x="0" y="0"/>
+            <a:ext cx="118872" cy="6858000"/>
+          </a:xfrm>
+          <a:prstGeom prst="rect">
+            <a:avLst/>
+          </a:prstGeom>
+          <a:solidFill>
+            <a:srgbClr val="53D68E"/>
+          </a:solidFill>
+          <a:ln>
+            <a:solidFill>
+              <a:srgbClr val="53D68E"/>
+            </a:solidFill>
+          </a:ln>
+        </p:spPr>
+        <p:style>
+          <a:lnRef idx="1">
+            <a:schemeClr val="accent1"/>
+          </a:lnRef>
+          <a:fillRef idx="3">
+            <a:schemeClr val="accent1"/>
+          </a:fillRef>
+          <a:effectRef idx="2">
+            <a:schemeClr val="accent1"/>
+          </a:effectRef>
+          <a:fontRef idx="minor">
+            <a:schemeClr val="lt1"/>
+          </a:fontRef>
+        </p:style>
+        <p:txBody>
+          <a:bodyPr rtlCol="0" anchor="ctr"/>
+          <a:lstStyle/>
+          <a:p>
+            <a:pPr algn="ctr"/>
+          </a:p>
+        </p:txBody>
+      </p:sp>
+      <p:sp>
+        <p:nvSpPr>
+          <p:cNvPr id="3" name="TextBox 2"/>
+          <p:cNvSpPr txBox="1"/>
+          <p:nvPr/>
+        </p:nvSpPr>
+        <p:spPr>
+          <a:xfrm>
+            <a:off x="502920" y="320040"/>
+            <a:ext cx="2743200" cy="228600"/>
+          </a:xfrm>
+          <a:prstGeom prst="rect">
+            <a:avLst/>
+          </a:prstGeom>
+          <a:noFill/>
+        </p:spPr>
+        <p:txBody>
+          <a:bodyPr wrap="none" lIns="36576" rIns="36576">
+            <a:spAutoFit/>
+          </a:bodyPr>
+          <a:lstStyle/>
+          <a:p>
+            <a:pPr algn="l"/>
+            <a:r>
+              <a:rPr sz="1000" b="1">
+                <a:solidFill>
+                  <a:srgbClr val="53D68E"/>
+                </a:solidFill>
+                <a:latin typeface="Aptos"/>
+              </a:rPr>
+              <a:t>COMPONENTES</a:t>
+            </a:r>
+          </a:p>
+        </p:txBody>
+      </p:sp>
+      <p:sp>
+        <p:nvSpPr>
+          <p:cNvPr id="4" name="TextBox 3"/>
+          <p:cNvSpPr txBox="1"/>
+          <p:nvPr/>
+        </p:nvSpPr>
+        <p:spPr>
+          <a:xfrm>
+            <a:off x="11109960" y="320040"/>
+            <a:ext cx="502920" cy="228600"/>
+          </a:xfrm>
+          <a:prstGeom prst="rect">
+            <a:avLst/>
+          </a:prstGeom>
+          <a:noFill/>
+        </p:spPr>
+        <p:txBody>
+          <a:bodyPr wrap="none" lIns="36576" rIns="36576">
+            <a:spAutoFit/>
+          </a:bodyPr>
+          <a:lstStyle/>
+          <a:p>
+            <a:pPr algn="r"/>
+            <a:r>
+              <a:rPr sz="1000" b="1">
+                <a:solidFill>
+                  <a:srgbClr val="B1BBCC"/>
+                </a:solidFill>
+                <a:latin typeface="Aptos"/>
+              </a:rPr>
+              <a:t>19</a:t>
+            </a:r>
+          </a:p>
+        </p:txBody>
+      </p:sp>
+      <p:sp>
+        <p:nvSpPr>
+          <p:cNvPr id="5" name="TextBox 4"/>
+          <p:cNvSpPr txBox="1"/>
+          <p:nvPr/>
+        </p:nvSpPr>
+        <p:spPr>
+          <a:xfrm>
+            <a:off x="502920" y="758952"/>
+            <a:ext cx="10698480" cy="502920"/>
+          </a:xfrm>
+          <a:prstGeom prst="rect">
+            <a:avLst/>
+          </a:prstGeom>
+          <a:noFill/>
+        </p:spPr>
+        <p:txBody>
+          <a:bodyPr wrap="none" lIns="36576" rIns="36576">
+            <a:spAutoFit/>
+          </a:bodyPr>
+          <a:lstStyle/>
+          <a:p>
+            <a:pPr algn="l"/>
+            <a:r>
+              <a:rPr sz="2700" b="1">
+                <a:solidFill>
+                  <a:srgbClr val="FFFFFF"/>
+                </a:solidFill>
+                <a:latin typeface="Aptos"/>
+              </a:rPr>
+              <a:t>Ejemplo simple: el componente Poster</a:t>
+            </a:r>
+          </a:p>
+        </p:txBody>
+      </p:sp>
+      <p:sp>
+        <p:nvSpPr>
+          <p:cNvPr id="6" name="TextBox 5"/>
+          <p:cNvSpPr txBox="1"/>
+          <p:nvPr/>
+        </p:nvSpPr>
+        <p:spPr>
+          <a:xfrm>
+            <a:off x="530352" y="1353312"/>
+            <a:ext cx="10607040" cy="365760"/>
+          </a:xfrm>
+          <a:prstGeom prst="rect">
+            <a:avLst/>
+          </a:prstGeom>
+          <a:noFill/>
+        </p:spPr>
+        <p:txBody>
+          <a:bodyPr wrap="none" lIns="36576" rIns="36576">
+            <a:spAutoFit/>
+          </a:bodyPr>
+          <a:lstStyle/>
+          <a:p>
+            <a:pPr algn="l"/>
+            <a:r>
+              <a:rPr sz="1300" b="0">
+                <a:solidFill>
+                  <a:srgbClr val="B1BBCC"/>
+                </a:solidFill>
+                <a:latin typeface="Aptos"/>
+              </a:rPr>
+              <a:t>Una pieza pequeña se define una sola vez y recibe datos distintos mediante props.</a:t>
+            </a:r>
+          </a:p>
+        </p:txBody>
+      </p:sp>
+      <p:sp>
+        <p:nvSpPr>
+          <p:cNvPr id="7" name="TextBox 6"/>
+          <p:cNvSpPr txBox="1"/>
+          <p:nvPr/>
+        </p:nvSpPr>
+        <p:spPr>
+          <a:xfrm>
+            <a:off x="530352" y="6510528"/>
+            <a:ext cx="3657600" cy="164592"/>
+          </a:xfrm>
+          <a:prstGeom prst="rect">
+            <a:avLst/>
+          </a:prstGeom>
+          <a:noFill/>
+        </p:spPr>
+        <p:txBody>
+          <a:bodyPr wrap="none" lIns="36576" rIns="36576">
+            <a:spAutoFit/>
+          </a:bodyPr>
+          <a:lstStyle/>
+          <a:p>
+            <a:pPr algn="l"/>
+            <a:r>
+              <a:rPr sz="800" b="1">
+                <a:solidFill>
+                  <a:srgbClr val="B1BBCC"/>
+                </a:solidFill>
+                <a:latin typeface="Aptos"/>
+              </a:rPr>
+              <a:t>CINE APP · HOSTINGER COMPARTIDO</a:t>
+            </a:r>
+          </a:p>
+        </p:txBody>
+      </p:sp>
+      <p:sp>
+        <p:nvSpPr>
+          <p:cNvPr id="8" name="Rounded Rectangle 7"/>
+          <p:cNvSpPr/>
+          <p:nvPr/>
+        </p:nvSpPr>
+        <p:spPr>
+          <a:xfrm>
+            <a:off x="411480" y="1783080"/>
+            <a:ext cx="5806440" cy="3611880"/>
+          </a:xfrm>
+          <a:prstGeom prst="roundRect">
+            <a:avLst/>
+          </a:prstGeom>
+          <a:solidFill>
+            <a:srgbClr val="172238"/>
+          </a:solidFill>
+          <a:ln>
+            <a:solidFill>
+              <a:srgbClr val="2A3950"/>
+            </a:solidFill>
+          </a:ln>
+        </p:spPr>
+        <p:style>
+          <a:lnRef idx="1">
+            <a:schemeClr val="accent1"/>
+          </a:lnRef>
+          <a:fillRef idx="3">
+            <a:schemeClr val="accent1"/>
+          </a:fillRef>
+          <a:effectRef idx="2">
+            <a:schemeClr val="accent1"/>
+          </a:effectRef>
+          <a:fontRef idx="minor">
+            <a:schemeClr val="lt1"/>
+          </a:fontRef>
+        </p:style>
+        <p:txBody>
+          <a:bodyPr rtlCol="0" anchor="ctr"/>
+          <a:lstStyle/>
+          <a:p>
+            <a:pPr algn="ctr"/>
+          </a:p>
+        </p:txBody>
+      </p:sp>
+      <p:sp>
+        <p:nvSpPr>
+          <p:cNvPr id="9" name="TextBox 8"/>
+          <p:cNvSpPr txBox="1"/>
+          <p:nvPr/>
+        </p:nvSpPr>
+        <p:spPr>
+          <a:xfrm>
+            <a:off x="658368" y="1993392"/>
+            <a:ext cx="5303520" cy="274320"/>
+          </a:xfrm>
+          <a:prstGeom prst="rect">
+            <a:avLst/>
+          </a:prstGeom>
+          <a:noFill/>
+        </p:spPr>
+        <p:txBody>
+          <a:bodyPr wrap="none" lIns="36576" rIns="36576">
+            <a:spAutoFit/>
+          </a:bodyPr>
+          <a:lstStyle/>
+          <a:p>
+            <a:pPr algn="l"/>
+            <a:r>
+              <a:rPr sz="1300" b="1">
+                <a:solidFill>
+                  <a:srgbClr val="36D3DD"/>
+                </a:solidFill>
+                <a:latin typeface="Consolas"/>
+              </a:rPr>
+              <a:t>frontend/src/components/movies/Poster.jsx</a:t>
+            </a:r>
+          </a:p>
+        </p:txBody>
+      </p:sp>
+      <p:sp>
+        <p:nvSpPr>
+          <p:cNvPr id="10" name="TextBox 9"/>
+          <p:cNvSpPr txBox="1"/>
+          <p:nvPr/>
+        </p:nvSpPr>
+        <p:spPr>
+          <a:xfrm>
+            <a:off x="658368" y="2423160"/>
+            <a:ext cx="5257800" cy="2697480"/>
+          </a:xfrm>
+          <a:prstGeom prst="rect">
+            <a:avLst/>
+          </a:prstGeom>
+          <a:noFill/>
+        </p:spPr>
+        <p:txBody>
+          <a:bodyPr wrap="none" lIns="36576" rIns="36576">
+            <a:spAutoFit/>
+          </a:bodyPr>
+          <a:lstStyle/>
+          <a:p>
+            <a:pPr algn="l"/>
+            <a:r>
+              <a:rPr sz="1200" b="0">
+                <a:solidFill>
+                  <a:srgbClr val="FFFFFF"/>
+                </a:solidFill>
+                <a:latin typeface="Consolas"/>
+              </a:rPr>
+              <a:t>export function Poster({ movie, large = false }) {</a:t>
+            </a:r>
+            <a:br/>
+            <a:r>
+              <a:rPr sz="1200" b="0">
+                <a:solidFill>
+                  <a:srgbClr val="FFFFFF"/>
+                </a:solidFill>
+                <a:latin typeface="Consolas"/>
+              </a:rPr>
+              <a:t>  return (</a:t>
+            </a:r>
+            <a:br/>
+            <a:r>
+              <a:rPr sz="1200" b="0">
+                <a:solidFill>
+                  <a:srgbClr val="FFFFFF"/>
+                </a:solidFill>
+                <a:latin typeface="Consolas"/>
+              </a:rPr>
+              <a:t>    &lt;div</a:t>
+            </a:r>
+            <a:br/>
+            <a:r>
+              <a:rPr sz="1200" b="0">
+                <a:solidFill>
+                  <a:srgbClr val="FFFFFF"/>
+                </a:solidFill>
+                <a:latin typeface="Consolas"/>
+              </a:rPr>
+              <a:t>      className={`poster ${large ? 'poster-large' : ''}`}</a:t>
+            </a:r>
+            <a:br/>
+            <a:r>
+              <a:rPr sz="1200" b="0">
+                <a:solidFill>
+                  <a:srgbClr val="FFFFFF"/>
+                </a:solidFill>
+                <a:latin typeface="Consolas"/>
+              </a:rPr>
+              <a:t>      style={{ '--c1': movie.colors[0],</a:t>
+            </a:r>
+            <a:br/>
+            <a:r>
+              <a:rPr sz="1200" b="0">
+                <a:solidFill>
+                  <a:srgbClr val="FFFFFF"/>
+                </a:solidFill>
+                <a:latin typeface="Consolas"/>
+              </a:rPr>
+              <a:t>               '--c2': movie.colors[1] }}</a:t>
+            </a:r>
+            <a:br/>
+            <a:r>
+              <a:rPr sz="1200" b="0">
+                <a:solidFill>
+                  <a:srgbClr val="FFFFFF"/>
+                </a:solidFill>
+                <a:latin typeface="Consolas"/>
+              </a:rPr>
+              <a:t>    &gt;</a:t>
+            </a:r>
+            <a:br/>
+            <a:r>
+              <a:rPr sz="1200" b="0">
+                <a:solidFill>
+                  <a:srgbClr val="FFFFFF"/>
+                </a:solidFill>
+                <a:latin typeface="Consolas"/>
+              </a:rPr>
+              <a:t>      &lt;span&gt;CINE MAX&lt;/span&gt;</a:t>
+            </a:r>
+            <a:br/>
+            <a:r>
+              <a:rPr sz="1200" b="0">
+                <a:solidFill>
+                  <a:srgbClr val="FFFFFF"/>
+                </a:solidFill>
+                <a:latin typeface="Consolas"/>
+              </a:rPr>
+              <a:t>      &lt;strong&gt;{movie.short}&lt;/strong&gt;</a:t>
+            </a:r>
+            <a:br/>
+            <a:r>
+              <a:rPr sz="1200" b="0">
+                <a:solidFill>
+                  <a:srgbClr val="FFFFFF"/>
+                </a:solidFill>
+                <a:latin typeface="Consolas"/>
+              </a:rPr>
+              <a:t>      &lt;small&gt;Solo en cines&lt;/small&gt;</a:t>
+            </a:r>
+            <a:br/>
+            <a:r>
+              <a:rPr sz="1200" b="0">
+                <a:solidFill>
+                  <a:srgbClr val="FFFFFF"/>
+                </a:solidFill>
+                <a:latin typeface="Consolas"/>
+              </a:rPr>
+              <a:t>    &lt;/div&gt;</a:t>
+            </a:r>
+            <a:br/>
+            <a:r>
+              <a:rPr sz="1200" b="0">
+                <a:solidFill>
+                  <a:srgbClr val="FFFFFF"/>
+                </a:solidFill>
+                <a:latin typeface="Consolas"/>
+              </a:rPr>
+              <a:t>  );</a:t>
+            </a:r>
+            <a:br/>
+            <a:r>
+              <a:rPr sz="1200" b="0">
+                <a:solidFill>
+                  <a:srgbClr val="FFFFFF"/>
+                </a:solidFill>
+                <a:latin typeface="Consolas"/>
+              </a:rPr>
+              <a:t>}</a:t>
+            </a:r>
+          </a:p>
+        </p:txBody>
+      </p:sp>
+      <p:sp>
+        <p:nvSpPr>
+          <p:cNvPr id="11" name="Rounded Rectangle 10"/>
+          <p:cNvSpPr/>
+          <p:nvPr/>
+        </p:nvSpPr>
+        <p:spPr>
+          <a:xfrm>
+            <a:off x="6537960" y="1783080"/>
+            <a:ext cx="5212080" cy="1143000"/>
+          </a:xfrm>
+          <a:prstGeom prst="roundRect">
+            <a:avLst/>
+          </a:prstGeom>
+          <a:solidFill>
+            <a:srgbClr val="172238"/>
+          </a:solidFill>
+          <a:ln>
+            <a:solidFill>
+              <a:srgbClr val="2A3950"/>
+            </a:solidFill>
+          </a:ln>
+        </p:spPr>
+        <p:style>
+          <a:lnRef idx="1">
+            <a:schemeClr val="accent1"/>
+          </a:lnRef>
+          <a:fillRef idx="3">
+            <a:schemeClr val="accent1"/>
+          </a:fillRef>
+          <a:effectRef idx="2">
+            <a:schemeClr val="accent1"/>
+          </a:effectRef>
+          <a:fontRef idx="minor">
+            <a:schemeClr val="lt1"/>
+          </a:fontRef>
+        </p:style>
+        <p:txBody>
+          <a:bodyPr rtlCol="0" anchor="ctr"/>
+          <a:lstStyle/>
+          <a:p>
+            <a:pPr algn="ctr"/>
+          </a:p>
+        </p:txBody>
+      </p:sp>
+      <p:sp>
+        <p:nvSpPr>
+          <p:cNvPr id="12" name="Rounded Rectangle 11"/>
+          <p:cNvSpPr/>
+          <p:nvPr/>
+        </p:nvSpPr>
+        <p:spPr>
+          <a:xfrm>
+            <a:off x="6537960" y="1783080"/>
+            <a:ext cx="64008" cy="1143000"/>
+          </a:xfrm>
+          <a:prstGeom prst="roundRect">
+            <a:avLst/>
+          </a:prstGeom>
+          <a:solidFill>
+            <a:srgbClr val="FF9E58"/>
+          </a:solidFill>
+          <a:ln>
+            <a:solidFill>
+              <a:srgbClr val="FF9E58"/>
+            </a:solidFill>
+          </a:ln>
+        </p:spPr>
+        <p:style>
+          <a:lnRef idx="1">
+            <a:schemeClr val="accent1"/>
+          </a:lnRef>
+          <a:fillRef idx="3">
+            <a:schemeClr val="accent1"/>
+          </a:fillRef>
+          <a:effectRef idx="2">
+            <a:schemeClr val="accent1"/>
+          </a:effectRef>
+          <a:fontRef idx="minor">
+            <a:schemeClr val="lt1"/>
+          </a:fontRef>
+        </p:style>
+        <p:txBody>
+          <a:bodyPr rtlCol="0" anchor="ctr"/>
+          <a:lstStyle/>
+          <a:p>
+            <a:pPr algn="ctr"/>
+          </a:p>
+        </p:txBody>
+      </p:sp>
+      <p:sp>
+        <p:nvSpPr>
+          <p:cNvPr id="13" name="TextBox 12"/>
+          <p:cNvSpPr txBox="1"/>
+          <p:nvPr/>
+        </p:nvSpPr>
+        <p:spPr>
+          <a:xfrm>
+            <a:off x="6766560" y="1965960"/>
+            <a:ext cx="4800600" cy="292608"/>
+          </a:xfrm>
+          <a:prstGeom prst="rect">
+            <a:avLst/>
+          </a:prstGeom>
+          <a:noFill/>
+        </p:spPr>
+        <p:txBody>
+          <a:bodyPr wrap="none" lIns="36576" rIns="36576">
+            <a:spAutoFit/>
+          </a:bodyPr>
+          <a:lstStyle/>
+          <a:p>
+            <a:pPr algn="l"/>
+            <a:r>
+              <a:rPr sz="1500" b="1">
+                <a:solidFill>
+                  <a:srgbClr val="FFFFFF"/>
+                </a:solidFill>
+                <a:latin typeface="Aptos"/>
+              </a:rPr>
+              <a:t>QUÉ RECIBE</a:t>
+            </a:r>
+          </a:p>
+        </p:txBody>
+      </p:sp>
+      <p:sp>
+        <p:nvSpPr>
+          <p:cNvPr id="14" name="TextBox 13"/>
+          <p:cNvSpPr txBox="1"/>
+          <p:nvPr/>
+        </p:nvSpPr>
+        <p:spPr>
+          <a:xfrm>
+            <a:off x="6766560" y="2423160"/>
+            <a:ext cx="4800600" cy="365760"/>
+          </a:xfrm>
+          <a:prstGeom prst="rect">
+            <a:avLst/>
+          </a:prstGeom>
+          <a:noFill/>
+        </p:spPr>
+        <p:txBody>
+          <a:bodyPr wrap="none" lIns="36576" rIns="36576">
+            <a:spAutoFit/>
+          </a:bodyPr>
+          <a:lstStyle/>
+          <a:p>
+            <a:pPr algn="l"/>
+            <a:r>
+              <a:rPr sz="1250" b="0">
+                <a:solidFill>
+                  <a:srgbClr val="B1BBCC"/>
+                </a:solidFill>
+                <a:latin typeface="Aptos"/>
+              </a:rPr>
+              <a:t>movie: datos de la película.</a:t>
+            </a:r>
+            <a:br/>
+            <a:r>
+              <a:rPr sz="1250" b="0">
+                <a:solidFill>
+                  <a:srgbClr val="B1BBCC"/>
+                </a:solidFill>
+                <a:latin typeface="Aptos"/>
+              </a:rPr>
+              <a:t>large: decide si agrega la clase poster-large.</a:t>
+            </a:r>
+          </a:p>
+        </p:txBody>
+      </p:sp>
+      <p:sp>
+        <p:nvSpPr>
+          <p:cNvPr id="15" name="Rounded Rectangle 14"/>
+          <p:cNvSpPr/>
+          <p:nvPr/>
+        </p:nvSpPr>
+        <p:spPr>
+          <a:xfrm>
+            <a:off x="10698480" y="1947672"/>
+            <a:ext cx="777240" cy="274320"/>
+          </a:xfrm>
+          <a:prstGeom prst="roundRect">
+            <a:avLst/>
+          </a:prstGeom>
+          <a:solidFill>
+            <a:srgbClr val="FF9E58"/>
+          </a:solidFill>
+          <a:ln>
+            <a:solidFill>
+              <a:srgbClr val="FF9E58"/>
+            </a:solidFill>
+          </a:ln>
+        </p:spPr>
+        <p:style>
+          <a:lnRef idx="1">
+            <a:schemeClr val="accent1"/>
+          </a:lnRef>
+          <a:fillRef idx="3">
+            <a:schemeClr val="accent1"/>
+          </a:fillRef>
+          <a:effectRef idx="2">
+            <a:schemeClr val="accent1"/>
+          </a:effectRef>
+          <a:fontRef idx="minor">
+            <a:schemeClr val="lt1"/>
+          </a:fontRef>
+        </p:style>
+        <p:txBody>
+          <a:bodyPr rtlCol="0" anchor="ctr"/>
+          <a:lstStyle/>
+          <a:p>
+            <a:pPr algn="ctr"/>
+          </a:p>
+        </p:txBody>
+      </p:sp>
+      <p:sp>
+        <p:nvSpPr>
+          <p:cNvPr id="16" name="TextBox 15"/>
+          <p:cNvSpPr txBox="1"/>
+          <p:nvPr/>
+        </p:nvSpPr>
+        <p:spPr>
+          <a:xfrm>
+            <a:off x="10744200" y="1993392"/>
+            <a:ext cx="685800" cy="128016"/>
+          </a:xfrm>
+          <a:prstGeom prst="rect">
+            <a:avLst/>
+          </a:prstGeom>
+          <a:noFill/>
+        </p:spPr>
+        <p:txBody>
+          <a:bodyPr wrap="none" lIns="36576" rIns="36576">
+            <a:spAutoFit/>
+          </a:bodyPr>
+          <a:lstStyle/>
+          <a:p>
+            <a:pPr algn="ctr"/>
+            <a:r>
+              <a:rPr sz="800" b="1">
+                <a:solidFill>
+                  <a:srgbClr val="0C1323"/>
+                </a:solidFill>
+                <a:latin typeface="Aptos"/>
+              </a:rPr>
+              <a:t>PROPS</a:t>
+            </a:r>
+          </a:p>
+        </p:txBody>
+      </p:sp>
+      <p:sp>
+        <p:nvSpPr>
+          <p:cNvPr id="17" name="Rounded Rectangle 16"/>
+          <p:cNvSpPr/>
+          <p:nvPr/>
+        </p:nvSpPr>
+        <p:spPr>
+          <a:xfrm>
+            <a:off x="6537960" y="3154680"/>
+            <a:ext cx="5212080" cy="1417320"/>
+          </a:xfrm>
+          <a:prstGeom prst="roundRect">
+            <a:avLst/>
+          </a:prstGeom>
+          <a:solidFill>
+            <a:srgbClr val="172238"/>
+          </a:solidFill>
+          <a:ln>
+            <a:solidFill>
+              <a:srgbClr val="2A3950"/>
+            </a:solidFill>
+          </a:ln>
+        </p:spPr>
+        <p:style>
+          <a:lnRef idx="1">
+            <a:schemeClr val="accent1"/>
+          </a:lnRef>
+          <a:fillRef idx="3">
+            <a:schemeClr val="accent1"/>
+          </a:fillRef>
+          <a:effectRef idx="2">
+            <a:schemeClr val="accent1"/>
+          </a:effectRef>
+          <a:fontRef idx="minor">
+            <a:schemeClr val="lt1"/>
+          </a:fontRef>
+        </p:style>
+        <p:txBody>
+          <a:bodyPr rtlCol="0" anchor="ctr"/>
+          <a:lstStyle/>
+          <a:p>
+            <a:pPr algn="ctr"/>
+          </a:p>
+        </p:txBody>
+      </p:sp>
+      <p:sp>
+        <p:nvSpPr>
+          <p:cNvPr id="18" name="Rounded Rectangle 17"/>
+          <p:cNvSpPr/>
+          <p:nvPr/>
+        </p:nvSpPr>
+        <p:spPr>
+          <a:xfrm>
+            <a:off x="6537960" y="3154680"/>
+            <a:ext cx="64008" cy="1417320"/>
+          </a:xfrm>
+          <a:prstGeom prst="roundRect">
+            <a:avLst/>
+          </a:prstGeom>
+          <a:solidFill>
+            <a:srgbClr val="53D68E"/>
+          </a:solidFill>
+          <a:ln>
+            <a:solidFill>
+              <a:srgbClr val="53D68E"/>
+            </a:solidFill>
+          </a:ln>
+        </p:spPr>
+        <p:style>
+          <a:lnRef idx="1">
+            <a:schemeClr val="accent1"/>
+          </a:lnRef>
+          <a:fillRef idx="3">
+            <a:schemeClr val="accent1"/>
+          </a:fillRef>
+          <a:effectRef idx="2">
+            <a:schemeClr val="accent1"/>
+          </a:effectRef>
+          <a:fontRef idx="minor">
+            <a:schemeClr val="lt1"/>
+          </a:fontRef>
+        </p:style>
+        <p:txBody>
+          <a:bodyPr rtlCol="0" anchor="ctr"/>
+          <a:lstStyle/>
+          <a:p>
+            <a:pPr algn="ctr"/>
+          </a:p>
+        </p:txBody>
+      </p:sp>
+      <p:sp>
+        <p:nvSpPr>
+          <p:cNvPr id="19" name="TextBox 18"/>
+          <p:cNvSpPr txBox="1"/>
+          <p:nvPr/>
+        </p:nvSpPr>
+        <p:spPr>
+          <a:xfrm>
+            <a:off x="6766560" y="3337560"/>
+            <a:ext cx="4800600" cy="292608"/>
+          </a:xfrm>
+          <a:prstGeom prst="rect">
+            <a:avLst/>
+          </a:prstGeom>
+          <a:noFill/>
+        </p:spPr>
+        <p:txBody>
+          <a:bodyPr wrap="none" lIns="36576" rIns="36576">
+            <a:spAutoFit/>
+          </a:bodyPr>
+          <a:lstStyle/>
+          <a:p>
+            <a:pPr algn="l"/>
+            <a:r>
+              <a:rPr sz="1500" b="1">
+                <a:solidFill>
+                  <a:srgbClr val="FFFFFF"/>
+                </a:solidFill>
+                <a:latin typeface="Aptos"/>
+              </a:rPr>
+              <a:t>DÓNDE SE REUTILIZA</a:t>
+            </a:r>
+          </a:p>
+        </p:txBody>
+      </p:sp>
+      <p:sp>
+        <p:nvSpPr>
+          <p:cNvPr id="20" name="TextBox 19"/>
+          <p:cNvSpPr txBox="1"/>
+          <p:nvPr/>
+        </p:nvSpPr>
+        <p:spPr>
+          <a:xfrm>
+            <a:off x="6766560" y="3794760"/>
+            <a:ext cx="4800600" cy="640080"/>
+          </a:xfrm>
+          <a:prstGeom prst="rect">
+            <a:avLst/>
+          </a:prstGeom>
+          <a:noFill/>
+        </p:spPr>
+        <p:txBody>
+          <a:bodyPr wrap="none" lIns="36576" rIns="36576">
+            <a:spAutoFit/>
+          </a:bodyPr>
+          <a:lstStyle/>
+          <a:p>
+            <a:pPr algn="l"/>
+            <a:r>
+              <a:rPr sz="1250" b="0">
+                <a:solidFill>
+                  <a:srgbClr val="B1BBCC"/>
+                </a:solidFill>
+                <a:latin typeface="Aptos"/>
+              </a:rPr>
+              <a:t>Directamente: HomePage y MovieDetailPage.</a:t>
+            </a:r>
+            <a:br/>
+            <a:br/>
+            <a:r>
+              <a:rPr sz="1250" b="0">
+                <a:solidFill>
+                  <a:srgbClr val="B1BBCC"/>
+                </a:solidFill>
+                <a:latin typeface="Aptos"/>
+              </a:rPr>
+              <a:t>También dentro de MovieTile, FunctionCard y MiniMovie.</a:t>
+            </a:r>
+          </a:p>
+        </p:txBody>
+      </p:sp>
+      <p:sp>
+        <p:nvSpPr>
+          <p:cNvPr id="21" name="Rounded Rectangle 20"/>
+          <p:cNvSpPr/>
+          <p:nvPr/>
+        </p:nvSpPr>
+        <p:spPr>
+          <a:xfrm>
+            <a:off x="10698480" y="3319272"/>
+            <a:ext cx="777240" cy="274320"/>
+          </a:xfrm>
+          <a:prstGeom prst="roundRect">
+            <a:avLst/>
+          </a:prstGeom>
+          <a:solidFill>
+            <a:srgbClr val="53D68E"/>
+          </a:solidFill>
+          <a:ln>
+            <a:solidFill>
+              <a:srgbClr val="53D68E"/>
+            </a:solidFill>
+          </a:ln>
+        </p:spPr>
+        <p:style>
+          <a:lnRef idx="1">
+            <a:schemeClr val="accent1"/>
+          </a:lnRef>
+          <a:fillRef idx="3">
+            <a:schemeClr val="accent1"/>
+          </a:fillRef>
+          <a:effectRef idx="2">
+            <a:schemeClr val="accent1"/>
+          </a:effectRef>
+          <a:fontRef idx="minor">
+            <a:schemeClr val="lt1"/>
+          </a:fontRef>
+        </p:style>
+        <p:txBody>
+          <a:bodyPr rtlCol="0" anchor="ctr"/>
+          <a:lstStyle/>
+          <a:p>
+            <a:pPr algn="ctr"/>
+          </a:p>
+        </p:txBody>
+      </p:sp>
+      <p:sp>
+        <p:nvSpPr>
+          <p:cNvPr id="22" name="TextBox 21"/>
+          <p:cNvSpPr txBox="1"/>
+          <p:nvPr/>
+        </p:nvSpPr>
+        <p:spPr>
+          <a:xfrm>
+            <a:off x="10744200" y="3364992"/>
+            <a:ext cx="685800" cy="128016"/>
+          </a:xfrm>
+          <a:prstGeom prst="rect">
+            <a:avLst/>
+          </a:prstGeom>
+          <a:noFill/>
+        </p:spPr>
+        <p:txBody>
+          <a:bodyPr wrap="none" lIns="36576" rIns="36576">
+            <a:spAutoFit/>
+          </a:bodyPr>
+          <a:lstStyle/>
+          <a:p>
+            <a:pPr algn="ctr"/>
+            <a:r>
+              <a:rPr sz="800" b="1">
+                <a:solidFill>
+                  <a:srgbClr val="0C1323"/>
+                </a:solidFill>
+                <a:latin typeface="Aptos"/>
+              </a:rPr>
+              <a:t>5 USOS</a:t>
+            </a:r>
+          </a:p>
+        </p:txBody>
+      </p:sp>
+      <p:sp>
+        <p:nvSpPr>
+          <p:cNvPr id="23" name="Rounded Rectangle 22"/>
+          <p:cNvSpPr/>
+          <p:nvPr/>
+        </p:nvSpPr>
+        <p:spPr>
+          <a:xfrm>
+            <a:off x="6537960" y="4800600"/>
+            <a:ext cx="5212080" cy="1051560"/>
+          </a:xfrm>
+          <a:prstGeom prst="roundRect">
+            <a:avLst/>
+          </a:prstGeom>
+          <a:solidFill>
+            <a:srgbClr val="172238"/>
+          </a:solidFill>
+          <a:ln>
+            <a:solidFill>
+              <a:srgbClr val="2A3950"/>
+            </a:solidFill>
+          </a:ln>
+        </p:spPr>
+        <p:style>
+          <a:lnRef idx="1">
+            <a:schemeClr val="accent1"/>
+          </a:lnRef>
+          <a:fillRef idx="3">
+            <a:schemeClr val="accent1"/>
+          </a:fillRef>
+          <a:effectRef idx="2">
+            <a:schemeClr val="accent1"/>
+          </a:effectRef>
+          <a:fontRef idx="minor">
+            <a:schemeClr val="lt1"/>
+          </a:fontRef>
+        </p:style>
+        <p:txBody>
+          <a:bodyPr rtlCol="0" anchor="ctr"/>
+          <a:lstStyle/>
+          <a:p>
+            <a:pPr algn="ctr"/>
+          </a:p>
+        </p:txBody>
+      </p:sp>
+      <p:sp>
+        <p:nvSpPr>
+          <p:cNvPr id="24" name="Rounded Rectangle 23"/>
+          <p:cNvSpPr/>
+          <p:nvPr/>
+        </p:nvSpPr>
+        <p:spPr>
+          <a:xfrm>
+            <a:off x="6537960" y="4800600"/>
+            <a:ext cx="64008" cy="1051560"/>
+          </a:xfrm>
+          <a:prstGeom prst="roundRect">
+            <a:avLst/>
+          </a:prstGeom>
+          <a:solidFill>
+            <a:srgbClr val="36D3DD"/>
+          </a:solidFill>
+          <a:ln>
+            <a:solidFill>
+              <a:srgbClr val="36D3DD"/>
+            </a:solidFill>
+          </a:ln>
+        </p:spPr>
+        <p:style>
+          <a:lnRef idx="1">
+            <a:schemeClr val="accent1"/>
+          </a:lnRef>
+          <a:fillRef idx="3">
+            <a:schemeClr val="accent1"/>
+          </a:fillRef>
+          <a:effectRef idx="2">
+            <a:schemeClr val="accent1"/>
+          </a:effectRef>
+          <a:fontRef idx="minor">
+            <a:schemeClr val="lt1"/>
+          </a:fontRef>
+        </p:style>
+        <p:txBody>
+          <a:bodyPr rtlCol="0" anchor="ctr"/>
+          <a:lstStyle/>
+          <a:p>
+            <a:pPr algn="ctr"/>
+          </a:p>
+        </p:txBody>
+      </p:sp>
+      <p:sp>
+        <p:nvSpPr>
+          <p:cNvPr id="25" name="TextBox 24"/>
+          <p:cNvSpPr txBox="1"/>
+          <p:nvPr/>
+        </p:nvSpPr>
+        <p:spPr>
+          <a:xfrm>
+            <a:off x="6766560" y="4983480"/>
+            <a:ext cx="4800600" cy="292608"/>
+          </a:xfrm>
+          <a:prstGeom prst="rect">
+            <a:avLst/>
+          </a:prstGeom>
+          <a:noFill/>
+        </p:spPr>
+        <p:txBody>
+          <a:bodyPr wrap="none" lIns="36576" rIns="36576">
+            <a:spAutoFit/>
+          </a:bodyPr>
+          <a:lstStyle/>
+          <a:p>
+            <a:pPr algn="l"/>
+            <a:r>
+              <a:rPr sz="1500" b="1">
+                <a:solidFill>
+                  <a:srgbClr val="FFFFFF"/>
+                </a:solidFill>
+                <a:latin typeface="Aptos"/>
+              </a:rPr>
+              <a:t>VENTAJA</a:t>
+            </a:r>
+          </a:p>
+        </p:txBody>
+      </p:sp>
+      <p:sp>
+        <p:nvSpPr>
+          <p:cNvPr id="26" name="TextBox 25"/>
+          <p:cNvSpPr txBox="1"/>
+          <p:nvPr/>
+        </p:nvSpPr>
+        <p:spPr>
+          <a:xfrm>
+            <a:off x="6766560" y="5440680"/>
+            <a:ext cx="4800600" cy="274319"/>
+          </a:xfrm>
+          <a:prstGeom prst="rect">
+            <a:avLst/>
+          </a:prstGeom>
+          <a:noFill/>
+        </p:spPr>
+        <p:txBody>
+          <a:bodyPr wrap="none" lIns="36576" rIns="36576">
+            <a:spAutoFit/>
+          </a:bodyPr>
+          <a:lstStyle/>
+          <a:p>
+            <a:pPr algn="l"/>
+            <a:r>
+              <a:rPr sz="1250" b="0">
+                <a:solidFill>
+                  <a:srgbClr val="B1BBCC"/>
+                </a:solidFill>
+                <a:latin typeface="Aptos"/>
+              </a:rPr>
+              <a:t>Las páginas sólo escriben &lt;Poster movie={movie} large /&gt; y no repiten su estructura ni sus estilos.</a:t>
+            </a:r>
+          </a:p>
+        </p:txBody>
+      </p:sp>
+      <p:sp>
+        <p:nvSpPr>
+          <p:cNvPr id="27" name="Rounded Rectangle 26"/>
+          <p:cNvSpPr/>
+          <p:nvPr/>
+        </p:nvSpPr>
+        <p:spPr>
+          <a:xfrm>
+            <a:off x="10698480" y="4965192"/>
+            <a:ext cx="777240" cy="274320"/>
+          </a:xfrm>
+          <a:prstGeom prst="roundRect">
+            <a:avLst/>
+          </a:prstGeom>
+          <a:solidFill>
+            <a:srgbClr val="36D3DD"/>
+          </a:solidFill>
+          <a:ln>
+            <a:solidFill>
+              <a:srgbClr val="36D3DD"/>
+            </a:solidFill>
+          </a:ln>
+        </p:spPr>
+        <p:style>
+          <a:lnRef idx="1">
+            <a:schemeClr val="accent1"/>
+          </a:lnRef>
+          <a:fillRef idx="3">
+            <a:schemeClr val="accent1"/>
+          </a:fillRef>
+          <a:effectRef idx="2">
+            <a:schemeClr val="accent1"/>
+          </a:effectRef>
+          <a:fontRef idx="minor">
+            <a:schemeClr val="lt1"/>
+          </a:fontRef>
+        </p:style>
+        <p:txBody>
+          <a:bodyPr rtlCol="0" anchor="ctr"/>
+          <a:lstStyle/>
+          <a:p>
+            <a:pPr algn="ctr"/>
+          </a:p>
+        </p:txBody>
+      </p:sp>
+      <p:sp>
+        <p:nvSpPr>
+          <p:cNvPr id="28" name="TextBox 27"/>
+          <p:cNvSpPr txBox="1"/>
+          <p:nvPr/>
+        </p:nvSpPr>
+        <p:spPr>
+          <a:xfrm>
+            <a:off x="10744200" y="5010912"/>
+            <a:ext cx="685800" cy="128016"/>
+          </a:xfrm>
+          <a:prstGeom prst="rect">
+            <a:avLst/>
+          </a:prstGeom>
+          <a:noFill/>
+        </p:spPr>
+        <p:txBody>
+          <a:bodyPr wrap="none" lIns="36576" rIns="36576">
+            <a:spAutoFit/>
+          </a:bodyPr>
+          <a:lstStyle/>
+          <a:p>
+            <a:pPr algn="ctr"/>
+            <a:r>
+              <a:rPr sz="800" b="1">
+                <a:solidFill>
+                  <a:srgbClr val="0C1323"/>
+                </a:solidFill>
+                <a:latin typeface="Aptos"/>
+              </a:rPr>
+              <a:t>REUTILIZAR</a:t>
             </a:r>
           </a:p>
         </p:txBody>
@@ -34327,7 +36916,7 @@
                 </a:solidFill>
                 <a:latin typeface="Aptos"/>
               </a:rPr>
-              <a:t>27</a:t>
+              <a:t>29</a:t>
             </a:r>
           </a:p>
         </p:txBody>
@@ -35013,7 +37602,7 @@
                 </a:solidFill>
                 <a:latin typeface="Aptos"/>
               </a:rPr>
-              <a:t>28</a:t>
+              <a:t>30</a:t>
             </a:r>
           </a:p>
         </p:txBody>
@@ -35820,7 +38409,7 @@
                 </a:solidFill>
                 <a:latin typeface="Aptos"/>
               </a:rPr>
-              <a:t>30</a:t>
+              <a:t>32</a:t>
             </a:r>
           </a:p>
         </p:txBody>
@@ -37061,7 +39650,7 @@
                 </a:solidFill>
                 <a:latin typeface="Aptos"/>
               </a:rPr>
-              <a:t>31</a:t>
+              <a:t>33</a:t>
             </a:r>
           </a:p>
         </p:txBody>
@@ -37451,7 +40040,7 @@
                 </a:solidFill>
                 <a:latin typeface="Aptos"/>
               </a:rPr>
-              <a:t>CORS</a:t>
+              <a:t>CORS · ARCHIVO .env / .env.local</a:t>
             </a:r>
           </a:p>
         </p:txBody>
@@ -37486,7 +40075,38 @@
                 </a:solidFill>
                 <a:latin typeface="Aptos"/>
               </a:rPr>
-              <a:t>Permitir sólo https://tudominio.com si la API usa otro origen. Evitar * en operaciones sensibles.</a:t>
+              <a:t>Desarrollo:</a:t>
+            </a:r>
+            <a:br/>
+            <a:r>
+              <a:rPr sz="1250" b="0">
+                <a:solidFill>
+                  <a:srgbClr val="B1BBCC"/>
+                </a:solidFill>
+                <a:latin typeface="Aptos"/>
+              </a:rPr>
+              <a:t>CORS_ALLOW_ORIGIN=http://localhost:5173</a:t>
+            </a:r>
+            <a:br/>
+            <a:br/>
+            <a:r>
+              <a:rPr sz="1250" b="0">
+                <a:solidFill>
+                  <a:srgbClr val="B1BBCC"/>
+                </a:solidFill>
+                <a:latin typeface="Aptos"/>
+              </a:rPr>
+              <a:t>Producción:</a:t>
+            </a:r>
+            <a:br/>
+            <a:r>
+              <a:rPr sz="1250" b="0">
+                <a:solidFill>
+                  <a:srgbClr val="B1BBCC"/>
+                </a:solidFill>
+                <a:latin typeface="Aptos"/>
+              </a:rPr>
+              <a:t>CORS_ALLOW_ORIGIN=https://tudominio.com</a:t>
             </a:r>
           </a:p>
         </p:txBody>
@@ -38107,7 +40727,7 @@
                 </a:solidFill>
                 <a:latin typeface="Aptos"/>
               </a:rPr>
-              <a:t>19</a:t>
+              <a:t>21</a:t>
             </a:r>
           </a:p>
         </p:txBody>
@@ -38998,7 +41618,7 @@
                 </a:solidFill>
                 <a:latin typeface="Aptos"/>
               </a:rPr>
-              <a:t>20</a:t>
+              <a:t>22</a:t>
             </a:r>
           </a:p>
         </p:txBody>
